--- a/pictures/pic.pptx
+++ b/pictures/pic.pptx
@@ -6,9 +6,13 @@
   </p:sldMasterIdLst>
   <p:sldIdLst>
     <p:sldId id="256" r:id="rId3"/>
+    <p:sldId id="257" r:id="rId4"/>
   </p:sldIdLst>
   <p:sldSz cx="12192000" cy="6858000"/>
   <p:notesSz cx="6858000" cy="9144000"/>
+  <p:custDataLst>
+    <p:tags r:id="rId8"/>
+  </p:custDataLst>
   <p:defaultTextStyle>
     <a:defPPr>
       <a:defRPr lang="zh-CN"/>
@@ -107,12 +111,12 @@
   <p:extLst>
     <p:ext uri="{EFAFB233-063F-42B5-8137-9DF3F51BA10A}">
       <p15:sldGuideLst xmlns:p15="http://schemas.microsoft.com/office/powerpoint/2012/main">
-        <p15:guide id="1" orient="horz" pos="2190" userDrawn="1">
+        <p15:guide id="1" orient="horz" pos="2153" userDrawn="1">
           <p15:clr>
             <a:srgbClr val="A4A3A4"/>
           </p15:clr>
         </p15:guide>
-        <p15:guide id="2" pos="3844" userDrawn="1">
+        <p15:guide id="2" pos="3805" userDrawn="1">
           <p15:clr>
             <a:srgbClr val="A4A3A4"/>
           </p15:clr>
@@ -5015,6 +5019,2446 @@
 </p:sld>
 </file>
 
+<file path=ppt/slides/slide2.xml><?xml version="1.0" encoding="utf-8"?>
+<p:sld xmlns:a="http://schemas.openxmlformats.org/drawingml/2006/main" xmlns:r="http://schemas.openxmlformats.org/officeDocument/2006/relationships" xmlns:p="http://schemas.openxmlformats.org/presentationml/2006/main">
+  <p:cSld>
+    <p:spTree>
+      <p:nvGrpSpPr>
+        <p:cNvPr id="1" name=""/>
+        <p:cNvGrpSpPr/>
+        <p:nvPr/>
+      </p:nvGrpSpPr>
+      <p:grpSpPr/>
+      <p:sp>
+        <p:nvSpPr>
+          <p:cNvPr id="4" name="矩形 3"/>
+          <p:cNvSpPr/>
+          <p:nvPr/>
+        </p:nvSpPr>
+        <p:spPr>
+          <a:xfrm>
+            <a:off x="4450080" y="-711835"/>
+            <a:ext cx="3599815" cy="360045"/>
+          </a:xfrm>
+          <a:prstGeom prst="rect">
+            <a:avLst/>
+          </a:prstGeom>
+          <a:solidFill>
+            <a:schemeClr val="bg1"/>
+          </a:solidFill>
+          <a:ln>
+            <a:solidFill>
+              <a:schemeClr val="tx1"/>
+            </a:solidFill>
+          </a:ln>
+        </p:spPr>
+        <p:style>
+          <a:lnRef idx="2">
+            <a:schemeClr val="accent1">
+              <a:lumMod val="75000"/>
+            </a:schemeClr>
+          </a:lnRef>
+          <a:fillRef idx="1">
+            <a:schemeClr val="accent1"/>
+          </a:fillRef>
+          <a:effectRef idx="0">
+            <a:srgbClr val="FFFFFF"/>
+          </a:effectRef>
+          <a:fontRef idx="minor">
+            <a:schemeClr val="lt1"/>
+          </a:fontRef>
+        </p:style>
+        <p:txBody>
+          <a:bodyPr rtlCol="0" anchor="ctr"/>
+          <a:p>
+            <a:pPr algn="ctr"/>
+            <a:r>
+              <a:rPr lang="zh-CN" altLang="en-US" sz="1500" b="1">
+                <a:solidFill>
+                  <a:schemeClr val="tx1"/>
+                </a:solidFill>
+                <a:latin typeface="Times New Roman" panose="02020603050405020304" charset="0"/>
+                <a:ea typeface="微软雅黑" panose="020B0503020204020204" charset="-122"/>
+              </a:rPr>
+              <a:t>输入</a:t>
+            </a:r>
+            <a:r>
+              <a:rPr lang="zh-CN" altLang="en-US" sz="1500">
+                <a:solidFill>
+                  <a:schemeClr val="tx1"/>
+                </a:solidFill>
+                <a:latin typeface="Times New Roman" panose="02020603050405020304" charset="0"/>
+                <a:ea typeface="微软雅黑" panose="020B0503020204020204" charset="-122"/>
+              </a:rPr>
+              <a:t>：</a:t>
+            </a:r>
+            <a:r>
+              <a:rPr lang="en-US" altLang="zh-CN" sz="1500">
+                <a:solidFill>
+                  <a:schemeClr val="tx1"/>
+                </a:solidFill>
+                <a:latin typeface="Times New Roman" panose="02020603050405020304" charset="0"/>
+                <a:ea typeface="微软雅黑" panose="020B0503020204020204" charset="-122"/>
+              </a:rPr>
+              <a:t>Github</a:t>
+            </a:r>
+            <a:r>
+              <a:rPr lang="zh-CN" altLang="en-US" sz="1500">
+                <a:solidFill>
+                  <a:schemeClr val="tx1"/>
+                </a:solidFill>
+                <a:latin typeface="Times New Roman" panose="02020603050405020304" charset="0"/>
+                <a:ea typeface="微软雅黑" panose="020B0503020204020204" charset="-122"/>
+              </a:rPr>
+              <a:t>仓库链接</a:t>
+            </a:r>
+            <a:endParaRPr lang="zh-CN" altLang="en-US" sz="1500">
+              <a:solidFill>
+                <a:schemeClr val="tx1"/>
+              </a:solidFill>
+              <a:latin typeface="Times New Roman" panose="02020603050405020304" charset="0"/>
+              <a:ea typeface="微软雅黑" panose="020B0503020204020204" charset="-122"/>
+            </a:endParaRPr>
+          </a:p>
+        </p:txBody>
+      </p:sp>
+      <p:cxnSp>
+        <p:nvCxnSpPr>
+          <p:cNvPr id="16" name="直接箭头连接符 15"/>
+          <p:cNvCxnSpPr>
+            <a:stCxn id="4" idx="2"/>
+            <a:endCxn id="2" idx="0"/>
+          </p:cNvCxnSpPr>
+          <p:nvPr/>
+        </p:nvCxnSpPr>
+        <p:spPr>
+          <a:xfrm>
+            <a:off x="6250305" y="-351790"/>
+            <a:ext cx="0" cy="358140"/>
+          </a:xfrm>
+          <a:prstGeom prst="straightConnector1">
+            <a:avLst/>
+          </a:prstGeom>
+          <a:ln w="19050">
+            <a:solidFill>
+              <a:schemeClr val="tx1"/>
+            </a:solidFill>
+            <a:tailEnd type="triangle"/>
+          </a:ln>
+        </p:spPr>
+        <p:style>
+          <a:lnRef idx="2">
+            <a:schemeClr val="accent1"/>
+          </a:lnRef>
+          <a:fillRef idx="0">
+            <a:srgbClr val="FFFFFF"/>
+          </a:fillRef>
+          <a:effectRef idx="0">
+            <a:srgbClr val="FFFFFF"/>
+          </a:effectRef>
+          <a:fontRef idx="minor">
+            <a:schemeClr val="tx1"/>
+          </a:fontRef>
+        </p:style>
+      </p:cxnSp>
+      <p:sp>
+        <p:nvSpPr>
+          <p:cNvPr id="2" name="矩形 1"/>
+          <p:cNvSpPr/>
+          <p:nvPr/>
+        </p:nvSpPr>
+        <p:spPr>
+          <a:xfrm>
+            <a:off x="4450080" y="6350"/>
+            <a:ext cx="3599815" cy="539750"/>
+          </a:xfrm>
+          <a:prstGeom prst="rect">
+            <a:avLst/>
+          </a:prstGeom>
+          <a:solidFill>
+            <a:schemeClr val="bg1"/>
+          </a:solidFill>
+          <a:ln>
+            <a:solidFill>
+              <a:schemeClr val="tx1"/>
+            </a:solidFill>
+          </a:ln>
+        </p:spPr>
+        <p:style>
+          <a:lnRef idx="2">
+            <a:schemeClr val="accent1">
+              <a:lumMod val="75000"/>
+            </a:schemeClr>
+          </a:lnRef>
+          <a:fillRef idx="1">
+            <a:schemeClr val="accent1"/>
+          </a:fillRef>
+          <a:effectRef idx="0">
+            <a:srgbClr val="FFFFFF"/>
+          </a:effectRef>
+          <a:fontRef idx="minor">
+            <a:schemeClr val="lt1"/>
+          </a:fontRef>
+        </p:style>
+        <p:txBody>
+          <a:bodyPr rtlCol="0" anchor="ctr"/>
+          <a:p>
+            <a:pPr algn="ctr"/>
+            <a:r>
+              <a:rPr lang="en-US" altLang="zh-CN" sz="1500" b="1">
+                <a:solidFill>
+                  <a:schemeClr val="tx1"/>
+                </a:solidFill>
+                <a:latin typeface="Times New Roman" panose="02020603050405020304" charset="0"/>
+                <a:ea typeface="微软雅黑" panose="020B0503020204020204" charset="-122"/>
+              </a:rPr>
+              <a:t>Project Parser Agent</a:t>
+            </a:r>
+            <a:r>
+              <a:rPr lang="zh-CN" altLang="en-US" sz="1500">
+                <a:solidFill>
+                  <a:schemeClr val="tx1"/>
+                </a:solidFill>
+                <a:latin typeface="Times New Roman" panose="02020603050405020304" charset="0"/>
+                <a:ea typeface="微软雅黑" panose="020B0503020204020204" charset="-122"/>
+              </a:rPr>
+              <a:t>：</a:t>
+            </a:r>
+            <a:endParaRPr lang="zh-CN" altLang="en-US" sz="1500">
+              <a:solidFill>
+                <a:schemeClr val="tx1"/>
+              </a:solidFill>
+              <a:latin typeface="Times New Roman" panose="02020603050405020304" charset="0"/>
+              <a:ea typeface="微软雅黑" panose="020B0503020204020204" charset="-122"/>
+            </a:endParaRPr>
+          </a:p>
+          <a:p>
+            <a:pPr algn="ctr"/>
+            <a:r>
+              <a:rPr lang="zh-CN" altLang="en-US" sz="1500">
+                <a:solidFill>
+                  <a:schemeClr val="tx1"/>
+                </a:solidFill>
+                <a:latin typeface="Times New Roman" panose="02020603050405020304" charset="0"/>
+                <a:ea typeface="微软雅黑" panose="020B0503020204020204" charset="-122"/>
+              </a:rPr>
+              <a:t>提取项目基础信息</a:t>
+            </a:r>
+            <a:endParaRPr lang="zh-CN" altLang="en-US" sz="1500">
+              <a:solidFill>
+                <a:schemeClr val="tx1"/>
+              </a:solidFill>
+              <a:latin typeface="Times New Roman" panose="02020603050405020304" charset="0"/>
+              <a:ea typeface="微软雅黑" panose="020B0503020204020204" charset="-122"/>
+            </a:endParaRPr>
+          </a:p>
+        </p:txBody>
+      </p:sp>
+      <p:sp>
+        <p:nvSpPr>
+          <p:cNvPr id="3" name="矩形 2"/>
+          <p:cNvSpPr/>
+          <p:nvPr/>
+        </p:nvSpPr>
+        <p:spPr>
+          <a:xfrm>
+            <a:off x="4450080" y="904240"/>
+            <a:ext cx="3599815" cy="539750"/>
+          </a:xfrm>
+          <a:prstGeom prst="rect">
+            <a:avLst/>
+          </a:prstGeom>
+          <a:solidFill>
+            <a:schemeClr val="bg1"/>
+          </a:solidFill>
+          <a:ln>
+            <a:solidFill>
+              <a:schemeClr val="tx1"/>
+            </a:solidFill>
+          </a:ln>
+        </p:spPr>
+        <p:style>
+          <a:lnRef idx="2">
+            <a:schemeClr val="accent1">
+              <a:lumMod val="75000"/>
+            </a:schemeClr>
+          </a:lnRef>
+          <a:fillRef idx="1">
+            <a:schemeClr val="accent1"/>
+          </a:fillRef>
+          <a:effectRef idx="0">
+            <a:srgbClr val="FFFFFF"/>
+          </a:effectRef>
+          <a:fontRef idx="minor">
+            <a:schemeClr val="lt1"/>
+          </a:fontRef>
+        </p:style>
+        <p:txBody>
+          <a:bodyPr rtlCol="0" anchor="ctr"/>
+          <a:p>
+            <a:pPr algn="ctr"/>
+            <a:r>
+              <a:rPr lang="en-US" altLang="zh-CN" sz="1500" b="1">
+                <a:solidFill>
+                  <a:schemeClr val="tx1"/>
+                </a:solidFill>
+                <a:latin typeface="Times New Roman" panose="02020603050405020304" charset="0"/>
+                <a:ea typeface="微软雅黑" panose="020B0503020204020204" charset="-122"/>
+                <a:sym typeface="+mn-ea"/>
+              </a:rPr>
+              <a:t>Type Classifier Agent</a:t>
+            </a:r>
+            <a:r>
+              <a:rPr lang="zh-CN" altLang="en-US" sz="1500">
+                <a:solidFill>
+                  <a:schemeClr val="tx1"/>
+                </a:solidFill>
+                <a:latin typeface="Times New Roman" panose="02020603050405020304" charset="0"/>
+                <a:ea typeface="微软雅黑" panose="020B0503020204020204" charset="-122"/>
+                <a:sym typeface="+mn-ea"/>
+              </a:rPr>
+              <a:t>：</a:t>
+            </a:r>
+            <a:endParaRPr lang="zh-CN" altLang="en-US" sz="1500">
+              <a:solidFill>
+                <a:schemeClr val="tx1"/>
+              </a:solidFill>
+              <a:latin typeface="Times New Roman" panose="02020603050405020304" charset="0"/>
+              <a:ea typeface="微软雅黑" panose="020B0503020204020204" charset="-122"/>
+            </a:endParaRPr>
+          </a:p>
+          <a:p>
+            <a:pPr algn="ctr"/>
+            <a:r>
+              <a:rPr lang="zh-CN" altLang="en-US" sz="1500">
+                <a:solidFill>
+                  <a:schemeClr val="tx1"/>
+                </a:solidFill>
+                <a:latin typeface="Times New Roman" panose="02020603050405020304" charset="0"/>
+                <a:ea typeface="微软雅黑" panose="020B0503020204020204" charset="-122"/>
+                <a:sym typeface="+mn-ea"/>
+              </a:rPr>
+              <a:t>判断开源项目类型</a:t>
+            </a:r>
+            <a:endParaRPr lang="zh-CN" altLang="en-US" sz="1500">
+              <a:solidFill>
+                <a:schemeClr val="tx1"/>
+              </a:solidFill>
+              <a:latin typeface="Times New Roman" panose="02020603050405020304" charset="0"/>
+              <a:ea typeface="微软雅黑" panose="020B0503020204020204" charset="-122"/>
+            </a:endParaRPr>
+          </a:p>
+        </p:txBody>
+      </p:sp>
+      <p:cxnSp>
+        <p:nvCxnSpPr>
+          <p:cNvPr id="6" name="直接箭头连接符 5"/>
+          <p:cNvCxnSpPr>
+            <a:stCxn id="2" idx="2"/>
+            <a:endCxn id="3" idx="0"/>
+          </p:cNvCxnSpPr>
+          <p:nvPr/>
+        </p:nvCxnSpPr>
+        <p:spPr>
+          <a:xfrm>
+            <a:off x="6250305" y="546100"/>
+            <a:ext cx="0" cy="358140"/>
+          </a:xfrm>
+          <a:prstGeom prst="straightConnector1">
+            <a:avLst/>
+          </a:prstGeom>
+          <a:ln w="19050">
+            <a:solidFill>
+              <a:schemeClr val="tx1"/>
+            </a:solidFill>
+            <a:tailEnd type="triangle"/>
+          </a:ln>
+        </p:spPr>
+        <p:style>
+          <a:lnRef idx="2">
+            <a:schemeClr val="accent1"/>
+          </a:lnRef>
+          <a:fillRef idx="0">
+            <a:srgbClr val="FFFFFF"/>
+          </a:fillRef>
+          <a:effectRef idx="0">
+            <a:srgbClr val="FFFFFF"/>
+          </a:effectRef>
+          <a:fontRef idx="minor">
+            <a:schemeClr val="tx1"/>
+          </a:fontRef>
+        </p:style>
+      </p:cxnSp>
+      <p:sp>
+        <p:nvSpPr>
+          <p:cNvPr id="14" name="矩形 13"/>
+          <p:cNvSpPr/>
+          <p:nvPr/>
+        </p:nvSpPr>
+        <p:spPr>
+          <a:xfrm>
+            <a:off x="4450080" y="1802130"/>
+            <a:ext cx="3599815" cy="539750"/>
+          </a:xfrm>
+          <a:prstGeom prst="rect">
+            <a:avLst/>
+          </a:prstGeom>
+          <a:solidFill>
+            <a:schemeClr val="bg1"/>
+          </a:solidFill>
+          <a:ln>
+            <a:solidFill>
+              <a:schemeClr val="tx1"/>
+            </a:solidFill>
+          </a:ln>
+        </p:spPr>
+        <p:style>
+          <a:lnRef idx="2">
+            <a:schemeClr val="accent1">
+              <a:lumMod val="75000"/>
+            </a:schemeClr>
+          </a:lnRef>
+          <a:fillRef idx="1">
+            <a:schemeClr val="accent1"/>
+          </a:fillRef>
+          <a:effectRef idx="0">
+            <a:srgbClr val="FFFFFF"/>
+          </a:effectRef>
+          <a:fontRef idx="minor">
+            <a:schemeClr val="lt1"/>
+          </a:fontRef>
+        </p:style>
+        <p:txBody>
+          <a:bodyPr rtlCol="0" anchor="ctr"/>
+          <a:p>
+            <a:pPr algn="ctr"/>
+            <a:r>
+              <a:rPr lang="en-US" altLang="zh-CN" sz="1500" b="1">
+                <a:solidFill>
+                  <a:schemeClr val="tx1"/>
+                </a:solidFill>
+                <a:latin typeface="Times New Roman" panose="02020603050405020304" charset="0"/>
+                <a:ea typeface="微软雅黑" panose="020B0503020204020204" charset="-122"/>
+              </a:rPr>
+              <a:t>Metric Collector Agent</a:t>
+            </a:r>
+            <a:r>
+              <a:rPr lang="zh-CN" altLang="en-US" sz="1500">
+                <a:solidFill>
+                  <a:schemeClr val="tx1"/>
+                </a:solidFill>
+                <a:latin typeface="Times New Roman" panose="02020603050405020304" charset="0"/>
+                <a:ea typeface="微软雅黑" panose="020B0503020204020204" charset="-122"/>
+              </a:rPr>
+              <a:t>：</a:t>
+            </a:r>
+            <a:endParaRPr lang="zh-CN" altLang="en-US" sz="1500">
+              <a:solidFill>
+                <a:schemeClr val="tx1"/>
+              </a:solidFill>
+              <a:latin typeface="Times New Roman" panose="02020603050405020304" charset="0"/>
+              <a:ea typeface="微软雅黑" panose="020B0503020204020204" charset="-122"/>
+            </a:endParaRPr>
+          </a:p>
+          <a:p>
+            <a:pPr algn="ctr"/>
+            <a:r>
+              <a:rPr lang="zh-CN" altLang="en-US" sz="1500">
+                <a:solidFill>
+                  <a:schemeClr val="tx1"/>
+                </a:solidFill>
+                <a:latin typeface="Times New Roman" panose="02020603050405020304" charset="0"/>
+                <a:ea typeface="微软雅黑" panose="020B0503020204020204" charset="-122"/>
+              </a:rPr>
+              <a:t>调用接口获取指标数据</a:t>
+            </a:r>
+            <a:endParaRPr lang="zh-CN" altLang="en-US" sz="1500">
+              <a:solidFill>
+                <a:schemeClr val="tx1"/>
+              </a:solidFill>
+              <a:latin typeface="Times New Roman" panose="02020603050405020304" charset="0"/>
+              <a:ea typeface="微软雅黑" panose="020B0503020204020204" charset="-122"/>
+            </a:endParaRPr>
+          </a:p>
+        </p:txBody>
+      </p:sp>
+      <p:cxnSp>
+        <p:nvCxnSpPr>
+          <p:cNvPr id="26" name="直接箭头连接符 25"/>
+          <p:cNvCxnSpPr>
+            <a:stCxn id="3" idx="2"/>
+            <a:endCxn id="14" idx="0"/>
+          </p:cNvCxnSpPr>
+          <p:nvPr/>
+        </p:nvCxnSpPr>
+        <p:spPr>
+          <a:xfrm>
+            <a:off x="6250305" y="1443990"/>
+            <a:ext cx="0" cy="358140"/>
+          </a:xfrm>
+          <a:prstGeom prst="straightConnector1">
+            <a:avLst/>
+          </a:prstGeom>
+          <a:ln w="19050">
+            <a:solidFill>
+              <a:schemeClr val="tx1"/>
+            </a:solidFill>
+            <a:tailEnd type="triangle"/>
+          </a:ln>
+        </p:spPr>
+        <p:style>
+          <a:lnRef idx="2">
+            <a:schemeClr val="accent1"/>
+          </a:lnRef>
+          <a:fillRef idx="0">
+            <a:srgbClr val="FFFFFF"/>
+          </a:fillRef>
+          <a:effectRef idx="0">
+            <a:srgbClr val="FFFFFF"/>
+          </a:effectRef>
+          <a:fontRef idx="minor">
+            <a:schemeClr val="tx1"/>
+          </a:fontRef>
+        </p:style>
+      </p:cxnSp>
+      <p:sp>
+        <p:nvSpPr>
+          <p:cNvPr id="27" name="矩形 26"/>
+          <p:cNvSpPr/>
+          <p:nvPr/>
+        </p:nvSpPr>
+        <p:spPr>
+          <a:xfrm>
+            <a:off x="4450080" y="2700020"/>
+            <a:ext cx="3599815" cy="539750"/>
+          </a:xfrm>
+          <a:prstGeom prst="rect">
+            <a:avLst/>
+          </a:prstGeom>
+          <a:solidFill>
+            <a:schemeClr val="bg1"/>
+          </a:solidFill>
+          <a:ln>
+            <a:solidFill>
+              <a:schemeClr val="tx1"/>
+            </a:solidFill>
+          </a:ln>
+        </p:spPr>
+        <p:style>
+          <a:lnRef idx="2">
+            <a:schemeClr val="accent1">
+              <a:lumMod val="75000"/>
+            </a:schemeClr>
+          </a:lnRef>
+          <a:fillRef idx="1">
+            <a:schemeClr val="accent1"/>
+          </a:fillRef>
+          <a:effectRef idx="0">
+            <a:srgbClr val="FFFFFF"/>
+          </a:effectRef>
+          <a:fontRef idx="minor">
+            <a:schemeClr val="lt1"/>
+          </a:fontRef>
+        </p:style>
+        <p:txBody>
+          <a:bodyPr rtlCol="0" anchor="ctr"/>
+          <a:p>
+            <a:pPr algn="ctr"/>
+            <a:r>
+              <a:rPr lang="en-US" altLang="zh-CN" sz="1500" b="1">
+                <a:solidFill>
+                  <a:schemeClr val="tx1"/>
+                </a:solidFill>
+                <a:latin typeface="Times New Roman" panose="02020603050405020304" charset="0"/>
+                <a:ea typeface="微软雅黑" panose="020B0503020204020204" charset="-122"/>
+              </a:rPr>
+              <a:t>Core Metric Selector Agent</a:t>
+            </a:r>
+            <a:r>
+              <a:rPr lang="zh-CN" altLang="en-US" sz="1500">
+                <a:solidFill>
+                  <a:schemeClr val="tx1"/>
+                </a:solidFill>
+                <a:latin typeface="Times New Roman" panose="02020603050405020304" charset="0"/>
+                <a:ea typeface="微软雅黑" panose="020B0503020204020204" charset="-122"/>
+              </a:rPr>
+              <a:t>：</a:t>
+            </a:r>
+            <a:r>
+              <a:rPr lang="en-US" altLang="zh-CN" sz="1500">
+                <a:solidFill>
+                  <a:schemeClr val="tx1"/>
+                </a:solidFill>
+                <a:latin typeface="Times New Roman" panose="02020603050405020304" charset="0"/>
+                <a:ea typeface="微软雅黑" panose="020B0503020204020204" charset="-122"/>
+              </a:rPr>
+              <a:t> </a:t>
+            </a:r>
+            <a:endParaRPr lang="en-US" altLang="zh-CN" sz="1500">
+              <a:solidFill>
+                <a:schemeClr val="tx1"/>
+              </a:solidFill>
+              <a:latin typeface="Times New Roman" panose="02020603050405020304" charset="0"/>
+              <a:ea typeface="微软雅黑" panose="020B0503020204020204" charset="-122"/>
+            </a:endParaRPr>
+          </a:p>
+          <a:p>
+            <a:pPr algn="ctr"/>
+            <a:r>
+              <a:rPr lang="zh-CN" altLang="en-US" sz="1500">
+                <a:solidFill>
+                  <a:schemeClr val="tx1"/>
+                </a:solidFill>
+                <a:latin typeface="Times New Roman" panose="02020603050405020304" charset="0"/>
+                <a:ea typeface="微软雅黑" panose="020B0503020204020204" charset="-122"/>
+              </a:rPr>
+              <a:t>根据项目类型筛选关键指标</a:t>
+            </a:r>
+            <a:endParaRPr lang="zh-CN" altLang="en-US" sz="1500">
+              <a:solidFill>
+                <a:schemeClr val="tx1"/>
+              </a:solidFill>
+              <a:latin typeface="Times New Roman" panose="02020603050405020304" charset="0"/>
+              <a:ea typeface="微软雅黑" panose="020B0503020204020204" charset="-122"/>
+            </a:endParaRPr>
+          </a:p>
+        </p:txBody>
+      </p:sp>
+      <p:cxnSp>
+        <p:nvCxnSpPr>
+          <p:cNvPr id="28" name="直接箭头连接符 27"/>
+          <p:cNvCxnSpPr>
+            <a:stCxn id="14" idx="2"/>
+            <a:endCxn id="27" idx="0"/>
+          </p:cNvCxnSpPr>
+          <p:nvPr/>
+        </p:nvCxnSpPr>
+        <p:spPr>
+          <a:xfrm>
+            <a:off x="6250305" y="2341880"/>
+            <a:ext cx="0" cy="358140"/>
+          </a:xfrm>
+          <a:prstGeom prst="straightConnector1">
+            <a:avLst/>
+          </a:prstGeom>
+          <a:ln w="19050">
+            <a:solidFill>
+              <a:schemeClr val="tx1"/>
+            </a:solidFill>
+            <a:tailEnd type="triangle"/>
+          </a:ln>
+        </p:spPr>
+        <p:style>
+          <a:lnRef idx="2">
+            <a:schemeClr val="accent1"/>
+          </a:lnRef>
+          <a:fillRef idx="0">
+            <a:srgbClr val="FFFFFF"/>
+          </a:fillRef>
+          <a:effectRef idx="0">
+            <a:srgbClr val="FFFFFF"/>
+          </a:effectRef>
+          <a:fontRef idx="minor">
+            <a:schemeClr val="tx1"/>
+          </a:fontRef>
+        </p:style>
+      </p:cxnSp>
+      <p:sp>
+        <p:nvSpPr>
+          <p:cNvPr id="30" name="矩形 29"/>
+          <p:cNvSpPr/>
+          <p:nvPr/>
+        </p:nvSpPr>
+        <p:spPr>
+          <a:xfrm>
+            <a:off x="4450080" y="3597910"/>
+            <a:ext cx="3599815" cy="539750"/>
+          </a:xfrm>
+          <a:prstGeom prst="rect">
+            <a:avLst/>
+          </a:prstGeom>
+          <a:solidFill>
+            <a:schemeClr val="bg1"/>
+          </a:solidFill>
+          <a:ln>
+            <a:solidFill>
+              <a:schemeClr val="tx1"/>
+            </a:solidFill>
+          </a:ln>
+        </p:spPr>
+        <p:style>
+          <a:lnRef idx="2">
+            <a:schemeClr val="accent1">
+              <a:lumMod val="75000"/>
+            </a:schemeClr>
+          </a:lnRef>
+          <a:fillRef idx="1">
+            <a:schemeClr val="accent1"/>
+          </a:fillRef>
+          <a:effectRef idx="0">
+            <a:srgbClr val="FFFFFF"/>
+          </a:effectRef>
+          <a:fontRef idx="minor">
+            <a:schemeClr val="lt1"/>
+          </a:fontRef>
+        </p:style>
+        <p:txBody>
+          <a:bodyPr rtlCol="0" anchor="ctr"/>
+          <a:p>
+            <a:pPr algn="ctr"/>
+            <a:r>
+              <a:rPr lang="en-US" altLang="zh-CN" sz="1500" b="1">
+                <a:solidFill>
+                  <a:schemeClr val="tx1"/>
+                </a:solidFill>
+                <a:latin typeface="Times New Roman" panose="02020603050405020304" charset="0"/>
+                <a:ea typeface="微软雅黑" panose="020B0503020204020204" charset="-122"/>
+              </a:rPr>
+              <a:t>RAG Retrieval Agent</a:t>
+            </a:r>
+            <a:r>
+              <a:rPr lang="zh-CN" altLang="en-US" sz="1500">
+                <a:solidFill>
+                  <a:schemeClr val="tx1"/>
+                </a:solidFill>
+                <a:latin typeface="Times New Roman" panose="02020603050405020304" charset="0"/>
+                <a:ea typeface="微软雅黑" panose="020B0503020204020204" charset="-122"/>
+              </a:rPr>
+              <a:t>：</a:t>
+            </a:r>
+            <a:endParaRPr lang="zh-CN" altLang="en-US" sz="1500">
+              <a:solidFill>
+                <a:schemeClr val="tx1"/>
+              </a:solidFill>
+              <a:latin typeface="Times New Roman" panose="02020603050405020304" charset="0"/>
+              <a:ea typeface="微软雅黑" panose="020B0503020204020204" charset="-122"/>
+            </a:endParaRPr>
+          </a:p>
+          <a:p>
+            <a:pPr algn="ctr"/>
+            <a:r>
+              <a:rPr lang="zh-CN" altLang="en-US" sz="1500">
+                <a:solidFill>
+                  <a:schemeClr val="tx1"/>
+                </a:solidFill>
+                <a:latin typeface="Times New Roman" panose="02020603050405020304" charset="0"/>
+                <a:ea typeface="微软雅黑" panose="020B0503020204020204" charset="-122"/>
+              </a:rPr>
+              <a:t>从知识库中检索指标的定义和适用场景</a:t>
+            </a:r>
+            <a:endParaRPr lang="zh-CN" altLang="en-US" sz="1500">
+              <a:solidFill>
+                <a:schemeClr val="tx1"/>
+              </a:solidFill>
+              <a:latin typeface="Times New Roman" panose="02020603050405020304" charset="0"/>
+              <a:ea typeface="微软雅黑" panose="020B0503020204020204" charset="-122"/>
+            </a:endParaRPr>
+          </a:p>
+        </p:txBody>
+      </p:sp>
+      <p:cxnSp>
+        <p:nvCxnSpPr>
+          <p:cNvPr id="34" name="直接箭头连接符 33"/>
+          <p:cNvCxnSpPr>
+            <a:stCxn id="27" idx="2"/>
+            <a:endCxn id="30" idx="0"/>
+          </p:cNvCxnSpPr>
+          <p:nvPr/>
+        </p:nvCxnSpPr>
+        <p:spPr>
+          <a:xfrm>
+            <a:off x="6250305" y="3239770"/>
+            <a:ext cx="0" cy="358140"/>
+          </a:xfrm>
+          <a:prstGeom prst="straightConnector1">
+            <a:avLst/>
+          </a:prstGeom>
+          <a:ln w="19050">
+            <a:solidFill>
+              <a:schemeClr val="tx1"/>
+            </a:solidFill>
+            <a:tailEnd type="triangle"/>
+          </a:ln>
+        </p:spPr>
+        <p:style>
+          <a:lnRef idx="2">
+            <a:schemeClr val="accent1"/>
+          </a:lnRef>
+          <a:fillRef idx="0">
+            <a:srgbClr val="FFFFFF"/>
+          </a:fillRef>
+          <a:effectRef idx="0">
+            <a:srgbClr val="FFFFFF"/>
+          </a:effectRef>
+          <a:fontRef idx="minor">
+            <a:schemeClr val="tx1"/>
+          </a:fontRef>
+        </p:style>
+      </p:cxnSp>
+      <p:cxnSp>
+        <p:nvCxnSpPr>
+          <p:cNvPr id="54" name="直接箭头连接符 53"/>
+          <p:cNvCxnSpPr/>
+          <p:nvPr/>
+        </p:nvCxnSpPr>
+        <p:spPr>
+          <a:xfrm flipH="1">
+            <a:off x="6250305" y="5843270"/>
+            <a:ext cx="635" cy="448310"/>
+          </a:xfrm>
+          <a:prstGeom prst="straightConnector1">
+            <a:avLst/>
+          </a:prstGeom>
+          <a:ln w="19050">
+            <a:solidFill>
+              <a:schemeClr val="tx1"/>
+            </a:solidFill>
+            <a:tailEnd type="triangle"/>
+          </a:ln>
+        </p:spPr>
+        <p:style>
+          <a:lnRef idx="2">
+            <a:schemeClr val="accent1"/>
+          </a:lnRef>
+          <a:fillRef idx="0">
+            <a:srgbClr val="FFFFFF"/>
+          </a:fillRef>
+          <a:effectRef idx="0">
+            <a:srgbClr val="FFFFFF"/>
+          </a:effectRef>
+          <a:fontRef idx="minor">
+            <a:schemeClr val="tx1"/>
+          </a:fontRef>
+        </p:style>
+      </p:cxnSp>
+      <p:grpSp>
+        <p:nvGrpSpPr>
+          <p:cNvPr id="74" name="组合 73"/>
+          <p:cNvGrpSpPr/>
+          <p:nvPr/>
+        </p:nvGrpSpPr>
+        <p:grpSpPr>
+          <a:xfrm>
+            <a:off x="2113280" y="4137660"/>
+            <a:ext cx="8275320" cy="1705610"/>
+            <a:chOff x="3328" y="6516"/>
+            <a:chExt cx="13032" cy="2686"/>
+          </a:xfrm>
+        </p:grpSpPr>
+        <p:cxnSp>
+          <p:nvCxnSpPr>
+            <p:cNvPr id="36" name="直接箭头连接符 35"/>
+            <p:cNvCxnSpPr>
+              <a:stCxn id="30" idx="2"/>
+              <a:endCxn id="35" idx="0"/>
+            </p:cNvCxnSpPr>
+            <p:nvPr/>
+          </p:nvCxnSpPr>
+          <p:spPr>
+            <a:xfrm>
+              <a:off x="9843" y="6516"/>
+              <a:ext cx="1" cy="564"/>
+            </a:xfrm>
+            <a:prstGeom prst="straightConnector1">
+              <a:avLst/>
+            </a:prstGeom>
+            <a:ln w="19050">
+              <a:solidFill>
+                <a:schemeClr val="tx1"/>
+              </a:solidFill>
+              <a:tailEnd type="triangle"/>
+            </a:ln>
+          </p:spPr>
+          <p:style>
+            <a:lnRef idx="2">
+              <a:schemeClr val="accent1"/>
+            </a:lnRef>
+            <a:fillRef idx="0">
+              <a:srgbClr val="FFFFFF"/>
+            </a:fillRef>
+            <a:effectRef idx="0">
+              <a:srgbClr val="FFFFFF"/>
+            </a:effectRef>
+            <a:fontRef idx="minor">
+              <a:schemeClr val="tx1"/>
+            </a:fontRef>
+          </p:style>
+        </p:cxnSp>
+        <p:sp>
+          <p:nvSpPr>
+            <p:cNvPr id="35" name="矩形 34"/>
+            <p:cNvSpPr/>
+            <p:nvPr/>
+          </p:nvSpPr>
+          <p:spPr>
+            <a:xfrm>
+              <a:off x="3328" y="7080"/>
+              <a:ext cx="13032" cy="2122"/>
+            </a:xfrm>
+            <a:prstGeom prst="rect">
+              <a:avLst/>
+            </a:prstGeom>
+            <a:solidFill>
+              <a:schemeClr val="bg1"/>
+            </a:solidFill>
+            <a:ln>
+              <a:solidFill>
+                <a:schemeClr val="tx1"/>
+              </a:solidFill>
+            </a:ln>
+          </p:spPr>
+          <p:style>
+            <a:lnRef idx="2">
+              <a:schemeClr val="accent1">
+                <a:lumMod val="75000"/>
+              </a:schemeClr>
+            </a:lnRef>
+            <a:fillRef idx="1">
+              <a:schemeClr val="accent1"/>
+            </a:fillRef>
+            <a:effectRef idx="0">
+              <a:srgbClr val="FFFFFF"/>
+            </a:effectRef>
+            <a:fontRef idx="minor">
+              <a:schemeClr val="lt1"/>
+            </a:fontRef>
+          </p:style>
+          <p:txBody>
+            <a:bodyPr rtlCol="0" anchor="ctr"/>
+            <a:p>
+              <a:pPr algn="ctr"/>
+              <a:r>
+                <a:rPr lang="en-US" altLang="zh-CN" sz="1500" b="1">
+                  <a:solidFill>
+                    <a:schemeClr val="tx1"/>
+                  </a:solidFill>
+                  <a:latin typeface="Times New Roman" panose="02020603050405020304" charset="0"/>
+                  <a:ea typeface="微软雅黑" panose="020B0503020204020204" charset="-122"/>
+                </a:rPr>
+                <a:t>Report Generator </a:t>
+              </a:r>
+              <a:r>
+                <a:rPr lang="en-US" altLang="zh-CN" sz="1500" b="1">
+                  <a:solidFill>
+                    <a:schemeClr val="tx1"/>
+                  </a:solidFill>
+                  <a:latin typeface="Times New Roman" panose="02020603050405020304" charset="0"/>
+                  <a:ea typeface="微软雅黑" panose="020B0503020204020204" charset="-122"/>
+                  <a:sym typeface="+mn-ea"/>
+                </a:rPr>
+                <a:t>Agent</a:t>
+              </a:r>
+              <a:r>
+                <a:rPr lang="zh-CN" altLang="en-US" sz="1500">
+                  <a:solidFill>
+                    <a:schemeClr val="tx1"/>
+                  </a:solidFill>
+                  <a:latin typeface="Times New Roman" panose="02020603050405020304" charset="0"/>
+                  <a:ea typeface="微软雅黑" panose="020B0503020204020204" charset="-122"/>
+                  <a:sym typeface="+mn-ea"/>
+                </a:rPr>
+                <a:t>：</a:t>
+              </a:r>
+              <a:endParaRPr lang="zh-CN" altLang="en-US" sz="1500">
+                <a:solidFill>
+                  <a:schemeClr val="tx1"/>
+                </a:solidFill>
+                <a:latin typeface="Times New Roman" panose="02020603050405020304" charset="0"/>
+                <a:ea typeface="微软雅黑" panose="020B0503020204020204" charset="-122"/>
+                <a:sym typeface="+mn-ea"/>
+              </a:endParaRPr>
+            </a:p>
+            <a:p>
+              <a:pPr algn="ctr"/>
+              <a:endParaRPr lang="zh-CN" altLang="en-US" sz="1500">
+                <a:solidFill>
+                  <a:schemeClr val="tx1"/>
+                </a:solidFill>
+                <a:latin typeface="Times New Roman" panose="02020603050405020304" charset="0"/>
+                <a:ea typeface="微软雅黑" panose="020B0503020204020204" charset="-122"/>
+                <a:sym typeface="+mn-ea"/>
+              </a:endParaRPr>
+            </a:p>
+            <a:p>
+              <a:pPr algn="ctr"/>
+              <a:endParaRPr lang="zh-CN" altLang="en-US" sz="1500">
+                <a:solidFill>
+                  <a:schemeClr val="tx1"/>
+                </a:solidFill>
+                <a:latin typeface="Times New Roman" panose="02020603050405020304" charset="0"/>
+                <a:ea typeface="微软雅黑" panose="020B0503020204020204" charset="-122"/>
+                <a:sym typeface="+mn-ea"/>
+              </a:endParaRPr>
+            </a:p>
+            <a:p>
+              <a:pPr algn="ctr"/>
+              <a:endParaRPr lang="en-US" altLang="zh-CN" sz="1500" b="1">
+                <a:solidFill>
+                  <a:schemeClr val="tx1"/>
+                </a:solidFill>
+                <a:latin typeface="Times New Roman" panose="02020603050405020304" charset="0"/>
+                <a:ea typeface="微软雅黑" panose="020B0503020204020204" charset="-122"/>
+              </a:endParaRPr>
+            </a:p>
+            <a:p>
+              <a:pPr algn="ctr"/>
+              <a:endParaRPr lang="en-US" altLang="zh-CN" sz="1500" b="1">
+                <a:solidFill>
+                  <a:schemeClr val="tx1"/>
+                </a:solidFill>
+                <a:latin typeface="Times New Roman" panose="02020603050405020304" charset="0"/>
+                <a:ea typeface="微软雅黑" panose="020B0503020204020204" charset="-122"/>
+              </a:endParaRPr>
+            </a:p>
+          </p:txBody>
+        </p:sp>
+        <p:sp>
+          <p:nvSpPr>
+            <p:cNvPr id="50" name="矩形 49"/>
+            <p:cNvSpPr/>
+            <p:nvPr/>
+          </p:nvSpPr>
+          <p:spPr>
+            <a:xfrm>
+              <a:off x="10176" y="7743"/>
+              <a:ext cx="5669" cy="1161"/>
+            </a:xfrm>
+            <a:prstGeom prst="rect">
+              <a:avLst/>
+            </a:prstGeom>
+            <a:solidFill>
+              <a:schemeClr val="bg1"/>
+            </a:solidFill>
+            <a:ln>
+              <a:solidFill>
+                <a:schemeClr val="tx1"/>
+              </a:solidFill>
+            </a:ln>
+          </p:spPr>
+          <p:style>
+            <a:lnRef idx="2">
+              <a:schemeClr val="accent1">
+                <a:lumMod val="75000"/>
+              </a:schemeClr>
+            </a:lnRef>
+            <a:fillRef idx="1">
+              <a:schemeClr val="accent1"/>
+            </a:fillRef>
+            <a:effectRef idx="0">
+              <a:srgbClr val="FFFFFF"/>
+            </a:effectRef>
+            <a:fontRef idx="minor">
+              <a:schemeClr val="lt1"/>
+            </a:fontRef>
+          </p:style>
+          <p:txBody>
+            <a:bodyPr rtlCol="0" anchor="ctr"/>
+            <a:p>
+              <a:pPr algn="ctr"/>
+              <a:r>
+                <a:rPr lang="en-US" altLang="zh-CN" sz="1500" b="1">
+                  <a:solidFill>
+                    <a:schemeClr val="tx1"/>
+                  </a:solidFill>
+                  <a:latin typeface="Times New Roman" panose="02020603050405020304" charset="0"/>
+                  <a:ea typeface="微软雅黑" panose="020B0503020204020204" charset="-122"/>
+                </a:rPr>
+                <a:t>Rule Report Generator</a:t>
+              </a:r>
+              <a:r>
+                <a:rPr lang="zh-CN" altLang="en-US" sz="1500">
+                  <a:solidFill>
+                    <a:schemeClr val="tx1"/>
+                  </a:solidFill>
+                  <a:latin typeface="Times New Roman" panose="02020603050405020304" charset="0"/>
+                  <a:ea typeface="微软雅黑" panose="020B0503020204020204" charset="-122"/>
+                </a:rPr>
+                <a:t>：</a:t>
+              </a:r>
+              <a:endParaRPr lang="zh-CN" altLang="en-US" sz="1500">
+                <a:solidFill>
+                  <a:schemeClr val="tx1"/>
+                </a:solidFill>
+                <a:latin typeface="Times New Roman" panose="02020603050405020304" charset="0"/>
+                <a:ea typeface="微软雅黑" panose="020B0503020204020204" charset="-122"/>
+              </a:endParaRPr>
+            </a:p>
+            <a:p>
+              <a:pPr algn="ctr"/>
+              <a:r>
+                <a:rPr lang="zh-CN" altLang="en-US" sz="1500">
+                  <a:solidFill>
+                    <a:schemeClr val="tx1"/>
+                  </a:solidFill>
+                  <a:latin typeface="Times New Roman" panose="02020603050405020304" charset="0"/>
+                  <a:ea typeface="微软雅黑" panose="020B0503020204020204" charset="-122"/>
+                </a:rPr>
+                <a:t>基于规则报告、指标和知识库上下文，生成</a:t>
+              </a:r>
+              <a:r>
+                <a:rPr lang="zh-CN" altLang="en-US" sz="1500">
+                  <a:solidFill>
+                    <a:schemeClr val="tx1"/>
+                  </a:solidFill>
+                  <a:latin typeface="Times New Roman" panose="02020603050405020304" charset="0"/>
+                  <a:ea typeface="微软雅黑" panose="020B0503020204020204" charset="-122"/>
+                </a:rPr>
+                <a:t>候选评估报告</a:t>
+              </a:r>
+              <a:endParaRPr lang="zh-CN" altLang="en-US" sz="1500">
+                <a:solidFill>
+                  <a:schemeClr val="tx1"/>
+                </a:solidFill>
+                <a:latin typeface="Times New Roman" panose="02020603050405020304" charset="0"/>
+                <a:ea typeface="微软雅黑" panose="020B0503020204020204" charset="-122"/>
+              </a:endParaRPr>
+            </a:p>
+          </p:txBody>
+        </p:sp>
+        <p:cxnSp>
+          <p:nvCxnSpPr>
+            <p:cNvPr id="58" name="直接箭头连接符 57"/>
+            <p:cNvCxnSpPr>
+              <a:stCxn id="42" idx="3"/>
+              <a:endCxn id="50" idx="1"/>
+            </p:cNvCxnSpPr>
+            <p:nvPr/>
+          </p:nvCxnSpPr>
+          <p:spPr>
+            <a:xfrm flipV="1">
+              <a:off x="9512" y="8324"/>
+              <a:ext cx="664" cy="10"/>
+            </a:xfrm>
+            <a:prstGeom prst="straightConnector1">
+              <a:avLst/>
+            </a:prstGeom>
+            <a:ln w="19050">
+              <a:solidFill>
+                <a:schemeClr val="tx1"/>
+              </a:solidFill>
+              <a:tailEnd type="triangle"/>
+            </a:ln>
+          </p:spPr>
+          <p:style>
+            <a:lnRef idx="2">
+              <a:schemeClr val="accent1"/>
+            </a:lnRef>
+            <a:fillRef idx="0">
+              <a:srgbClr val="FFFFFF"/>
+            </a:fillRef>
+            <a:effectRef idx="0">
+              <a:srgbClr val="FFFFFF"/>
+            </a:effectRef>
+            <a:fontRef idx="minor">
+              <a:schemeClr val="tx1"/>
+            </a:fontRef>
+          </p:style>
+        </p:cxnSp>
+        <p:sp>
+          <p:nvSpPr>
+            <p:cNvPr id="42" name="矩形 41"/>
+            <p:cNvSpPr/>
+            <p:nvPr/>
+          </p:nvSpPr>
+          <p:spPr>
+            <a:xfrm>
+              <a:off x="3843" y="7753"/>
+              <a:ext cx="5669" cy="1161"/>
+            </a:xfrm>
+            <a:prstGeom prst="rect">
+              <a:avLst/>
+            </a:prstGeom>
+            <a:solidFill>
+              <a:schemeClr val="bg1"/>
+            </a:solidFill>
+            <a:ln>
+              <a:solidFill>
+                <a:schemeClr val="tx1"/>
+              </a:solidFill>
+            </a:ln>
+          </p:spPr>
+          <p:style>
+            <a:lnRef idx="2">
+              <a:schemeClr val="accent1">
+                <a:lumMod val="75000"/>
+              </a:schemeClr>
+            </a:lnRef>
+            <a:fillRef idx="1">
+              <a:schemeClr val="accent1"/>
+            </a:fillRef>
+            <a:effectRef idx="0">
+              <a:srgbClr val="FFFFFF"/>
+            </a:effectRef>
+            <a:fontRef idx="minor">
+              <a:schemeClr val="lt1"/>
+            </a:fontRef>
+          </p:style>
+          <p:txBody>
+            <a:bodyPr rtlCol="0" anchor="ctr"/>
+            <a:p>
+              <a:pPr algn="ctr"/>
+              <a:r>
+                <a:rPr lang="en-US" altLang="zh-CN" sz="1500" b="1">
+                  <a:solidFill>
+                    <a:schemeClr val="tx1"/>
+                  </a:solidFill>
+                  <a:latin typeface="Times New Roman" panose="02020603050405020304" charset="0"/>
+                  <a:ea typeface="微软雅黑" panose="020B0503020204020204" charset="-122"/>
+                </a:rPr>
+                <a:t>Rule Report Generator</a:t>
+              </a:r>
+              <a:r>
+                <a:rPr lang="zh-CN" altLang="en-US" sz="1500">
+                  <a:solidFill>
+                    <a:schemeClr val="tx1"/>
+                  </a:solidFill>
+                  <a:latin typeface="Times New Roman" panose="02020603050405020304" charset="0"/>
+                  <a:ea typeface="微软雅黑" panose="020B0503020204020204" charset="-122"/>
+                </a:rPr>
+                <a:t>：</a:t>
+              </a:r>
+              <a:endParaRPr lang="zh-CN" altLang="en-US" sz="1500">
+                <a:solidFill>
+                  <a:schemeClr val="tx1"/>
+                </a:solidFill>
+                <a:latin typeface="Times New Roman" panose="02020603050405020304" charset="0"/>
+                <a:ea typeface="微软雅黑" panose="020B0503020204020204" charset="-122"/>
+              </a:endParaRPr>
+            </a:p>
+            <a:p>
+              <a:pPr algn="ctr"/>
+              <a:r>
+                <a:rPr lang="zh-CN" altLang="en-US" sz="1500">
+                  <a:solidFill>
+                    <a:schemeClr val="tx1"/>
+                  </a:solidFill>
+                  <a:latin typeface="Times New Roman" panose="02020603050405020304" charset="0"/>
+                  <a:ea typeface="微软雅黑" panose="020B0503020204020204" charset="-122"/>
+                </a:rPr>
+                <a:t>生成规则报告，作为兜底 </a:t>
+              </a:r>
+              <a:r>
+                <a:rPr lang="en-US" altLang="zh-CN" sz="1500">
+                  <a:solidFill>
+                    <a:schemeClr val="tx1"/>
+                  </a:solidFill>
+                  <a:latin typeface="Times New Roman" panose="02020603050405020304" charset="0"/>
+                  <a:ea typeface="微软雅黑" panose="020B0503020204020204" charset="-122"/>
+                </a:rPr>
+                <a:t>baseline</a:t>
+              </a:r>
+              <a:endParaRPr lang="en-US" altLang="zh-CN" sz="1500">
+                <a:solidFill>
+                  <a:schemeClr val="tx1"/>
+                </a:solidFill>
+                <a:latin typeface="Times New Roman" panose="02020603050405020304" charset="0"/>
+                <a:ea typeface="微软雅黑" panose="020B0503020204020204" charset="-122"/>
+              </a:endParaRPr>
+            </a:p>
+          </p:txBody>
+        </p:sp>
+      </p:grpSp>
+      <p:sp>
+        <p:nvSpPr>
+          <p:cNvPr id="64" name="矩形 63"/>
+          <p:cNvSpPr/>
+          <p:nvPr/>
+        </p:nvSpPr>
+        <p:spPr>
+          <a:xfrm>
+            <a:off x="4450080" y="8087360"/>
+            <a:ext cx="3599815" cy="539750"/>
+          </a:xfrm>
+          <a:prstGeom prst="rect">
+            <a:avLst/>
+          </a:prstGeom>
+          <a:solidFill>
+            <a:schemeClr val="bg1"/>
+          </a:solidFill>
+          <a:ln>
+            <a:solidFill>
+              <a:schemeClr val="tx1"/>
+            </a:solidFill>
+          </a:ln>
+        </p:spPr>
+        <p:style>
+          <a:lnRef idx="2">
+            <a:schemeClr val="accent1">
+              <a:lumMod val="75000"/>
+            </a:schemeClr>
+          </a:lnRef>
+          <a:fillRef idx="1">
+            <a:schemeClr val="accent1"/>
+          </a:fillRef>
+          <a:effectRef idx="0">
+            <a:srgbClr val="FFFFFF"/>
+          </a:effectRef>
+          <a:fontRef idx="minor">
+            <a:schemeClr val="lt1"/>
+          </a:fontRef>
+        </p:style>
+        <p:txBody>
+          <a:bodyPr rtlCol="0" anchor="ctr"/>
+          <a:p>
+            <a:pPr algn="ctr"/>
+            <a:r>
+              <a:rPr lang="en-US" altLang="zh-CN" sz="1500" b="1">
+                <a:solidFill>
+                  <a:schemeClr val="tx1"/>
+                </a:solidFill>
+                <a:latin typeface="Times New Roman" panose="02020603050405020304" charset="0"/>
+                <a:ea typeface="微软雅黑" panose="020B0503020204020204" charset="-122"/>
+              </a:rPr>
+              <a:t>Repair Planner Agent</a:t>
+            </a:r>
+            <a:r>
+              <a:rPr lang="zh-CN" altLang="en-US" sz="1500">
+                <a:solidFill>
+                  <a:schemeClr val="tx1"/>
+                </a:solidFill>
+                <a:latin typeface="Times New Roman" panose="02020603050405020304" charset="0"/>
+                <a:ea typeface="微软雅黑" panose="020B0503020204020204" charset="-122"/>
+              </a:rPr>
+              <a:t>：</a:t>
+            </a:r>
+            <a:endParaRPr lang="zh-CN" altLang="en-US" sz="1500">
+              <a:solidFill>
+                <a:schemeClr val="tx1"/>
+              </a:solidFill>
+              <a:latin typeface="Times New Roman" panose="02020603050405020304" charset="0"/>
+              <a:ea typeface="微软雅黑" panose="020B0503020204020204" charset="-122"/>
+            </a:endParaRPr>
+          </a:p>
+          <a:p>
+            <a:pPr algn="ctr"/>
+            <a:r>
+              <a:rPr lang="zh-CN" altLang="en-US" sz="1500">
+                <a:solidFill>
+                  <a:schemeClr val="tx1"/>
+                </a:solidFill>
+                <a:latin typeface="Times New Roman" panose="02020603050405020304" charset="0"/>
+                <a:ea typeface="微软雅黑" panose="020B0503020204020204" charset="-122"/>
+              </a:rPr>
+              <a:t>根据复审结果制定</a:t>
+            </a:r>
+            <a:r>
+              <a:rPr lang="zh-CN" altLang="en-US" sz="1500">
+                <a:solidFill>
+                  <a:schemeClr val="tx1"/>
+                </a:solidFill>
+                <a:latin typeface="Times New Roman" panose="02020603050405020304" charset="0"/>
+                <a:ea typeface="微软雅黑" panose="020B0503020204020204" charset="-122"/>
+              </a:rPr>
+              <a:t>修复计划</a:t>
+            </a:r>
+            <a:endParaRPr lang="zh-CN" altLang="en-US" sz="1500">
+              <a:solidFill>
+                <a:schemeClr val="tx1"/>
+              </a:solidFill>
+              <a:latin typeface="Times New Roman" panose="02020603050405020304" charset="0"/>
+              <a:ea typeface="微软雅黑" panose="020B0503020204020204" charset="-122"/>
+            </a:endParaRPr>
+          </a:p>
+        </p:txBody>
+      </p:sp>
+      <p:cxnSp>
+        <p:nvCxnSpPr>
+          <p:cNvPr id="65" name="直接箭头连接符 64"/>
+          <p:cNvCxnSpPr>
+            <a:stCxn id="53" idx="2"/>
+            <a:endCxn id="64" idx="0"/>
+          </p:cNvCxnSpPr>
+          <p:nvPr/>
+        </p:nvCxnSpPr>
+        <p:spPr>
+          <a:xfrm>
+            <a:off x="6250305" y="7640320"/>
+            <a:ext cx="0" cy="447040"/>
+          </a:xfrm>
+          <a:prstGeom prst="straightConnector1">
+            <a:avLst/>
+          </a:prstGeom>
+          <a:ln w="19050">
+            <a:solidFill>
+              <a:schemeClr val="tx1"/>
+            </a:solidFill>
+            <a:tailEnd type="triangle"/>
+          </a:ln>
+        </p:spPr>
+        <p:style>
+          <a:lnRef idx="2">
+            <a:schemeClr val="accent1"/>
+          </a:lnRef>
+          <a:fillRef idx="0">
+            <a:srgbClr val="FFFFFF"/>
+          </a:fillRef>
+          <a:effectRef idx="0">
+            <a:srgbClr val="FFFFFF"/>
+          </a:effectRef>
+          <a:fontRef idx="minor">
+            <a:schemeClr val="tx1"/>
+          </a:fontRef>
+        </p:style>
+      </p:cxnSp>
+      <p:sp>
+        <p:nvSpPr>
+          <p:cNvPr id="66" name="矩形 65"/>
+          <p:cNvSpPr/>
+          <p:nvPr/>
+        </p:nvSpPr>
+        <p:spPr>
+          <a:xfrm>
+            <a:off x="4450080" y="9076055"/>
+            <a:ext cx="3599815" cy="359410"/>
+          </a:xfrm>
+          <a:prstGeom prst="rect">
+            <a:avLst/>
+          </a:prstGeom>
+          <a:solidFill>
+            <a:schemeClr val="bg1"/>
+          </a:solidFill>
+          <a:ln>
+            <a:solidFill>
+              <a:schemeClr val="tx1"/>
+            </a:solidFill>
+          </a:ln>
+        </p:spPr>
+        <p:style>
+          <a:lnRef idx="2">
+            <a:schemeClr val="accent1">
+              <a:lumMod val="75000"/>
+            </a:schemeClr>
+          </a:lnRef>
+          <a:fillRef idx="1">
+            <a:schemeClr val="accent1"/>
+          </a:fillRef>
+          <a:effectRef idx="0">
+            <a:srgbClr val="FFFFFF"/>
+          </a:effectRef>
+          <a:fontRef idx="minor">
+            <a:schemeClr val="lt1"/>
+          </a:fontRef>
+        </p:style>
+        <p:txBody>
+          <a:bodyPr rtlCol="0" anchor="ctr"/>
+          <a:p>
+            <a:pPr algn="ctr"/>
+            <a:r>
+              <a:rPr lang="zh-CN" altLang="en-US" sz="1500" b="1">
+                <a:solidFill>
+                  <a:schemeClr val="tx1"/>
+                </a:solidFill>
+                <a:latin typeface="Times New Roman" panose="02020603050405020304" charset="0"/>
+                <a:ea typeface="微软雅黑" panose="020B0503020204020204" charset="-122"/>
+              </a:rPr>
+              <a:t>输出</a:t>
+            </a:r>
+            <a:r>
+              <a:rPr lang="zh-CN" altLang="en-US" sz="1500">
+                <a:solidFill>
+                  <a:schemeClr val="tx1"/>
+                </a:solidFill>
+                <a:latin typeface="Times New Roman" panose="02020603050405020304" charset="0"/>
+                <a:ea typeface="微软雅黑" panose="020B0503020204020204" charset="-122"/>
+              </a:rPr>
+              <a:t>：</a:t>
+            </a:r>
+            <a:r>
+              <a:rPr lang="zh-CN" altLang="en-US" sz="1500">
+                <a:solidFill>
+                  <a:schemeClr val="tx1"/>
+                </a:solidFill>
+                <a:latin typeface="Times New Roman" panose="02020603050405020304" charset="0"/>
+                <a:ea typeface="微软雅黑" panose="020B0503020204020204" charset="-122"/>
+              </a:rPr>
+              <a:t>仓库评估报告</a:t>
+            </a:r>
+            <a:endParaRPr lang="zh-CN" altLang="en-US" sz="1500">
+              <a:solidFill>
+                <a:schemeClr val="tx1"/>
+              </a:solidFill>
+              <a:latin typeface="Times New Roman" panose="02020603050405020304" charset="0"/>
+              <a:ea typeface="微软雅黑" panose="020B0503020204020204" charset="-122"/>
+            </a:endParaRPr>
+          </a:p>
+        </p:txBody>
+      </p:sp>
+      <p:cxnSp>
+        <p:nvCxnSpPr>
+          <p:cNvPr id="67" name="直接箭头连接符 66"/>
+          <p:cNvCxnSpPr>
+            <a:stCxn id="64" idx="2"/>
+            <a:endCxn id="66" idx="0"/>
+          </p:cNvCxnSpPr>
+          <p:nvPr/>
+        </p:nvCxnSpPr>
+        <p:spPr>
+          <a:xfrm>
+            <a:off x="6250305" y="8627110"/>
+            <a:ext cx="0" cy="448945"/>
+          </a:xfrm>
+          <a:prstGeom prst="straightConnector1">
+            <a:avLst/>
+          </a:prstGeom>
+          <a:ln w="19050">
+            <a:solidFill>
+              <a:schemeClr val="tx1"/>
+            </a:solidFill>
+            <a:tailEnd type="triangle"/>
+          </a:ln>
+        </p:spPr>
+        <p:style>
+          <a:lnRef idx="2">
+            <a:schemeClr val="accent1"/>
+          </a:lnRef>
+          <a:fillRef idx="0">
+            <a:srgbClr val="FFFFFF"/>
+          </a:fillRef>
+          <a:effectRef idx="0">
+            <a:srgbClr val="FFFFFF"/>
+          </a:effectRef>
+          <a:fontRef idx="minor">
+            <a:schemeClr val="tx1"/>
+          </a:fontRef>
+        </p:style>
+      </p:cxnSp>
+      <p:cxnSp>
+        <p:nvCxnSpPr>
+          <p:cNvPr id="68" name="曲线连接符 67"/>
+          <p:cNvCxnSpPr>
+            <a:stCxn id="64" idx="1"/>
+            <a:endCxn id="3" idx="1"/>
+          </p:cNvCxnSpPr>
+          <p:nvPr/>
+        </p:nvCxnSpPr>
+        <p:spPr>
+          <a:xfrm rot="10800000" flipH="1">
+            <a:off x="4450080" y="1174115"/>
+            <a:ext cx="3175" cy="7183120"/>
+          </a:xfrm>
+          <a:prstGeom prst="curvedConnector3">
+            <a:avLst>
+              <a:gd name="adj1" fmla="val -191240000"/>
+            </a:avLst>
+          </a:prstGeom>
+          <a:ln w="19050">
+            <a:solidFill>
+              <a:schemeClr val="tx1"/>
+            </a:solidFill>
+            <a:prstDash val="sysDash"/>
+            <a:tailEnd type="triangle"/>
+          </a:ln>
+        </p:spPr>
+        <p:style>
+          <a:lnRef idx="2">
+            <a:schemeClr val="accent1"/>
+          </a:lnRef>
+          <a:fillRef idx="0">
+            <a:srgbClr val="FFFFFF"/>
+          </a:fillRef>
+          <a:effectRef idx="0">
+            <a:srgbClr val="FFFFFF"/>
+          </a:effectRef>
+          <a:fontRef idx="minor">
+            <a:schemeClr val="tx1"/>
+          </a:fontRef>
+        </p:style>
+      </p:cxnSp>
+      <p:cxnSp>
+        <p:nvCxnSpPr>
+          <p:cNvPr id="69" name="曲线连接符 68"/>
+          <p:cNvCxnSpPr>
+            <a:stCxn id="64" idx="1"/>
+            <a:endCxn id="27" idx="1"/>
+          </p:cNvCxnSpPr>
+          <p:nvPr/>
+        </p:nvCxnSpPr>
+        <p:spPr>
+          <a:xfrm rot="10800000" flipH="1">
+            <a:off x="4450080" y="2969895"/>
+            <a:ext cx="3175" cy="5387340"/>
+          </a:xfrm>
+          <a:prstGeom prst="curvedConnector3">
+            <a:avLst>
+              <a:gd name="adj1" fmla="val -159360000"/>
+            </a:avLst>
+          </a:prstGeom>
+          <a:ln w="19050">
+            <a:solidFill>
+              <a:schemeClr val="tx1"/>
+            </a:solidFill>
+            <a:prstDash val="sysDash"/>
+            <a:tailEnd type="triangle"/>
+          </a:ln>
+        </p:spPr>
+        <p:style>
+          <a:lnRef idx="2">
+            <a:schemeClr val="accent1"/>
+          </a:lnRef>
+          <a:fillRef idx="0">
+            <a:srgbClr val="FFFFFF"/>
+          </a:fillRef>
+          <a:effectRef idx="0">
+            <a:srgbClr val="FFFFFF"/>
+          </a:effectRef>
+          <a:fontRef idx="minor">
+            <a:schemeClr val="tx1"/>
+          </a:fontRef>
+        </p:style>
+      </p:cxnSp>
+      <p:cxnSp>
+        <p:nvCxnSpPr>
+          <p:cNvPr id="70" name="曲线连接符 69"/>
+          <p:cNvCxnSpPr/>
+          <p:nvPr/>
+        </p:nvCxnSpPr>
+        <p:spPr>
+          <a:xfrm rot="10800000" flipH="1">
+            <a:off x="4382135" y="3867785"/>
+            <a:ext cx="3175" cy="4489450"/>
+          </a:xfrm>
+          <a:prstGeom prst="curvedConnector3">
+            <a:avLst>
+              <a:gd name="adj1" fmla="val -135000000"/>
+            </a:avLst>
+          </a:prstGeom>
+          <a:ln w="19050">
+            <a:solidFill>
+              <a:schemeClr val="tx1"/>
+            </a:solidFill>
+            <a:prstDash val="sysDash"/>
+            <a:tailEnd type="triangle"/>
+          </a:ln>
+        </p:spPr>
+        <p:style>
+          <a:lnRef idx="2">
+            <a:schemeClr val="accent1"/>
+          </a:lnRef>
+          <a:fillRef idx="0">
+            <a:srgbClr val="FFFFFF"/>
+          </a:fillRef>
+          <a:effectRef idx="0">
+            <a:srgbClr val="FFFFFF"/>
+          </a:effectRef>
+          <a:fontRef idx="minor">
+            <a:schemeClr val="tx1"/>
+          </a:fontRef>
+        </p:style>
+      </p:cxnSp>
+      <p:cxnSp>
+        <p:nvCxnSpPr>
+          <p:cNvPr id="71" name="曲线连接符 70"/>
+          <p:cNvCxnSpPr>
+            <a:stCxn id="64" idx="1"/>
+            <a:endCxn id="50" idx="2"/>
+          </p:cNvCxnSpPr>
+          <p:nvPr/>
+        </p:nvCxnSpPr>
+        <p:spPr>
+          <a:xfrm rot="10800000" flipH="1">
+            <a:off x="4449445" y="5653405"/>
+            <a:ext cx="3811905" cy="2703195"/>
+          </a:xfrm>
+          <a:prstGeom prst="curvedConnector4">
+            <a:avLst>
+              <a:gd name="adj1" fmla="val -83141"/>
+              <a:gd name="adj2" fmla="val 87197"/>
+            </a:avLst>
+          </a:prstGeom>
+          <a:ln w="19050">
+            <a:solidFill>
+              <a:schemeClr val="tx1"/>
+            </a:solidFill>
+            <a:prstDash val="sysDash"/>
+            <a:tailEnd type="triangle"/>
+          </a:ln>
+        </p:spPr>
+        <p:style>
+          <a:lnRef idx="2">
+            <a:schemeClr val="accent1"/>
+          </a:lnRef>
+          <a:fillRef idx="0">
+            <a:srgbClr val="FFFFFF"/>
+          </a:fillRef>
+          <a:effectRef idx="0">
+            <a:srgbClr val="FFFFFF"/>
+          </a:effectRef>
+          <a:fontRef idx="minor">
+            <a:schemeClr val="tx1"/>
+          </a:fontRef>
+        </p:style>
+      </p:cxnSp>
+      <p:sp>
+        <p:nvSpPr>
+          <p:cNvPr id="72" name="文本框 71"/>
+          <p:cNvSpPr txBox="1"/>
+          <p:nvPr/>
+        </p:nvSpPr>
+        <p:spPr>
+          <a:xfrm>
+            <a:off x="5078413" y="8768715"/>
+            <a:ext cx="2343150" cy="140335"/>
+          </a:xfrm>
+          <a:prstGeom prst="rect">
+            <a:avLst/>
+          </a:prstGeom>
+          <a:solidFill>
+            <a:schemeClr val="accent4">
+              <a:lumMod val="20000"/>
+              <a:lumOff val="80000"/>
+            </a:schemeClr>
+          </a:solidFill>
+        </p:spPr>
+        <p:txBody>
+          <a:bodyPr wrap="square" rtlCol="0" anchor="ctr" anchorCtr="0">
+            <a:noAutofit/>
+          </a:bodyPr>
+          <a:p>
+            <a:pPr algn="ctr"/>
+            <a:r>
+              <a:rPr lang="en-US" altLang="zh-CN" sz="1200" b="1">
+                <a:latin typeface="Times New Roman" panose="02020603050405020304" charset="0"/>
+                <a:cs typeface="Times New Roman" panose="02020603050405020304" charset="0"/>
+              </a:rPr>
+              <a:t>PASS OR </a:t>
+            </a:r>
+            <a:r>
+              <a:rPr lang="en-US" altLang="zh-CN" sz="1200" b="1">
+                <a:latin typeface="Times New Roman" panose="02020603050405020304" charset="0"/>
+                <a:cs typeface="Times New Roman" panose="02020603050405020304" charset="0"/>
+              </a:rPr>
+              <a:t>MAX_TRY_COUNT</a:t>
+            </a:r>
+            <a:endParaRPr lang="en-US" altLang="zh-CN" sz="1200" b="1">
+              <a:latin typeface="Times New Roman" panose="02020603050405020304" charset="0"/>
+              <a:cs typeface="Times New Roman" panose="02020603050405020304" charset="0"/>
+            </a:endParaRPr>
+          </a:p>
+        </p:txBody>
+      </p:sp>
+      <p:sp>
+        <p:nvSpPr>
+          <p:cNvPr id="73" name="文本框 72"/>
+          <p:cNvSpPr txBox="1"/>
+          <p:nvPr/>
+        </p:nvSpPr>
+        <p:spPr>
+          <a:xfrm>
+            <a:off x="3688080" y="8276590"/>
+            <a:ext cx="577215" cy="165735"/>
+          </a:xfrm>
+          <a:prstGeom prst="rect">
+            <a:avLst/>
+          </a:prstGeom>
+          <a:solidFill>
+            <a:schemeClr val="accent6">
+              <a:lumMod val="20000"/>
+              <a:lumOff val="80000"/>
+            </a:schemeClr>
+          </a:solidFill>
+        </p:spPr>
+        <p:txBody>
+          <a:bodyPr wrap="square" rtlCol="0" anchor="ctr" anchorCtr="0">
+            <a:noAutofit/>
+          </a:bodyPr>
+          <a:p>
+            <a:pPr algn="ctr"/>
+            <a:r>
+              <a:rPr lang="en-US" altLang="zh-CN" sz="1200" b="1">
+                <a:latin typeface="Times New Roman" panose="02020603050405020304" charset="0"/>
+                <a:cs typeface="Times New Roman" panose="02020603050405020304" charset="0"/>
+              </a:rPr>
+              <a:t>FAIL</a:t>
+            </a:r>
+            <a:endParaRPr lang="en-US" altLang="zh-CN" sz="1200" b="1">
+              <a:latin typeface="Times New Roman" panose="02020603050405020304" charset="0"/>
+              <a:cs typeface="Times New Roman" panose="02020603050405020304" charset="0"/>
+            </a:endParaRPr>
+          </a:p>
+        </p:txBody>
+      </p:sp>
+      <p:grpSp>
+        <p:nvGrpSpPr>
+          <p:cNvPr id="63" name="组合 62"/>
+          <p:cNvGrpSpPr/>
+          <p:nvPr/>
+        </p:nvGrpSpPr>
+        <p:grpSpPr>
+          <a:xfrm>
+            <a:off x="2112645" y="6292850"/>
+            <a:ext cx="8275320" cy="1347470"/>
+            <a:chOff x="3327" y="11029"/>
+            <a:chExt cx="13032" cy="2122"/>
+          </a:xfrm>
+        </p:grpSpPr>
+        <p:sp>
+          <p:nvSpPr>
+            <p:cNvPr id="53" name="矩形 52"/>
+            <p:cNvSpPr/>
+            <p:nvPr/>
+          </p:nvSpPr>
+          <p:spPr>
+            <a:xfrm>
+              <a:off x="3327" y="11029"/>
+              <a:ext cx="13032" cy="2122"/>
+            </a:xfrm>
+            <a:prstGeom prst="rect">
+              <a:avLst/>
+            </a:prstGeom>
+            <a:solidFill>
+              <a:schemeClr val="bg1"/>
+            </a:solidFill>
+            <a:ln>
+              <a:solidFill>
+                <a:schemeClr val="tx1"/>
+              </a:solidFill>
+            </a:ln>
+          </p:spPr>
+          <p:style>
+            <a:lnRef idx="2">
+              <a:schemeClr val="accent1">
+                <a:lumMod val="75000"/>
+              </a:schemeClr>
+            </a:lnRef>
+            <a:fillRef idx="1">
+              <a:schemeClr val="accent1"/>
+            </a:fillRef>
+            <a:effectRef idx="0">
+              <a:srgbClr val="FFFFFF"/>
+            </a:effectRef>
+            <a:fontRef idx="minor">
+              <a:schemeClr val="lt1"/>
+            </a:fontRef>
+          </p:style>
+          <p:txBody>
+            <a:bodyPr rtlCol="0" anchor="ctr"/>
+            <a:p>
+              <a:pPr algn="ctr"/>
+              <a:r>
+                <a:rPr lang="en-US" altLang="zh-CN" sz="1500" b="1">
+                  <a:solidFill>
+                    <a:schemeClr val="tx1"/>
+                  </a:solidFill>
+                  <a:latin typeface="Times New Roman" panose="02020603050405020304" charset="0"/>
+                  <a:ea typeface="微软雅黑" panose="020B0503020204020204" charset="-122"/>
+                  <a:sym typeface="+mn-ea"/>
+                </a:rPr>
+                <a:t>Quality Reviewer Agent</a:t>
+              </a:r>
+              <a:r>
+                <a:rPr lang="zh-CN" altLang="en-US" sz="1500">
+                  <a:solidFill>
+                    <a:schemeClr val="tx1"/>
+                  </a:solidFill>
+                  <a:latin typeface="Times New Roman" panose="02020603050405020304" charset="0"/>
+                  <a:ea typeface="微软雅黑" panose="020B0503020204020204" charset="-122"/>
+                  <a:sym typeface="+mn-ea"/>
+                </a:rPr>
+                <a:t>：</a:t>
+              </a:r>
+              <a:endParaRPr lang="zh-CN" altLang="en-US" sz="1500">
+                <a:solidFill>
+                  <a:schemeClr val="tx1"/>
+                </a:solidFill>
+                <a:latin typeface="Times New Roman" panose="02020603050405020304" charset="0"/>
+                <a:ea typeface="微软雅黑" panose="020B0503020204020204" charset="-122"/>
+                <a:sym typeface="+mn-ea"/>
+              </a:endParaRPr>
+            </a:p>
+            <a:p>
+              <a:pPr algn="ctr"/>
+              <a:endParaRPr lang="zh-CN" altLang="en-US" sz="1500">
+                <a:solidFill>
+                  <a:schemeClr val="tx1"/>
+                </a:solidFill>
+                <a:latin typeface="Times New Roman" panose="02020603050405020304" charset="0"/>
+                <a:ea typeface="微软雅黑" panose="020B0503020204020204" charset="-122"/>
+                <a:sym typeface="+mn-ea"/>
+              </a:endParaRPr>
+            </a:p>
+            <a:p>
+              <a:pPr algn="ctr"/>
+              <a:endParaRPr lang="zh-CN" altLang="en-US" sz="1500">
+                <a:solidFill>
+                  <a:schemeClr val="tx1"/>
+                </a:solidFill>
+                <a:latin typeface="Times New Roman" panose="02020603050405020304" charset="0"/>
+                <a:ea typeface="微软雅黑" panose="020B0503020204020204" charset="-122"/>
+                <a:sym typeface="+mn-ea"/>
+              </a:endParaRPr>
+            </a:p>
+            <a:p>
+              <a:pPr algn="ctr"/>
+              <a:endParaRPr lang="en-US" altLang="zh-CN" sz="1500" b="1">
+                <a:solidFill>
+                  <a:schemeClr val="tx1"/>
+                </a:solidFill>
+                <a:latin typeface="Times New Roman" panose="02020603050405020304" charset="0"/>
+                <a:ea typeface="微软雅黑" panose="020B0503020204020204" charset="-122"/>
+              </a:endParaRPr>
+            </a:p>
+            <a:p>
+              <a:pPr algn="ctr"/>
+              <a:endParaRPr lang="en-US" altLang="zh-CN" sz="1500" b="1">
+                <a:solidFill>
+                  <a:schemeClr val="tx1"/>
+                </a:solidFill>
+                <a:latin typeface="Times New Roman" panose="02020603050405020304" charset="0"/>
+                <a:ea typeface="微软雅黑" panose="020B0503020204020204" charset="-122"/>
+              </a:endParaRPr>
+            </a:p>
+          </p:txBody>
+        </p:sp>
+        <p:grpSp>
+          <p:nvGrpSpPr>
+            <p:cNvPr id="62" name="组合 61"/>
+            <p:cNvGrpSpPr/>
+            <p:nvPr/>
+          </p:nvGrpSpPr>
+          <p:grpSpPr>
+            <a:xfrm>
+              <a:off x="3843" y="11712"/>
+              <a:ext cx="12000" cy="1160"/>
+              <a:chOff x="3843" y="11712"/>
+              <a:chExt cx="12000" cy="1160"/>
+            </a:xfrm>
+          </p:grpSpPr>
+          <p:sp>
+            <p:nvSpPr>
+              <p:cNvPr id="55" name="矩形 54"/>
+              <p:cNvSpPr/>
+              <p:nvPr/>
+            </p:nvSpPr>
+            <p:spPr>
+              <a:xfrm>
+                <a:off x="3843" y="11712"/>
+                <a:ext cx="5669" cy="1161"/>
+              </a:xfrm>
+              <a:prstGeom prst="rect">
+                <a:avLst/>
+              </a:prstGeom>
+              <a:solidFill>
+                <a:schemeClr val="bg1"/>
+              </a:solidFill>
+              <a:ln>
+                <a:solidFill>
+                  <a:schemeClr val="tx1"/>
+                </a:solidFill>
+              </a:ln>
+            </p:spPr>
+            <p:style>
+              <a:lnRef idx="2">
+                <a:schemeClr val="accent1">
+                  <a:lumMod val="75000"/>
+                </a:schemeClr>
+              </a:lnRef>
+              <a:fillRef idx="1">
+                <a:schemeClr val="accent1"/>
+              </a:fillRef>
+              <a:effectRef idx="0">
+                <a:srgbClr val="FFFFFF"/>
+              </a:effectRef>
+              <a:fontRef idx="minor">
+                <a:schemeClr val="lt1"/>
+              </a:fontRef>
+            </p:style>
+            <p:txBody>
+              <a:bodyPr rtlCol="0" anchor="ctr"/>
+              <a:p>
+                <a:pPr algn="ctr"/>
+                <a:r>
+                  <a:rPr lang="en-US" altLang="zh-CN" sz="1500" b="1">
+                    <a:solidFill>
+                      <a:schemeClr val="tx1"/>
+                    </a:solidFill>
+                    <a:latin typeface="Times New Roman" panose="02020603050405020304" charset="0"/>
+                    <a:ea typeface="微软雅黑" panose="020B0503020204020204" charset="-122"/>
+                  </a:rPr>
+                  <a:t>Quality Guard</a:t>
+                </a:r>
+                <a:r>
+                  <a:rPr lang="zh-CN" altLang="en-US" sz="1500">
+                    <a:solidFill>
+                      <a:schemeClr val="tx1"/>
+                    </a:solidFill>
+                    <a:latin typeface="Times New Roman" panose="02020603050405020304" charset="0"/>
+                    <a:ea typeface="微软雅黑" panose="020B0503020204020204" charset="-122"/>
+                  </a:rPr>
+                  <a:t>：</a:t>
+                </a:r>
+                <a:endParaRPr lang="zh-CN" altLang="en-US" sz="1500">
+                  <a:solidFill>
+                    <a:schemeClr val="tx1"/>
+                  </a:solidFill>
+                  <a:latin typeface="Times New Roman" panose="02020603050405020304" charset="0"/>
+                  <a:ea typeface="微软雅黑" panose="020B0503020204020204" charset="-122"/>
+                </a:endParaRPr>
+              </a:p>
+              <a:p>
+                <a:pPr algn="ctr"/>
+                <a:r>
+                  <a:rPr lang="zh-CN" altLang="en-US" sz="1500">
+                    <a:solidFill>
+                      <a:schemeClr val="tx1"/>
+                    </a:solidFill>
+                    <a:latin typeface="Times New Roman" panose="02020603050405020304" charset="0"/>
+                    <a:ea typeface="微软雅黑" panose="020B0503020204020204" charset="-122"/>
+                  </a:rPr>
+                  <a:t>进行规则质量检查</a:t>
+                </a:r>
+                <a:endParaRPr lang="zh-CN" altLang="en-US" sz="1500">
+                  <a:solidFill>
+                    <a:schemeClr val="tx1"/>
+                  </a:solidFill>
+                  <a:latin typeface="Times New Roman" panose="02020603050405020304" charset="0"/>
+                  <a:ea typeface="微软雅黑" panose="020B0503020204020204" charset="-122"/>
+                </a:endParaRPr>
+              </a:p>
+            </p:txBody>
+          </p:sp>
+          <p:sp>
+            <p:nvSpPr>
+              <p:cNvPr id="56" name="矩形 55"/>
+              <p:cNvSpPr/>
+              <p:nvPr/>
+            </p:nvSpPr>
+            <p:spPr>
+              <a:xfrm>
+                <a:off x="10175" y="11712"/>
+                <a:ext cx="5669" cy="1161"/>
+              </a:xfrm>
+              <a:prstGeom prst="rect">
+                <a:avLst/>
+              </a:prstGeom>
+              <a:solidFill>
+                <a:schemeClr val="bg1"/>
+              </a:solidFill>
+              <a:ln>
+                <a:solidFill>
+                  <a:schemeClr val="tx1"/>
+                </a:solidFill>
+              </a:ln>
+            </p:spPr>
+            <p:style>
+              <a:lnRef idx="2">
+                <a:schemeClr val="accent1">
+                  <a:lumMod val="75000"/>
+                </a:schemeClr>
+              </a:lnRef>
+              <a:fillRef idx="1">
+                <a:schemeClr val="accent1"/>
+              </a:fillRef>
+              <a:effectRef idx="0">
+                <a:srgbClr val="FFFFFF"/>
+              </a:effectRef>
+              <a:fontRef idx="minor">
+                <a:schemeClr val="lt1"/>
+              </a:fontRef>
+            </p:style>
+            <p:txBody>
+              <a:bodyPr rtlCol="0" anchor="ctr"/>
+              <a:p>
+                <a:pPr algn="ctr"/>
+                <a:r>
+                  <a:rPr lang="en-US" altLang="zh-CN" sz="1500" b="1">
+                    <a:solidFill>
+                      <a:schemeClr val="tx1"/>
+                    </a:solidFill>
+                    <a:latin typeface="Times New Roman" panose="02020603050405020304" charset="0"/>
+                    <a:ea typeface="微软雅黑" panose="020B0503020204020204" charset="-122"/>
+                  </a:rPr>
+                  <a:t>LLM Quality Reviewer</a:t>
+                </a:r>
+                <a:r>
+                  <a:rPr lang="zh-CN" altLang="en-US" sz="1500">
+                    <a:solidFill>
+                      <a:schemeClr val="tx1"/>
+                    </a:solidFill>
+                    <a:latin typeface="Times New Roman" panose="02020603050405020304" charset="0"/>
+                    <a:ea typeface="微软雅黑" panose="020B0503020204020204" charset="-122"/>
+                  </a:rPr>
+                  <a:t>：</a:t>
+                </a:r>
+                <a:endParaRPr lang="zh-CN" altLang="en-US" sz="1500">
+                  <a:solidFill>
+                    <a:schemeClr val="tx1"/>
+                  </a:solidFill>
+                  <a:latin typeface="Times New Roman" panose="02020603050405020304" charset="0"/>
+                  <a:ea typeface="微软雅黑" panose="020B0503020204020204" charset="-122"/>
+                </a:endParaRPr>
+              </a:p>
+              <a:p>
+                <a:pPr algn="ctr"/>
+                <a:r>
+                  <a:rPr lang="zh-CN" altLang="en-US" sz="1500">
+                    <a:solidFill>
+                      <a:schemeClr val="tx1"/>
+                    </a:solidFill>
+                    <a:latin typeface="Times New Roman" panose="02020603050405020304" charset="0"/>
+                    <a:ea typeface="微软雅黑" panose="020B0503020204020204" charset="-122"/>
+                  </a:rPr>
+                  <a:t>进行语义复审</a:t>
+                </a:r>
+                <a:endParaRPr lang="zh-CN" altLang="en-US" sz="1500">
+                  <a:solidFill>
+                    <a:schemeClr val="tx1"/>
+                  </a:solidFill>
+                  <a:latin typeface="Times New Roman" panose="02020603050405020304" charset="0"/>
+                  <a:ea typeface="微软雅黑" panose="020B0503020204020204" charset="-122"/>
+                </a:endParaRPr>
+              </a:p>
+            </p:txBody>
+          </p:sp>
+          <p:cxnSp>
+            <p:nvCxnSpPr>
+              <p:cNvPr id="61" name="直接箭头连接符 60"/>
+              <p:cNvCxnSpPr>
+                <a:stCxn id="55" idx="3"/>
+                <a:endCxn id="56" idx="1"/>
+              </p:cNvCxnSpPr>
+              <p:nvPr/>
+            </p:nvCxnSpPr>
+            <p:spPr>
+              <a:xfrm>
+                <a:off x="9512" y="12293"/>
+                <a:ext cx="663" cy="0"/>
+              </a:xfrm>
+              <a:prstGeom prst="straightConnector1">
+                <a:avLst/>
+              </a:prstGeom>
+              <a:ln w="19050">
+                <a:solidFill>
+                  <a:schemeClr val="tx1"/>
+                </a:solidFill>
+                <a:tailEnd type="triangle"/>
+              </a:ln>
+            </p:spPr>
+            <p:style>
+              <a:lnRef idx="2">
+                <a:schemeClr val="accent1"/>
+              </a:lnRef>
+              <a:fillRef idx="0">
+                <a:srgbClr val="FFFFFF"/>
+              </a:fillRef>
+              <a:effectRef idx="0">
+                <a:srgbClr val="FFFFFF"/>
+              </a:effectRef>
+              <a:fontRef idx="minor">
+                <a:schemeClr val="tx1"/>
+              </a:fontRef>
+            </p:style>
+          </p:cxnSp>
+        </p:grpSp>
+      </p:grpSp>
+      <p:sp>
+        <p:nvSpPr>
+          <p:cNvPr id="75" name="流程图: 磁盘 74"/>
+          <p:cNvSpPr/>
+          <p:nvPr/>
+        </p:nvSpPr>
+        <p:spPr>
+          <a:xfrm>
+            <a:off x="9007475" y="3531870"/>
+            <a:ext cx="1233805" cy="671830"/>
+          </a:xfrm>
+          <a:prstGeom prst="flowChartMagneticDisk">
+            <a:avLst/>
+          </a:prstGeom>
+          <a:solidFill>
+            <a:schemeClr val="bg1"/>
+          </a:solidFill>
+          <a:ln>
+            <a:solidFill>
+              <a:schemeClr val="tx1"/>
+            </a:solidFill>
+          </a:ln>
+        </p:spPr>
+        <p:style>
+          <a:lnRef idx="2">
+            <a:schemeClr val="accent1">
+              <a:lumMod val="75000"/>
+            </a:schemeClr>
+          </a:lnRef>
+          <a:fillRef idx="1">
+            <a:schemeClr val="accent1"/>
+          </a:fillRef>
+          <a:effectRef idx="0">
+            <a:srgbClr val="FFFFFF"/>
+          </a:effectRef>
+          <a:fontRef idx="minor">
+            <a:schemeClr val="lt1"/>
+          </a:fontRef>
+        </p:style>
+        <p:txBody>
+          <a:bodyPr rtlCol="0" anchor="ctr"/>
+          <a:p>
+            <a:pPr algn="ctr"/>
+            <a:r>
+              <a:rPr lang="zh-CN" altLang="en-US" sz="1500" b="1">
+                <a:solidFill>
+                  <a:schemeClr val="tx1"/>
+                </a:solidFill>
+                <a:latin typeface="微软雅黑" panose="020B0503020204020204" charset="-122"/>
+                <a:ea typeface="微软雅黑" panose="020B0503020204020204" charset="-122"/>
+              </a:rPr>
+              <a:t>知识库</a:t>
+            </a:r>
+            <a:endParaRPr lang="zh-CN" altLang="en-US" sz="1500" b="1">
+              <a:solidFill>
+                <a:schemeClr val="tx1"/>
+              </a:solidFill>
+              <a:latin typeface="微软雅黑" panose="020B0503020204020204" charset="-122"/>
+              <a:ea typeface="微软雅黑" panose="020B0503020204020204" charset="-122"/>
+            </a:endParaRPr>
+          </a:p>
+        </p:txBody>
+      </p:sp>
+      <p:cxnSp>
+        <p:nvCxnSpPr>
+          <p:cNvPr id="76" name="直接箭头连接符 75"/>
+          <p:cNvCxnSpPr>
+            <a:stCxn id="75" idx="2"/>
+            <a:endCxn id="30" idx="3"/>
+          </p:cNvCxnSpPr>
+          <p:nvPr/>
+        </p:nvCxnSpPr>
+        <p:spPr>
+          <a:xfrm flipH="1">
+            <a:off x="8049895" y="3867785"/>
+            <a:ext cx="957580" cy="0"/>
+          </a:xfrm>
+          <a:prstGeom prst="straightConnector1">
+            <a:avLst/>
+          </a:prstGeom>
+          <a:ln w="19050">
+            <a:solidFill>
+              <a:schemeClr val="tx1"/>
+            </a:solidFill>
+            <a:headEnd type="triangle"/>
+            <a:tailEnd type="triangle"/>
+          </a:ln>
+        </p:spPr>
+        <p:style>
+          <a:lnRef idx="2">
+            <a:schemeClr val="accent1"/>
+          </a:lnRef>
+          <a:fillRef idx="0">
+            <a:srgbClr val="FFFFFF"/>
+          </a:fillRef>
+          <a:effectRef idx="0">
+            <a:srgbClr val="FFFFFF"/>
+          </a:effectRef>
+          <a:fontRef idx="minor">
+            <a:schemeClr val="tx1"/>
+          </a:fontRef>
+        </p:style>
+      </p:cxnSp>
+      <p:cxnSp>
+        <p:nvCxnSpPr>
+          <p:cNvPr id="80" name="肘形连接符 79"/>
+          <p:cNvCxnSpPr>
+            <a:stCxn id="56" idx="3"/>
+            <a:endCxn id="78" idx="2"/>
+          </p:cNvCxnSpPr>
+          <p:nvPr/>
+        </p:nvCxnSpPr>
+        <p:spPr>
+          <a:xfrm flipV="1">
+            <a:off x="10060305" y="6785610"/>
+            <a:ext cx="1508760" cy="309880"/>
+          </a:xfrm>
+          <a:prstGeom prst="bentConnector2">
+            <a:avLst/>
+          </a:prstGeom>
+          <a:ln w="19050">
+            <a:solidFill>
+              <a:schemeClr val="tx1"/>
+            </a:solidFill>
+            <a:tailEnd type="triangle"/>
+          </a:ln>
+        </p:spPr>
+        <p:style>
+          <a:lnRef idx="2">
+            <a:schemeClr val="accent1"/>
+          </a:lnRef>
+          <a:fillRef idx="0">
+            <a:srgbClr val="FFFFFF"/>
+          </a:fillRef>
+          <a:effectRef idx="0">
+            <a:srgbClr val="FFFFFF"/>
+          </a:effectRef>
+          <a:fontRef idx="minor">
+            <a:schemeClr val="tx1"/>
+          </a:fontRef>
+        </p:style>
+      </p:cxnSp>
+      <p:cxnSp>
+        <p:nvCxnSpPr>
+          <p:cNvPr id="81" name="肘形连接符 80"/>
+          <p:cNvCxnSpPr>
+            <a:stCxn id="77" idx="0"/>
+            <a:endCxn id="50" idx="3"/>
+          </p:cNvCxnSpPr>
+          <p:nvPr/>
+        </p:nvCxnSpPr>
+        <p:spPr>
+          <a:xfrm rot="16200000" flipV="1">
+            <a:off x="10683240" y="4664075"/>
+            <a:ext cx="263525" cy="1506855"/>
+          </a:xfrm>
+          <a:prstGeom prst="bentConnector2">
+            <a:avLst/>
+          </a:prstGeom>
+          <a:ln w="19050">
+            <a:solidFill>
+              <a:schemeClr val="tx1"/>
+            </a:solidFill>
+            <a:tailEnd type="triangle"/>
+          </a:ln>
+        </p:spPr>
+        <p:style>
+          <a:lnRef idx="2">
+            <a:schemeClr val="accent1"/>
+          </a:lnRef>
+          <a:fillRef idx="0">
+            <a:srgbClr val="FFFFFF"/>
+          </a:fillRef>
+          <a:effectRef idx="0">
+            <a:srgbClr val="FFFFFF"/>
+          </a:effectRef>
+          <a:fontRef idx="minor">
+            <a:schemeClr val="tx1"/>
+          </a:fontRef>
+        </p:style>
+      </p:cxnSp>
+      <p:grpSp>
+        <p:nvGrpSpPr>
+          <p:cNvPr id="83" name="组合 82"/>
+          <p:cNvGrpSpPr/>
+          <p:nvPr/>
+        </p:nvGrpSpPr>
+        <p:grpSpPr>
+          <a:xfrm>
+            <a:off x="10782935" y="5499100"/>
+            <a:ext cx="1296035" cy="1285875"/>
+            <a:chOff x="16981" y="8660"/>
+            <a:chExt cx="2041" cy="2025"/>
+          </a:xfrm>
+        </p:grpSpPr>
+        <p:pic>
+          <p:nvPicPr>
+            <p:cNvPr id="77" name="图片 76" descr="文件"/>
+            <p:cNvPicPr>
+              <a:picLocks noChangeAspect="1"/>
+            </p:cNvPicPr>
+            <p:nvPr>
+              <p:custDataLst>
+                <p:tags r:id="rId1"/>
+              </p:custDataLst>
+            </p:nvPr>
+          </p:nvPicPr>
+          <p:blipFill>
+            <a:blip r:embed="rId2">
+              <a:extLst>
+                <a:ext uri="{96DAC541-7B7A-43D3-8B79-37D633B846F1}">
+                  <asvg:svgBlip xmlns:asvg="http://schemas.microsoft.com/office/drawing/2016/SVG/main" r:embed="rId3"/>
+                </a:ext>
+              </a:extLst>
+            </a:blip>
+            <a:stretch>
+              <a:fillRect/>
+            </a:stretch>
+          </p:blipFill>
+          <p:spPr>
+            <a:xfrm>
+              <a:off x="17498" y="8739"/>
+              <a:ext cx="1440" cy="1440"/>
+            </a:xfrm>
+            <a:prstGeom prst="rect">
+              <a:avLst/>
+            </a:prstGeom>
+          </p:spPr>
+        </p:pic>
+        <p:sp>
+          <p:nvSpPr>
+            <p:cNvPr id="78" name="文本框 77"/>
+            <p:cNvSpPr txBox="1"/>
+            <p:nvPr/>
+          </p:nvSpPr>
+          <p:spPr>
+            <a:xfrm>
+              <a:off x="17414" y="10179"/>
+              <a:ext cx="1609" cy="507"/>
+            </a:xfrm>
+            <a:prstGeom prst="rect">
+              <a:avLst/>
+            </a:prstGeom>
+            <a:noFill/>
+          </p:spPr>
+          <p:txBody>
+            <a:bodyPr wrap="square" rtlCol="0">
+              <a:spAutoFit/>
+            </a:bodyPr>
+            <a:p>
+              <a:pPr algn="ctr"/>
+              <a:r>
+                <a:rPr lang="zh-CN" altLang="en-US" sz="1500" b="1"/>
+                <a:t>记忆文件</a:t>
+              </a:r>
+              <a:endParaRPr lang="zh-CN" altLang="en-US" sz="1500" b="1"/>
+            </a:p>
+          </p:txBody>
+        </p:sp>
+        <p:sp>
+          <p:nvSpPr>
+            <p:cNvPr id="82" name="文本框 81"/>
+            <p:cNvSpPr txBox="1"/>
+            <p:nvPr/>
+          </p:nvSpPr>
+          <p:spPr>
+            <a:xfrm>
+              <a:off x="16981" y="8660"/>
+              <a:ext cx="517" cy="1598"/>
+            </a:xfrm>
+            <a:prstGeom prst="rect">
+              <a:avLst/>
+            </a:prstGeom>
+            <a:noFill/>
+          </p:spPr>
+          <p:txBody>
+            <a:bodyPr wrap="square" rtlCol="0">
+              <a:spAutoFit/>
+            </a:bodyPr>
+            <a:p>
+              <a:r>
+                <a:rPr lang="zh-CN" altLang="en-US" sz="1500"/>
+                <a:t>评审建议</a:t>
+              </a:r>
+              <a:endParaRPr lang="zh-CN" altLang="en-US" sz="1500"/>
+            </a:p>
+          </p:txBody>
+        </p:sp>
+      </p:grpSp>
+    </p:spTree>
+  </p:cSld>
+  <p:clrMapOvr>
+    <a:masterClrMapping/>
+  </p:clrMapOvr>
+</p:sld>
+</file>
+
+<file path=ppt/tags/tag1.xml><?xml version="1.0" encoding="utf-8"?>
+<p:tagLst xmlns:p="http://schemas.openxmlformats.org/presentationml/2006/main">
+  <p:tag name="KSO_DOCER_RESOURCE_TRACE_INFO" val="{&quot;id&quot;:&quot;50032351&quot;,&quot;origin&quot;:0,&quot;type&quot;:&quot;icons&quot;,&quot;user&quot;:&quot;594548642&quot;}"/>
+</p:tagLst>
+</file>
+
+<file path=ppt/tags/tag2.xml><?xml version="1.0" encoding="utf-8"?>
+<p:tagLst xmlns:p="http://schemas.openxmlformats.org/presentationml/2006/main">
+  <p:tag name="resource_record_key" val="{&quot;10&quot;:[50032351]}"/>
+</p:tagLst>
+</file>
+
 <file path=ppt/theme/theme1.xml><?xml version="1.0" encoding="utf-8"?>
 <a:theme xmlns:a="http://schemas.openxmlformats.org/drawingml/2006/main" name="WPS">
   <a:themeElements>

--- a/pictures/pic.pptx
+++ b/pictures/pic.pptx
@@ -5029,871 +5029,30 @@
         <p:nvPr/>
       </p:nvGrpSpPr>
       <p:grpSpPr/>
-      <p:sp>
-        <p:nvSpPr>
-          <p:cNvPr id="4" name="矩形 3"/>
-          <p:cNvSpPr/>
-          <p:nvPr/>
-        </p:nvSpPr>
-        <p:spPr>
-          <a:xfrm>
-            <a:off x="4450080" y="-711835"/>
-            <a:ext cx="3599815" cy="360045"/>
-          </a:xfrm>
-          <a:prstGeom prst="rect">
-            <a:avLst/>
-          </a:prstGeom>
-          <a:solidFill>
-            <a:schemeClr val="bg1"/>
-          </a:solidFill>
-          <a:ln>
-            <a:solidFill>
-              <a:schemeClr val="tx1"/>
-            </a:solidFill>
-          </a:ln>
-        </p:spPr>
-        <p:style>
-          <a:lnRef idx="2">
-            <a:schemeClr val="accent1">
-              <a:lumMod val="75000"/>
-            </a:schemeClr>
-          </a:lnRef>
-          <a:fillRef idx="1">
-            <a:schemeClr val="accent1"/>
-          </a:fillRef>
-          <a:effectRef idx="0">
-            <a:srgbClr val="FFFFFF"/>
-          </a:effectRef>
-          <a:fontRef idx="minor">
-            <a:schemeClr val="lt1"/>
-          </a:fontRef>
-        </p:style>
-        <p:txBody>
-          <a:bodyPr rtlCol="0" anchor="ctr"/>
-          <a:p>
-            <a:pPr algn="ctr"/>
-            <a:r>
-              <a:rPr lang="zh-CN" altLang="en-US" sz="1500" b="1">
-                <a:solidFill>
-                  <a:schemeClr val="tx1"/>
-                </a:solidFill>
-                <a:latin typeface="Times New Roman" panose="02020603050405020304" charset="0"/>
-                <a:ea typeface="微软雅黑" panose="020B0503020204020204" charset="-122"/>
-              </a:rPr>
-              <a:t>输入</a:t>
-            </a:r>
-            <a:r>
-              <a:rPr lang="zh-CN" altLang="en-US" sz="1500">
-                <a:solidFill>
-                  <a:schemeClr val="tx1"/>
-                </a:solidFill>
-                <a:latin typeface="Times New Roman" panose="02020603050405020304" charset="0"/>
-                <a:ea typeface="微软雅黑" panose="020B0503020204020204" charset="-122"/>
-              </a:rPr>
-              <a:t>：</a:t>
-            </a:r>
-            <a:r>
-              <a:rPr lang="en-US" altLang="zh-CN" sz="1500">
-                <a:solidFill>
-                  <a:schemeClr val="tx1"/>
-                </a:solidFill>
-                <a:latin typeface="Times New Roman" panose="02020603050405020304" charset="0"/>
-                <a:ea typeface="微软雅黑" panose="020B0503020204020204" charset="-122"/>
-              </a:rPr>
-              <a:t>Github</a:t>
-            </a:r>
-            <a:r>
-              <a:rPr lang="zh-CN" altLang="en-US" sz="1500">
-                <a:solidFill>
-                  <a:schemeClr val="tx1"/>
-                </a:solidFill>
-                <a:latin typeface="Times New Roman" panose="02020603050405020304" charset="0"/>
-                <a:ea typeface="微软雅黑" panose="020B0503020204020204" charset="-122"/>
-              </a:rPr>
-              <a:t>仓库链接</a:t>
-            </a:r>
-            <a:endParaRPr lang="zh-CN" altLang="en-US" sz="1500">
-              <a:solidFill>
-                <a:schemeClr val="tx1"/>
-              </a:solidFill>
-              <a:latin typeface="Times New Roman" panose="02020603050405020304" charset="0"/>
-              <a:ea typeface="微软雅黑" panose="020B0503020204020204" charset="-122"/>
-            </a:endParaRPr>
-          </a:p>
-        </p:txBody>
-      </p:sp>
-      <p:cxnSp>
-        <p:nvCxnSpPr>
-          <p:cNvPr id="16" name="直接箭头连接符 15"/>
-          <p:cNvCxnSpPr>
-            <a:stCxn id="4" idx="2"/>
-            <a:endCxn id="2" idx="0"/>
-          </p:cNvCxnSpPr>
-          <p:nvPr/>
-        </p:nvCxnSpPr>
-        <p:spPr>
-          <a:xfrm>
-            <a:off x="6250305" y="-351790"/>
-            <a:ext cx="0" cy="358140"/>
-          </a:xfrm>
-          <a:prstGeom prst="straightConnector1">
-            <a:avLst/>
-          </a:prstGeom>
-          <a:ln w="19050">
-            <a:solidFill>
-              <a:schemeClr val="tx1"/>
-            </a:solidFill>
-            <a:tailEnd type="triangle"/>
-          </a:ln>
-        </p:spPr>
-        <p:style>
-          <a:lnRef idx="2">
-            <a:schemeClr val="accent1"/>
-          </a:lnRef>
-          <a:fillRef idx="0">
-            <a:srgbClr val="FFFFFF"/>
-          </a:fillRef>
-          <a:effectRef idx="0">
-            <a:srgbClr val="FFFFFF"/>
-          </a:effectRef>
-          <a:fontRef idx="minor">
-            <a:schemeClr val="tx1"/>
-          </a:fontRef>
-        </p:style>
-      </p:cxnSp>
-      <p:sp>
-        <p:nvSpPr>
-          <p:cNvPr id="2" name="矩形 1"/>
-          <p:cNvSpPr/>
-          <p:nvPr/>
-        </p:nvSpPr>
-        <p:spPr>
-          <a:xfrm>
-            <a:off x="4450080" y="6350"/>
-            <a:ext cx="3599815" cy="539750"/>
-          </a:xfrm>
-          <a:prstGeom prst="rect">
-            <a:avLst/>
-          </a:prstGeom>
-          <a:solidFill>
-            <a:schemeClr val="bg1"/>
-          </a:solidFill>
-          <a:ln>
-            <a:solidFill>
-              <a:schemeClr val="tx1"/>
-            </a:solidFill>
-          </a:ln>
-        </p:spPr>
-        <p:style>
-          <a:lnRef idx="2">
-            <a:schemeClr val="accent1">
-              <a:lumMod val="75000"/>
-            </a:schemeClr>
-          </a:lnRef>
-          <a:fillRef idx="1">
-            <a:schemeClr val="accent1"/>
-          </a:fillRef>
-          <a:effectRef idx="0">
-            <a:srgbClr val="FFFFFF"/>
-          </a:effectRef>
-          <a:fontRef idx="minor">
-            <a:schemeClr val="lt1"/>
-          </a:fontRef>
-        </p:style>
-        <p:txBody>
-          <a:bodyPr rtlCol="0" anchor="ctr"/>
-          <a:p>
-            <a:pPr algn="ctr"/>
-            <a:r>
-              <a:rPr lang="en-US" altLang="zh-CN" sz="1500" b="1">
-                <a:solidFill>
-                  <a:schemeClr val="tx1"/>
-                </a:solidFill>
-                <a:latin typeface="Times New Roman" panose="02020603050405020304" charset="0"/>
-                <a:ea typeface="微软雅黑" panose="020B0503020204020204" charset="-122"/>
-              </a:rPr>
-              <a:t>Project Parser Agent</a:t>
-            </a:r>
-            <a:r>
-              <a:rPr lang="zh-CN" altLang="en-US" sz="1500">
-                <a:solidFill>
-                  <a:schemeClr val="tx1"/>
-                </a:solidFill>
-                <a:latin typeface="Times New Roman" panose="02020603050405020304" charset="0"/>
-                <a:ea typeface="微软雅黑" panose="020B0503020204020204" charset="-122"/>
-              </a:rPr>
-              <a:t>：</a:t>
-            </a:r>
-            <a:endParaRPr lang="zh-CN" altLang="en-US" sz="1500">
-              <a:solidFill>
-                <a:schemeClr val="tx1"/>
-              </a:solidFill>
-              <a:latin typeface="Times New Roman" panose="02020603050405020304" charset="0"/>
-              <a:ea typeface="微软雅黑" panose="020B0503020204020204" charset="-122"/>
-            </a:endParaRPr>
-          </a:p>
-          <a:p>
-            <a:pPr algn="ctr"/>
-            <a:r>
-              <a:rPr lang="zh-CN" altLang="en-US" sz="1500">
-                <a:solidFill>
-                  <a:schemeClr val="tx1"/>
-                </a:solidFill>
-                <a:latin typeface="Times New Roman" panose="02020603050405020304" charset="0"/>
-                <a:ea typeface="微软雅黑" panose="020B0503020204020204" charset="-122"/>
-              </a:rPr>
-              <a:t>提取项目基础信息</a:t>
-            </a:r>
-            <a:endParaRPr lang="zh-CN" altLang="en-US" sz="1500">
-              <a:solidFill>
-                <a:schemeClr val="tx1"/>
-              </a:solidFill>
-              <a:latin typeface="Times New Roman" panose="02020603050405020304" charset="0"/>
-              <a:ea typeface="微软雅黑" panose="020B0503020204020204" charset="-122"/>
-            </a:endParaRPr>
-          </a:p>
-        </p:txBody>
-      </p:sp>
-      <p:sp>
-        <p:nvSpPr>
-          <p:cNvPr id="3" name="矩形 2"/>
-          <p:cNvSpPr/>
-          <p:nvPr/>
-        </p:nvSpPr>
-        <p:spPr>
-          <a:xfrm>
-            <a:off x="4450080" y="904240"/>
-            <a:ext cx="3599815" cy="539750"/>
-          </a:xfrm>
-          <a:prstGeom prst="rect">
-            <a:avLst/>
-          </a:prstGeom>
-          <a:solidFill>
-            <a:schemeClr val="bg1"/>
-          </a:solidFill>
-          <a:ln>
-            <a:solidFill>
-              <a:schemeClr val="tx1"/>
-            </a:solidFill>
-          </a:ln>
-        </p:spPr>
-        <p:style>
-          <a:lnRef idx="2">
-            <a:schemeClr val="accent1">
-              <a:lumMod val="75000"/>
-            </a:schemeClr>
-          </a:lnRef>
-          <a:fillRef idx="1">
-            <a:schemeClr val="accent1"/>
-          </a:fillRef>
-          <a:effectRef idx="0">
-            <a:srgbClr val="FFFFFF"/>
-          </a:effectRef>
-          <a:fontRef idx="minor">
-            <a:schemeClr val="lt1"/>
-          </a:fontRef>
-        </p:style>
-        <p:txBody>
-          <a:bodyPr rtlCol="0" anchor="ctr"/>
-          <a:p>
-            <a:pPr algn="ctr"/>
-            <a:r>
-              <a:rPr lang="en-US" altLang="zh-CN" sz="1500" b="1">
-                <a:solidFill>
-                  <a:schemeClr val="tx1"/>
-                </a:solidFill>
-                <a:latin typeface="Times New Roman" panose="02020603050405020304" charset="0"/>
-                <a:ea typeface="微软雅黑" panose="020B0503020204020204" charset="-122"/>
-                <a:sym typeface="+mn-ea"/>
-              </a:rPr>
-              <a:t>Type Classifier Agent</a:t>
-            </a:r>
-            <a:r>
-              <a:rPr lang="zh-CN" altLang="en-US" sz="1500">
-                <a:solidFill>
-                  <a:schemeClr val="tx1"/>
-                </a:solidFill>
-                <a:latin typeface="Times New Roman" panose="02020603050405020304" charset="0"/>
-                <a:ea typeface="微软雅黑" panose="020B0503020204020204" charset="-122"/>
-                <a:sym typeface="+mn-ea"/>
-              </a:rPr>
-              <a:t>：</a:t>
-            </a:r>
-            <a:endParaRPr lang="zh-CN" altLang="en-US" sz="1500">
-              <a:solidFill>
-                <a:schemeClr val="tx1"/>
-              </a:solidFill>
-              <a:latin typeface="Times New Roman" panose="02020603050405020304" charset="0"/>
-              <a:ea typeface="微软雅黑" panose="020B0503020204020204" charset="-122"/>
-            </a:endParaRPr>
-          </a:p>
-          <a:p>
-            <a:pPr algn="ctr"/>
-            <a:r>
-              <a:rPr lang="zh-CN" altLang="en-US" sz="1500">
-                <a:solidFill>
-                  <a:schemeClr val="tx1"/>
-                </a:solidFill>
-                <a:latin typeface="Times New Roman" panose="02020603050405020304" charset="0"/>
-                <a:ea typeface="微软雅黑" panose="020B0503020204020204" charset="-122"/>
-                <a:sym typeface="+mn-ea"/>
-              </a:rPr>
-              <a:t>判断开源项目类型</a:t>
-            </a:r>
-            <a:endParaRPr lang="zh-CN" altLang="en-US" sz="1500">
-              <a:solidFill>
-                <a:schemeClr val="tx1"/>
-              </a:solidFill>
-              <a:latin typeface="Times New Roman" panose="02020603050405020304" charset="0"/>
-              <a:ea typeface="微软雅黑" panose="020B0503020204020204" charset="-122"/>
-            </a:endParaRPr>
-          </a:p>
-        </p:txBody>
-      </p:sp>
-      <p:cxnSp>
-        <p:nvCxnSpPr>
-          <p:cNvPr id="6" name="直接箭头连接符 5"/>
-          <p:cNvCxnSpPr>
-            <a:stCxn id="2" idx="2"/>
-            <a:endCxn id="3" idx="0"/>
-          </p:cNvCxnSpPr>
-          <p:nvPr/>
-        </p:nvCxnSpPr>
-        <p:spPr>
-          <a:xfrm>
-            <a:off x="6250305" y="546100"/>
-            <a:ext cx="0" cy="358140"/>
-          </a:xfrm>
-          <a:prstGeom prst="straightConnector1">
-            <a:avLst/>
-          </a:prstGeom>
-          <a:ln w="19050">
-            <a:solidFill>
-              <a:schemeClr val="tx1"/>
-            </a:solidFill>
-            <a:tailEnd type="triangle"/>
-          </a:ln>
-        </p:spPr>
-        <p:style>
-          <a:lnRef idx="2">
-            <a:schemeClr val="accent1"/>
-          </a:lnRef>
-          <a:fillRef idx="0">
-            <a:srgbClr val="FFFFFF"/>
-          </a:fillRef>
-          <a:effectRef idx="0">
-            <a:srgbClr val="FFFFFF"/>
-          </a:effectRef>
-          <a:fontRef idx="minor">
-            <a:schemeClr val="tx1"/>
-          </a:fontRef>
-        </p:style>
-      </p:cxnSp>
-      <p:sp>
-        <p:nvSpPr>
-          <p:cNvPr id="14" name="矩形 13"/>
-          <p:cNvSpPr/>
-          <p:nvPr/>
-        </p:nvSpPr>
-        <p:spPr>
-          <a:xfrm>
-            <a:off x="4450080" y="1802130"/>
-            <a:ext cx="3599815" cy="539750"/>
-          </a:xfrm>
-          <a:prstGeom prst="rect">
-            <a:avLst/>
-          </a:prstGeom>
-          <a:solidFill>
-            <a:schemeClr val="bg1"/>
-          </a:solidFill>
-          <a:ln>
-            <a:solidFill>
-              <a:schemeClr val="tx1"/>
-            </a:solidFill>
-          </a:ln>
-        </p:spPr>
-        <p:style>
-          <a:lnRef idx="2">
-            <a:schemeClr val="accent1">
-              <a:lumMod val="75000"/>
-            </a:schemeClr>
-          </a:lnRef>
-          <a:fillRef idx="1">
-            <a:schemeClr val="accent1"/>
-          </a:fillRef>
-          <a:effectRef idx="0">
-            <a:srgbClr val="FFFFFF"/>
-          </a:effectRef>
-          <a:fontRef idx="minor">
-            <a:schemeClr val="lt1"/>
-          </a:fontRef>
-        </p:style>
-        <p:txBody>
-          <a:bodyPr rtlCol="0" anchor="ctr"/>
-          <a:p>
-            <a:pPr algn="ctr"/>
-            <a:r>
-              <a:rPr lang="en-US" altLang="zh-CN" sz="1500" b="1">
-                <a:solidFill>
-                  <a:schemeClr val="tx1"/>
-                </a:solidFill>
-                <a:latin typeface="Times New Roman" panose="02020603050405020304" charset="0"/>
-                <a:ea typeface="微软雅黑" panose="020B0503020204020204" charset="-122"/>
-              </a:rPr>
-              <a:t>Metric Collector Agent</a:t>
-            </a:r>
-            <a:r>
-              <a:rPr lang="zh-CN" altLang="en-US" sz="1500">
-                <a:solidFill>
-                  <a:schemeClr val="tx1"/>
-                </a:solidFill>
-                <a:latin typeface="Times New Roman" panose="02020603050405020304" charset="0"/>
-                <a:ea typeface="微软雅黑" panose="020B0503020204020204" charset="-122"/>
-              </a:rPr>
-              <a:t>：</a:t>
-            </a:r>
-            <a:endParaRPr lang="zh-CN" altLang="en-US" sz="1500">
-              <a:solidFill>
-                <a:schemeClr val="tx1"/>
-              </a:solidFill>
-              <a:latin typeface="Times New Roman" panose="02020603050405020304" charset="0"/>
-              <a:ea typeface="微软雅黑" panose="020B0503020204020204" charset="-122"/>
-            </a:endParaRPr>
-          </a:p>
-          <a:p>
-            <a:pPr algn="ctr"/>
-            <a:r>
-              <a:rPr lang="zh-CN" altLang="en-US" sz="1500">
-                <a:solidFill>
-                  <a:schemeClr val="tx1"/>
-                </a:solidFill>
-                <a:latin typeface="Times New Roman" panose="02020603050405020304" charset="0"/>
-                <a:ea typeface="微软雅黑" panose="020B0503020204020204" charset="-122"/>
-              </a:rPr>
-              <a:t>调用接口获取指标数据</a:t>
-            </a:r>
-            <a:endParaRPr lang="zh-CN" altLang="en-US" sz="1500">
-              <a:solidFill>
-                <a:schemeClr val="tx1"/>
-              </a:solidFill>
-              <a:latin typeface="Times New Roman" panose="02020603050405020304" charset="0"/>
-              <a:ea typeface="微软雅黑" panose="020B0503020204020204" charset="-122"/>
-            </a:endParaRPr>
-          </a:p>
-        </p:txBody>
-      </p:sp>
-      <p:cxnSp>
-        <p:nvCxnSpPr>
-          <p:cNvPr id="26" name="直接箭头连接符 25"/>
-          <p:cNvCxnSpPr>
-            <a:stCxn id="3" idx="2"/>
-            <a:endCxn id="14" idx="0"/>
-          </p:cNvCxnSpPr>
-          <p:nvPr/>
-        </p:nvCxnSpPr>
-        <p:spPr>
-          <a:xfrm>
-            <a:off x="6250305" y="1443990"/>
-            <a:ext cx="0" cy="358140"/>
-          </a:xfrm>
-          <a:prstGeom prst="straightConnector1">
-            <a:avLst/>
-          </a:prstGeom>
-          <a:ln w="19050">
-            <a:solidFill>
-              <a:schemeClr val="tx1"/>
-            </a:solidFill>
-            <a:tailEnd type="triangle"/>
-          </a:ln>
-        </p:spPr>
-        <p:style>
-          <a:lnRef idx="2">
-            <a:schemeClr val="accent1"/>
-          </a:lnRef>
-          <a:fillRef idx="0">
-            <a:srgbClr val="FFFFFF"/>
-          </a:fillRef>
-          <a:effectRef idx="0">
-            <a:srgbClr val="FFFFFF"/>
-          </a:effectRef>
-          <a:fontRef idx="minor">
-            <a:schemeClr val="tx1"/>
-          </a:fontRef>
-        </p:style>
-      </p:cxnSp>
-      <p:sp>
-        <p:nvSpPr>
-          <p:cNvPr id="27" name="矩形 26"/>
-          <p:cNvSpPr/>
-          <p:nvPr/>
-        </p:nvSpPr>
-        <p:spPr>
-          <a:xfrm>
-            <a:off x="4450080" y="2700020"/>
-            <a:ext cx="3599815" cy="539750"/>
-          </a:xfrm>
-          <a:prstGeom prst="rect">
-            <a:avLst/>
-          </a:prstGeom>
-          <a:solidFill>
-            <a:schemeClr val="bg1"/>
-          </a:solidFill>
-          <a:ln>
-            <a:solidFill>
-              <a:schemeClr val="tx1"/>
-            </a:solidFill>
-          </a:ln>
-        </p:spPr>
-        <p:style>
-          <a:lnRef idx="2">
-            <a:schemeClr val="accent1">
-              <a:lumMod val="75000"/>
-            </a:schemeClr>
-          </a:lnRef>
-          <a:fillRef idx="1">
-            <a:schemeClr val="accent1"/>
-          </a:fillRef>
-          <a:effectRef idx="0">
-            <a:srgbClr val="FFFFFF"/>
-          </a:effectRef>
-          <a:fontRef idx="minor">
-            <a:schemeClr val="lt1"/>
-          </a:fontRef>
-        </p:style>
-        <p:txBody>
-          <a:bodyPr rtlCol="0" anchor="ctr"/>
-          <a:p>
-            <a:pPr algn="ctr"/>
-            <a:r>
-              <a:rPr lang="en-US" altLang="zh-CN" sz="1500" b="1">
-                <a:solidFill>
-                  <a:schemeClr val="tx1"/>
-                </a:solidFill>
-                <a:latin typeface="Times New Roman" panose="02020603050405020304" charset="0"/>
-                <a:ea typeface="微软雅黑" panose="020B0503020204020204" charset="-122"/>
-              </a:rPr>
-              <a:t>Core Metric Selector Agent</a:t>
-            </a:r>
-            <a:r>
-              <a:rPr lang="zh-CN" altLang="en-US" sz="1500">
-                <a:solidFill>
-                  <a:schemeClr val="tx1"/>
-                </a:solidFill>
-                <a:latin typeface="Times New Roman" panose="02020603050405020304" charset="0"/>
-                <a:ea typeface="微软雅黑" panose="020B0503020204020204" charset="-122"/>
-              </a:rPr>
-              <a:t>：</a:t>
-            </a:r>
-            <a:r>
-              <a:rPr lang="en-US" altLang="zh-CN" sz="1500">
-                <a:solidFill>
-                  <a:schemeClr val="tx1"/>
-                </a:solidFill>
-                <a:latin typeface="Times New Roman" panose="02020603050405020304" charset="0"/>
-                <a:ea typeface="微软雅黑" panose="020B0503020204020204" charset="-122"/>
-              </a:rPr>
-              <a:t> </a:t>
-            </a:r>
-            <a:endParaRPr lang="en-US" altLang="zh-CN" sz="1500">
-              <a:solidFill>
-                <a:schemeClr val="tx1"/>
-              </a:solidFill>
-              <a:latin typeface="Times New Roman" panose="02020603050405020304" charset="0"/>
-              <a:ea typeface="微软雅黑" panose="020B0503020204020204" charset="-122"/>
-            </a:endParaRPr>
-          </a:p>
-          <a:p>
-            <a:pPr algn="ctr"/>
-            <a:r>
-              <a:rPr lang="zh-CN" altLang="en-US" sz="1500">
-                <a:solidFill>
-                  <a:schemeClr val="tx1"/>
-                </a:solidFill>
-                <a:latin typeface="Times New Roman" panose="02020603050405020304" charset="0"/>
-                <a:ea typeface="微软雅黑" panose="020B0503020204020204" charset="-122"/>
-              </a:rPr>
-              <a:t>根据项目类型筛选关键指标</a:t>
-            </a:r>
-            <a:endParaRPr lang="zh-CN" altLang="en-US" sz="1500">
-              <a:solidFill>
-                <a:schemeClr val="tx1"/>
-              </a:solidFill>
-              <a:latin typeface="Times New Roman" panose="02020603050405020304" charset="0"/>
-              <a:ea typeface="微软雅黑" panose="020B0503020204020204" charset="-122"/>
-            </a:endParaRPr>
-          </a:p>
-        </p:txBody>
-      </p:sp>
-      <p:cxnSp>
-        <p:nvCxnSpPr>
-          <p:cNvPr id="28" name="直接箭头连接符 27"/>
-          <p:cNvCxnSpPr>
-            <a:stCxn id="14" idx="2"/>
-            <a:endCxn id="27" idx="0"/>
-          </p:cNvCxnSpPr>
-          <p:nvPr/>
-        </p:nvCxnSpPr>
-        <p:spPr>
-          <a:xfrm>
-            <a:off x="6250305" y="2341880"/>
-            <a:ext cx="0" cy="358140"/>
-          </a:xfrm>
-          <a:prstGeom prst="straightConnector1">
-            <a:avLst/>
-          </a:prstGeom>
-          <a:ln w="19050">
-            <a:solidFill>
-              <a:schemeClr val="tx1"/>
-            </a:solidFill>
-            <a:tailEnd type="triangle"/>
-          </a:ln>
-        </p:spPr>
-        <p:style>
-          <a:lnRef idx="2">
-            <a:schemeClr val="accent1"/>
-          </a:lnRef>
-          <a:fillRef idx="0">
-            <a:srgbClr val="FFFFFF"/>
-          </a:fillRef>
-          <a:effectRef idx="0">
-            <a:srgbClr val="FFFFFF"/>
-          </a:effectRef>
-          <a:fontRef idx="minor">
-            <a:schemeClr val="tx1"/>
-          </a:fontRef>
-        </p:style>
-      </p:cxnSp>
-      <p:sp>
-        <p:nvSpPr>
-          <p:cNvPr id="30" name="矩形 29"/>
-          <p:cNvSpPr/>
-          <p:nvPr/>
-        </p:nvSpPr>
-        <p:spPr>
-          <a:xfrm>
-            <a:off x="4450080" y="3597910"/>
-            <a:ext cx="3599815" cy="539750"/>
-          </a:xfrm>
-          <a:prstGeom prst="rect">
-            <a:avLst/>
-          </a:prstGeom>
-          <a:solidFill>
-            <a:schemeClr val="bg1"/>
-          </a:solidFill>
-          <a:ln>
-            <a:solidFill>
-              <a:schemeClr val="tx1"/>
-            </a:solidFill>
-          </a:ln>
-        </p:spPr>
-        <p:style>
-          <a:lnRef idx="2">
-            <a:schemeClr val="accent1">
-              <a:lumMod val="75000"/>
-            </a:schemeClr>
-          </a:lnRef>
-          <a:fillRef idx="1">
-            <a:schemeClr val="accent1"/>
-          </a:fillRef>
-          <a:effectRef idx="0">
-            <a:srgbClr val="FFFFFF"/>
-          </a:effectRef>
-          <a:fontRef idx="minor">
-            <a:schemeClr val="lt1"/>
-          </a:fontRef>
-        </p:style>
-        <p:txBody>
-          <a:bodyPr rtlCol="0" anchor="ctr"/>
-          <a:p>
-            <a:pPr algn="ctr"/>
-            <a:r>
-              <a:rPr lang="en-US" altLang="zh-CN" sz="1500" b="1">
-                <a:solidFill>
-                  <a:schemeClr val="tx1"/>
-                </a:solidFill>
-                <a:latin typeface="Times New Roman" panose="02020603050405020304" charset="0"/>
-                <a:ea typeface="微软雅黑" panose="020B0503020204020204" charset="-122"/>
-              </a:rPr>
-              <a:t>RAG Retrieval Agent</a:t>
-            </a:r>
-            <a:r>
-              <a:rPr lang="zh-CN" altLang="en-US" sz="1500">
-                <a:solidFill>
-                  <a:schemeClr val="tx1"/>
-                </a:solidFill>
-                <a:latin typeface="Times New Roman" panose="02020603050405020304" charset="0"/>
-                <a:ea typeface="微软雅黑" panose="020B0503020204020204" charset="-122"/>
-              </a:rPr>
-              <a:t>：</a:t>
-            </a:r>
-            <a:endParaRPr lang="zh-CN" altLang="en-US" sz="1500">
-              <a:solidFill>
-                <a:schemeClr val="tx1"/>
-              </a:solidFill>
-              <a:latin typeface="Times New Roman" panose="02020603050405020304" charset="0"/>
-              <a:ea typeface="微软雅黑" panose="020B0503020204020204" charset="-122"/>
-            </a:endParaRPr>
-          </a:p>
-          <a:p>
-            <a:pPr algn="ctr"/>
-            <a:r>
-              <a:rPr lang="zh-CN" altLang="en-US" sz="1500">
-                <a:solidFill>
-                  <a:schemeClr val="tx1"/>
-                </a:solidFill>
-                <a:latin typeface="Times New Roman" panose="02020603050405020304" charset="0"/>
-                <a:ea typeface="微软雅黑" panose="020B0503020204020204" charset="-122"/>
-              </a:rPr>
-              <a:t>从知识库中检索指标的定义和适用场景</a:t>
-            </a:r>
-            <a:endParaRPr lang="zh-CN" altLang="en-US" sz="1500">
-              <a:solidFill>
-                <a:schemeClr val="tx1"/>
-              </a:solidFill>
-              <a:latin typeface="Times New Roman" panose="02020603050405020304" charset="0"/>
-              <a:ea typeface="微软雅黑" panose="020B0503020204020204" charset="-122"/>
-            </a:endParaRPr>
-          </a:p>
-        </p:txBody>
-      </p:sp>
-      <p:cxnSp>
-        <p:nvCxnSpPr>
-          <p:cNvPr id="34" name="直接箭头连接符 33"/>
-          <p:cNvCxnSpPr>
-            <a:stCxn id="27" idx="2"/>
-            <a:endCxn id="30" idx="0"/>
-          </p:cNvCxnSpPr>
-          <p:nvPr/>
-        </p:nvCxnSpPr>
-        <p:spPr>
-          <a:xfrm>
-            <a:off x="6250305" y="3239770"/>
-            <a:ext cx="0" cy="358140"/>
-          </a:xfrm>
-          <a:prstGeom prst="straightConnector1">
-            <a:avLst/>
-          </a:prstGeom>
-          <a:ln w="19050">
-            <a:solidFill>
-              <a:schemeClr val="tx1"/>
-            </a:solidFill>
-            <a:tailEnd type="triangle"/>
-          </a:ln>
-        </p:spPr>
-        <p:style>
-          <a:lnRef idx="2">
-            <a:schemeClr val="accent1"/>
-          </a:lnRef>
-          <a:fillRef idx="0">
-            <a:srgbClr val="FFFFFF"/>
-          </a:fillRef>
-          <a:effectRef idx="0">
-            <a:srgbClr val="FFFFFF"/>
-          </a:effectRef>
-          <a:fontRef idx="minor">
-            <a:schemeClr val="tx1"/>
-          </a:fontRef>
-        </p:style>
-      </p:cxnSp>
-      <p:cxnSp>
-        <p:nvCxnSpPr>
-          <p:cNvPr id="54" name="直接箭头连接符 53"/>
-          <p:cNvCxnSpPr/>
-          <p:nvPr/>
-        </p:nvCxnSpPr>
-        <p:spPr>
-          <a:xfrm flipH="1">
-            <a:off x="6250305" y="5843270"/>
-            <a:ext cx="635" cy="448310"/>
-          </a:xfrm>
-          <a:prstGeom prst="straightConnector1">
-            <a:avLst/>
-          </a:prstGeom>
-          <a:ln w="19050">
-            <a:solidFill>
-              <a:schemeClr val="tx1"/>
-            </a:solidFill>
-            <a:tailEnd type="triangle"/>
-          </a:ln>
-        </p:spPr>
-        <p:style>
-          <a:lnRef idx="2">
-            <a:schemeClr val="accent1"/>
-          </a:lnRef>
-          <a:fillRef idx="0">
-            <a:srgbClr val="FFFFFF"/>
-          </a:fillRef>
-          <a:effectRef idx="0">
-            <a:srgbClr val="FFFFFF"/>
-          </a:effectRef>
-          <a:fontRef idx="minor">
-            <a:schemeClr val="tx1"/>
-          </a:fontRef>
-        </p:style>
-      </p:cxnSp>
       <p:grpSp>
         <p:nvGrpSpPr>
-          <p:cNvPr id="74" name="组合 73"/>
+          <p:cNvPr id="91" name="组合 90"/>
           <p:cNvGrpSpPr/>
           <p:nvPr/>
         </p:nvGrpSpPr>
         <p:grpSpPr>
           <a:xfrm>
-            <a:off x="2113280" y="4137660"/>
-            <a:ext cx="8275320" cy="1705610"/>
-            <a:chOff x="3328" y="6516"/>
-            <a:chExt cx="13032" cy="2686"/>
+            <a:off x="2112645" y="-711835"/>
+            <a:ext cx="11186160" cy="10147300"/>
+            <a:chOff x="3327" y="-1121"/>
+            <a:chExt cx="17616" cy="15980"/>
           </a:xfrm>
         </p:grpSpPr>
-        <p:cxnSp>
-          <p:nvCxnSpPr>
-            <p:cNvPr id="36" name="直接箭头连接符 35"/>
-            <p:cNvCxnSpPr>
-              <a:stCxn id="30" idx="2"/>
-              <a:endCxn id="35" idx="0"/>
-            </p:cNvCxnSpPr>
-            <p:nvPr/>
-          </p:nvCxnSpPr>
-          <p:spPr>
-            <a:xfrm>
-              <a:off x="9843" y="6516"/>
-              <a:ext cx="1" cy="564"/>
-            </a:xfrm>
-            <a:prstGeom prst="straightConnector1">
-              <a:avLst/>
-            </a:prstGeom>
-            <a:ln w="19050">
-              <a:solidFill>
-                <a:schemeClr val="tx1"/>
-              </a:solidFill>
-              <a:tailEnd type="triangle"/>
-            </a:ln>
-          </p:spPr>
-          <p:style>
-            <a:lnRef idx="2">
-              <a:schemeClr val="accent1"/>
-            </a:lnRef>
-            <a:fillRef idx="0">
-              <a:srgbClr val="FFFFFF"/>
-            </a:fillRef>
-            <a:effectRef idx="0">
-              <a:srgbClr val="FFFFFF"/>
-            </a:effectRef>
-            <a:fontRef idx="minor">
-              <a:schemeClr val="tx1"/>
-            </a:fontRef>
-          </p:style>
-        </p:cxnSp>
         <p:sp>
           <p:nvSpPr>
-            <p:cNvPr id="35" name="矩形 34"/>
+            <p:cNvPr id="4" name="矩形 3"/>
             <p:cNvSpPr/>
             <p:nvPr/>
           </p:nvSpPr>
           <p:spPr>
             <a:xfrm>
-              <a:off x="3328" y="7080"/>
-              <a:ext cx="13032" cy="2122"/>
+              <a:off x="7008" y="-1121"/>
+              <a:ext cx="5669" cy="567"/>
             </a:xfrm>
             <a:prstGeom prst="rect">
               <a:avLst/>
@@ -5928,25 +5087,14 @@
             <a:p>
               <a:pPr algn="ctr"/>
               <a:r>
-                <a:rPr lang="en-US" altLang="zh-CN" sz="1500" b="1">
+                <a:rPr lang="zh-CN" altLang="en-US" sz="1500" b="1">
                   <a:solidFill>
                     <a:schemeClr val="tx1"/>
                   </a:solidFill>
                   <a:latin typeface="Times New Roman" panose="02020603050405020304" charset="0"/>
                   <a:ea typeface="微软雅黑" panose="020B0503020204020204" charset="-122"/>
                 </a:rPr>
-                <a:t>Report Generator </a:t>
-              </a:r>
-              <a:r>
-                <a:rPr lang="en-US" altLang="zh-CN" sz="1500" b="1">
-                  <a:solidFill>
-                    <a:schemeClr val="tx1"/>
-                  </a:solidFill>
-                  <a:latin typeface="Times New Roman" panose="02020603050405020304" charset="0"/>
-                  <a:ea typeface="微软雅黑" panose="020B0503020204020204" charset="-122"/>
-                  <a:sym typeface="+mn-ea"/>
-                </a:rPr>
-                <a:t>Agent</a:t>
+                <a:t>输入</a:t>
               </a:r>
               <a:r>
                 <a:rPr lang="zh-CN" altLang="en-US" sz="1500">
@@ -5955,54 +5103,30 @@
                   </a:solidFill>
                   <a:latin typeface="Times New Roman" panose="02020603050405020304" charset="0"/>
                   <a:ea typeface="微软雅黑" panose="020B0503020204020204" charset="-122"/>
-                  <a:sym typeface="+mn-ea"/>
                 </a:rPr>
                 <a:t>：</a:t>
               </a:r>
+              <a:r>
+                <a:rPr lang="en-US" altLang="zh-CN" sz="1500">
+                  <a:solidFill>
+                    <a:schemeClr val="tx1"/>
+                  </a:solidFill>
+                  <a:latin typeface="Times New Roman" panose="02020603050405020304" charset="0"/>
+                  <a:ea typeface="微软雅黑" panose="020B0503020204020204" charset="-122"/>
+                </a:rPr>
+                <a:t>Github</a:t>
+              </a:r>
+              <a:r>
+                <a:rPr lang="zh-CN" altLang="en-US" sz="1500">
+                  <a:solidFill>
+                    <a:schemeClr val="tx1"/>
+                  </a:solidFill>
+                  <a:latin typeface="Times New Roman" panose="02020603050405020304" charset="0"/>
+                  <a:ea typeface="微软雅黑" panose="020B0503020204020204" charset="-122"/>
+                </a:rPr>
+                <a:t>仓库链接</a:t>
+              </a:r>
               <a:endParaRPr lang="zh-CN" altLang="en-US" sz="1500">
-                <a:solidFill>
-                  <a:schemeClr val="tx1"/>
-                </a:solidFill>
-                <a:latin typeface="Times New Roman" panose="02020603050405020304" charset="0"/>
-                <a:ea typeface="微软雅黑" panose="020B0503020204020204" charset="-122"/>
-                <a:sym typeface="+mn-ea"/>
-              </a:endParaRPr>
-            </a:p>
-            <a:p>
-              <a:pPr algn="ctr"/>
-              <a:endParaRPr lang="zh-CN" altLang="en-US" sz="1500">
-                <a:solidFill>
-                  <a:schemeClr val="tx1"/>
-                </a:solidFill>
-                <a:latin typeface="Times New Roman" panose="02020603050405020304" charset="0"/>
-                <a:ea typeface="微软雅黑" panose="020B0503020204020204" charset="-122"/>
-                <a:sym typeface="+mn-ea"/>
-              </a:endParaRPr>
-            </a:p>
-            <a:p>
-              <a:pPr algn="ctr"/>
-              <a:endParaRPr lang="zh-CN" altLang="en-US" sz="1500">
-                <a:solidFill>
-                  <a:schemeClr val="tx1"/>
-                </a:solidFill>
-                <a:latin typeface="Times New Roman" panose="02020603050405020304" charset="0"/>
-                <a:ea typeface="微软雅黑" panose="020B0503020204020204" charset="-122"/>
-                <a:sym typeface="+mn-ea"/>
-              </a:endParaRPr>
-            </a:p>
-            <a:p>
-              <a:pPr algn="ctr"/>
-              <a:endParaRPr lang="en-US" altLang="zh-CN" sz="1500" b="1">
-                <a:solidFill>
-                  <a:schemeClr val="tx1"/>
-                </a:solidFill>
-                <a:latin typeface="Times New Roman" panose="02020603050405020304" charset="0"/>
-                <a:ea typeface="微软雅黑" panose="020B0503020204020204" charset="-122"/>
-              </a:endParaRPr>
-            </a:p>
-            <a:p>
-              <a:pPr algn="ctr"/>
-              <a:endParaRPr lang="en-US" altLang="zh-CN" sz="1500" b="1">
                 <a:solidFill>
                   <a:schemeClr val="tx1"/>
                 </a:solidFill>
@@ -6012,16 +5136,55 @@
             </a:p>
           </p:txBody>
         </p:sp>
+        <p:cxnSp>
+          <p:nvCxnSpPr>
+            <p:cNvPr id="16" name="直接箭头连接符 15"/>
+            <p:cNvCxnSpPr>
+              <a:stCxn id="4" idx="2"/>
+              <a:endCxn id="2" idx="0"/>
+            </p:cNvCxnSpPr>
+            <p:nvPr/>
+          </p:nvCxnSpPr>
+          <p:spPr>
+            <a:xfrm>
+              <a:off x="9843" y="-554"/>
+              <a:ext cx="0" cy="564"/>
+            </a:xfrm>
+            <a:prstGeom prst="straightConnector1">
+              <a:avLst/>
+            </a:prstGeom>
+            <a:ln w="19050">
+              <a:solidFill>
+                <a:schemeClr val="tx1"/>
+              </a:solidFill>
+              <a:tailEnd type="triangle"/>
+            </a:ln>
+          </p:spPr>
+          <p:style>
+            <a:lnRef idx="2">
+              <a:schemeClr val="accent1"/>
+            </a:lnRef>
+            <a:fillRef idx="0">
+              <a:srgbClr val="FFFFFF"/>
+            </a:fillRef>
+            <a:effectRef idx="0">
+              <a:srgbClr val="FFFFFF"/>
+            </a:effectRef>
+            <a:fontRef idx="minor">
+              <a:schemeClr val="tx1"/>
+            </a:fontRef>
+          </p:style>
+        </p:cxnSp>
         <p:sp>
           <p:nvSpPr>
-            <p:cNvPr id="50" name="矩形 49"/>
+            <p:cNvPr id="2" name="矩形 1"/>
             <p:cNvSpPr/>
             <p:nvPr/>
           </p:nvSpPr>
           <p:spPr>
             <a:xfrm>
-              <a:off x="10176" y="7743"/>
-              <a:ext cx="5669" cy="1161"/>
+              <a:off x="7008" y="10"/>
+              <a:ext cx="5669" cy="850"/>
             </a:xfrm>
             <a:prstGeom prst="rect">
               <a:avLst/>
@@ -6063,7 +5226,7 @@
                   <a:latin typeface="Times New Roman" panose="02020603050405020304" charset="0"/>
                   <a:ea typeface="微软雅黑" panose="020B0503020204020204" charset="-122"/>
                 </a:rPr>
-                <a:t>Rule Report Generator</a:t>
+                <a:t>Project Parser Agent</a:t>
               </a:r>
               <a:r>
                 <a:rPr lang="zh-CN" altLang="en-US" sz="1500">
@@ -6093,17 +5256,7 @@
                   <a:latin typeface="Times New Roman" panose="02020603050405020304" charset="0"/>
                   <a:ea typeface="微软雅黑" panose="020B0503020204020204" charset="-122"/>
                 </a:rPr>
-                <a:t>基于规则报告、指标和知识库上下文，生成</a:t>
-              </a:r>
-              <a:r>
-                <a:rPr lang="zh-CN" altLang="en-US" sz="1500">
-                  <a:solidFill>
-                    <a:schemeClr val="tx1"/>
-                  </a:solidFill>
-                  <a:latin typeface="Times New Roman" panose="02020603050405020304" charset="0"/>
-                  <a:ea typeface="微软雅黑" panose="020B0503020204020204" charset="-122"/>
-                </a:rPr>
-                <a:t>候选评估报告</a:t>
+                <a:t>提取项目基础信息</a:t>
               </a:r>
               <a:endParaRPr lang="zh-CN" altLang="en-US" sz="1500">
                 <a:solidFill>
@@ -6115,55 +5268,16 @@
             </a:p>
           </p:txBody>
         </p:sp>
-        <p:cxnSp>
-          <p:nvCxnSpPr>
-            <p:cNvPr id="58" name="直接箭头连接符 57"/>
-            <p:cNvCxnSpPr>
-              <a:stCxn id="42" idx="3"/>
-              <a:endCxn id="50" idx="1"/>
-            </p:cNvCxnSpPr>
-            <p:nvPr/>
-          </p:nvCxnSpPr>
-          <p:spPr>
-            <a:xfrm flipV="1">
-              <a:off x="9512" y="8324"/>
-              <a:ext cx="664" cy="10"/>
-            </a:xfrm>
-            <a:prstGeom prst="straightConnector1">
-              <a:avLst/>
-            </a:prstGeom>
-            <a:ln w="19050">
-              <a:solidFill>
-                <a:schemeClr val="tx1"/>
-              </a:solidFill>
-              <a:tailEnd type="triangle"/>
-            </a:ln>
-          </p:spPr>
-          <p:style>
-            <a:lnRef idx="2">
-              <a:schemeClr val="accent1"/>
-            </a:lnRef>
-            <a:fillRef idx="0">
-              <a:srgbClr val="FFFFFF"/>
-            </a:fillRef>
-            <a:effectRef idx="0">
-              <a:srgbClr val="FFFFFF"/>
-            </a:effectRef>
-            <a:fontRef idx="minor">
-              <a:schemeClr val="tx1"/>
-            </a:fontRef>
-          </p:style>
-        </p:cxnSp>
         <p:sp>
           <p:nvSpPr>
-            <p:cNvPr id="42" name="矩形 41"/>
+            <p:cNvPr id="3" name="矩形 2"/>
             <p:cNvSpPr/>
             <p:nvPr/>
           </p:nvSpPr>
           <p:spPr>
             <a:xfrm>
-              <a:off x="3843" y="7753"/>
-              <a:ext cx="5669" cy="1161"/>
+              <a:off x="7008" y="1424"/>
+              <a:ext cx="5669" cy="850"/>
             </a:xfrm>
             <a:prstGeom prst="rect">
               <a:avLst/>
@@ -6204,8 +5318,9 @@
                   </a:solidFill>
                   <a:latin typeface="Times New Roman" panose="02020603050405020304" charset="0"/>
                   <a:ea typeface="微软雅黑" panose="020B0503020204020204" charset="-122"/>
+                  <a:sym typeface="+mn-ea"/>
                 </a:rPr>
-                <a:t>Rule Report Generator</a:t>
+                <a:t>Type Classifier Agent</a:t>
               </a:r>
               <a:r>
                 <a:rPr lang="zh-CN" altLang="en-US" sz="1500">
@@ -6214,6 +5329,7 @@
                   </a:solidFill>
                   <a:latin typeface="Times New Roman" panose="02020603050405020304" charset="0"/>
                   <a:ea typeface="微软雅黑" panose="020B0503020204020204" charset="-122"/>
+                  <a:sym typeface="+mn-ea"/>
                 </a:rPr>
                 <a:t>：</a:t>
               </a:r>
@@ -6234,20 +5350,11 @@
                   </a:solidFill>
                   <a:latin typeface="Times New Roman" panose="02020603050405020304" charset="0"/>
                   <a:ea typeface="微软雅黑" panose="020B0503020204020204" charset="-122"/>
+                  <a:sym typeface="+mn-ea"/>
                 </a:rPr>
-                <a:t>生成规则报告，作为兜底 </a:t>
+                <a:t>判断开源项目类型</a:t>
               </a:r>
-              <a:r>
-                <a:rPr lang="en-US" altLang="zh-CN" sz="1500">
-                  <a:solidFill>
-                    <a:schemeClr val="tx1"/>
-                  </a:solidFill>
-                  <a:latin typeface="Times New Roman" panose="02020603050405020304" charset="0"/>
-                  <a:ea typeface="微软雅黑" panose="020B0503020204020204" charset="-122"/>
-                </a:rPr>
-                <a:t>baseline</a:t>
-              </a:r>
-              <a:endParaRPr lang="en-US" altLang="zh-CN" sz="1500">
+              <a:endParaRPr lang="zh-CN" altLang="en-US" sz="1500">
                 <a:solidFill>
                   <a:schemeClr val="tx1"/>
                 </a:solidFill>
@@ -6257,550 +5364,55 @@
             </a:p>
           </p:txBody>
         </p:sp>
-      </p:grpSp>
-      <p:sp>
-        <p:nvSpPr>
-          <p:cNvPr id="64" name="矩形 63"/>
-          <p:cNvSpPr/>
-          <p:nvPr/>
-        </p:nvSpPr>
-        <p:spPr>
-          <a:xfrm>
-            <a:off x="4450080" y="8087360"/>
-            <a:ext cx="3599815" cy="539750"/>
-          </a:xfrm>
-          <a:prstGeom prst="rect">
-            <a:avLst/>
-          </a:prstGeom>
-          <a:solidFill>
-            <a:schemeClr val="bg1"/>
-          </a:solidFill>
-          <a:ln>
-            <a:solidFill>
-              <a:schemeClr val="tx1"/>
-            </a:solidFill>
-          </a:ln>
-        </p:spPr>
-        <p:style>
-          <a:lnRef idx="2">
-            <a:schemeClr val="accent1">
-              <a:lumMod val="75000"/>
-            </a:schemeClr>
-          </a:lnRef>
-          <a:fillRef idx="1">
-            <a:schemeClr val="accent1"/>
-          </a:fillRef>
-          <a:effectRef idx="0">
-            <a:srgbClr val="FFFFFF"/>
-          </a:effectRef>
-          <a:fontRef idx="minor">
-            <a:schemeClr val="lt1"/>
-          </a:fontRef>
-        </p:style>
-        <p:txBody>
-          <a:bodyPr rtlCol="0" anchor="ctr"/>
-          <a:p>
-            <a:pPr algn="ctr"/>
-            <a:r>
-              <a:rPr lang="en-US" altLang="zh-CN" sz="1500" b="1">
-                <a:solidFill>
-                  <a:schemeClr val="tx1"/>
-                </a:solidFill>
-                <a:latin typeface="Times New Roman" panose="02020603050405020304" charset="0"/>
-                <a:ea typeface="微软雅黑" panose="020B0503020204020204" charset="-122"/>
-              </a:rPr>
-              <a:t>Repair Planner Agent</a:t>
-            </a:r>
-            <a:r>
-              <a:rPr lang="zh-CN" altLang="en-US" sz="1500">
-                <a:solidFill>
-                  <a:schemeClr val="tx1"/>
-                </a:solidFill>
-                <a:latin typeface="Times New Roman" panose="02020603050405020304" charset="0"/>
-                <a:ea typeface="微软雅黑" panose="020B0503020204020204" charset="-122"/>
-              </a:rPr>
-              <a:t>：</a:t>
-            </a:r>
-            <a:endParaRPr lang="zh-CN" altLang="en-US" sz="1500">
+        <p:cxnSp>
+          <p:nvCxnSpPr>
+            <p:cNvPr id="6" name="直接箭头连接符 5"/>
+            <p:cNvCxnSpPr>
+              <a:stCxn id="2" idx="2"/>
+              <a:endCxn id="3" idx="0"/>
+            </p:cNvCxnSpPr>
+            <p:nvPr/>
+          </p:nvCxnSpPr>
+          <p:spPr>
+            <a:xfrm>
+              <a:off x="9843" y="860"/>
+              <a:ext cx="0" cy="564"/>
+            </a:xfrm>
+            <a:prstGeom prst="straightConnector1">
+              <a:avLst/>
+            </a:prstGeom>
+            <a:ln w="19050">
               <a:solidFill>
                 <a:schemeClr val="tx1"/>
               </a:solidFill>
-              <a:latin typeface="Times New Roman" panose="02020603050405020304" charset="0"/>
-              <a:ea typeface="微软雅黑" panose="020B0503020204020204" charset="-122"/>
-            </a:endParaRPr>
-          </a:p>
-          <a:p>
-            <a:pPr algn="ctr"/>
-            <a:r>
-              <a:rPr lang="zh-CN" altLang="en-US" sz="1500">
-                <a:solidFill>
-                  <a:schemeClr val="tx1"/>
-                </a:solidFill>
-                <a:latin typeface="Times New Roman" panose="02020603050405020304" charset="0"/>
-                <a:ea typeface="微软雅黑" panose="020B0503020204020204" charset="-122"/>
-              </a:rPr>
-              <a:t>根据复审结果制定</a:t>
-            </a:r>
-            <a:r>
-              <a:rPr lang="zh-CN" altLang="en-US" sz="1500">
-                <a:solidFill>
-                  <a:schemeClr val="tx1"/>
-                </a:solidFill>
-                <a:latin typeface="Times New Roman" panose="02020603050405020304" charset="0"/>
-                <a:ea typeface="微软雅黑" panose="020B0503020204020204" charset="-122"/>
-              </a:rPr>
-              <a:t>修复计划</a:t>
-            </a:r>
-            <a:endParaRPr lang="zh-CN" altLang="en-US" sz="1500">
-              <a:solidFill>
-                <a:schemeClr val="tx1"/>
-              </a:solidFill>
-              <a:latin typeface="Times New Roman" panose="02020603050405020304" charset="0"/>
-              <a:ea typeface="微软雅黑" panose="020B0503020204020204" charset="-122"/>
-            </a:endParaRPr>
-          </a:p>
-        </p:txBody>
-      </p:sp>
-      <p:cxnSp>
-        <p:nvCxnSpPr>
-          <p:cNvPr id="65" name="直接箭头连接符 64"/>
-          <p:cNvCxnSpPr>
-            <a:stCxn id="53" idx="2"/>
-            <a:endCxn id="64" idx="0"/>
-          </p:cNvCxnSpPr>
-          <p:nvPr/>
-        </p:nvCxnSpPr>
-        <p:spPr>
-          <a:xfrm>
-            <a:off x="6250305" y="7640320"/>
-            <a:ext cx="0" cy="447040"/>
-          </a:xfrm>
-          <a:prstGeom prst="straightConnector1">
-            <a:avLst/>
-          </a:prstGeom>
-          <a:ln w="19050">
-            <a:solidFill>
+              <a:tailEnd type="triangle"/>
+            </a:ln>
+          </p:spPr>
+          <p:style>
+            <a:lnRef idx="2">
+              <a:schemeClr val="accent1"/>
+            </a:lnRef>
+            <a:fillRef idx="0">
+              <a:srgbClr val="FFFFFF"/>
+            </a:fillRef>
+            <a:effectRef idx="0">
+              <a:srgbClr val="FFFFFF"/>
+            </a:effectRef>
+            <a:fontRef idx="minor">
               <a:schemeClr val="tx1"/>
-            </a:solidFill>
-            <a:tailEnd type="triangle"/>
-          </a:ln>
-        </p:spPr>
-        <p:style>
-          <a:lnRef idx="2">
-            <a:schemeClr val="accent1"/>
-          </a:lnRef>
-          <a:fillRef idx="0">
-            <a:srgbClr val="FFFFFF"/>
-          </a:fillRef>
-          <a:effectRef idx="0">
-            <a:srgbClr val="FFFFFF"/>
-          </a:effectRef>
-          <a:fontRef idx="minor">
-            <a:schemeClr val="tx1"/>
-          </a:fontRef>
-        </p:style>
-      </p:cxnSp>
-      <p:sp>
-        <p:nvSpPr>
-          <p:cNvPr id="66" name="矩形 65"/>
-          <p:cNvSpPr/>
-          <p:nvPr/>
-        </p:nvSpPr>
-        <p:spPr>
-          <a:xfrm>
-            <a:off x="4450080" y="9076055"/>
-            <a:ext cx="3599815" cy="359410"/>
-          </a:xfrm>
-          <a:prstGeom prst="rect">
-            <a:avLst/>
-          </a:prstGeom>
-          <a:solidFill>
-            <a:schemeClr val="bg1"/>
-          </a:solidFill>
-          <a:ln>
-            <a:solidFill>
-              <a:schemeClr val="tx1"/>
-            </a:solidFill>
-          </a:ln>
-        </p:spPr>
-        <p:style>
-          <a:lnRef idx="2">
-            <a:schemeClr val="accent1">
-              <a:lumMod val="75000"/>
-            </a:schemeClr>
-          </a:lnRef>
-          <a:fillRef idx="1">
-            <a:schemeClr val="accent1"/>
-          </a:fillRef>
-          <a:effectRef idx="0">
-            <a:srgbClr val="FFFFFF"/>
-          </a:effectRef>
-          <a:fontRef idx="minor">
-            <a:schemeClr val="lt1"/>
-          </a:fontRef>
-        </p:style>
-        <p:txBody>
-          <a:bodyPr rtlCol="0" anchor="ctr"/>
-          <a:p>
-            <a:pPr algn="ctr"/>
-            <a:r>
-              <a:rPr lang="zh-CN" altLang="en-US" sz="1500" b="1">
-                <a:solidFill>
-                  <a:schemeClr val="tx1"/>
-                </a:solidFill>
-                <a:latin typeface="Times New Roman" panose="02020603050405020304" charset="0"/>
-                <a:ea typeface="微软雅黑" panose="020B0503020204020204" charset="-122"/>
-              </a:rPr>
-              <a:t>输出</a:t>
-            </a:r>
-            <a:r>
-              <a:rPr lang="zh-CN" altLang="en-US" sz="1500">
-                <a:solidFill>
-                  <a:schemeClr val="tx1"/>
-                </a:solidFill>
-                <a:latin typeface="Times New Roman" panose="02020603050405020304" charset="0"/>
-                <a:ea typeface="微软雅黑" panose="020B0503020204020204" charset="-122"/>
-              </a:rPr>
-              <a:t>：</a:t>
-            </a:r>
-            <a:r>
-              <a:rPr lang="zh-CN" altLang="en-US" sz="1500">
-                <a:solidFill>
-                  <a:schemeClr val="tx1"/>
-                </a:solidFill>
-                <a:latin typeface="Times New Roman" panose="02020603050405020304" charset="0"/>
-                <a:ea typeface="微软雅黑" panose="020B0503020204020204" charset="-122"/>
-              </a:rPr>
-              <a:t>仓库评估报告</a:t>
-            </a:r>
-            <a:endParaRPr lang="zh-CN" altLang="en-US" sz="1500">
-              <a:solidFill>
-                <a:schemeClr val="tx1"/>
-              </a:solidFill>
-              <a:latin typeface="Times New Roman" panose="02020603050405020304" charset="0"/>
-              <a:ea typeface="微软雅黑" panose="020B0503020204020204" charset="-122"/>
-            </a:endParaRPr>
-          </a:p>
-        </p:txBody>
-      </p:sp>
-      <p:cxnSp>
-        <p:nvCxnSpPr>
-          <p:cNvPr id="67" name="直接箭头连接符 66"/>
-          <p:cNvCxnSpPr>
-            <a:stCxn id="64" idx="2"/>
-            <a:endCxn id="66" idx="0"/>
-          </p:cNvCxnSpPr>
-          <p:nvPr/>
-        </p:nvCxnSpPr>
-        <p:spPr>
-          <a:xfrm>
-            <a:off x="6250305" y="8627110"/>
-            <a:ext cx="0" cy="448945"/>
-          </a:xfrm>
-          <a:prstGeom prst="straightConnector1">
-            <a:avLst/>
-          </a:prstGeom>
-          <a:ln w="19050">
-            <a:solidFill>
-              <a:schemeClr val="tx1"/>
-            </a:solidFill>
-            <a:tailEnd type="triangle"/>
-          </a:ln>
-        </p:spPr>
-        <p:style>
-          <a:lnRef idx="2">
-            <a:schemeClr val="accent1"/>
-          </a:lnRef>
-          <a:fillRef idx="0">
-            <a:srgbClr val="FFFFFF"/>
-          </a:fillRef>
-          <a:effectRef idx="0">
-            <a:srgbClr val="FFFFFF"/>
-          </a:effectRef>
-          <a:fontRef idx="minor">
-            <a:schemeClr val="tx1"/>
-          </a:fontRef>
-        </p:style>
-      </p:cxnSp>
-      <p:cxnSp>
-        <p:nvCxnSpPr>
-          <p:cNvPr id="68" name="曲线连接符 67"/>
-          <p:cNvCxnSpPr>
-            <a:stCxn id="64" idx="1"/>
-            <a:endCxn id="3" idx="1"/>
-          </p:cNvCxnSpPr>
-          <p:nvPr/>
-        </p:nvCxnSpPr>
-        <p:spPr>
-          <a:xfrm rot="10800000" flipH="1">
-            <a:off x="4450080" y="1174115"/>
-            <a:ext cx="3175" cy="7183120"/>
-          </a:xfrm>
-          <a:prstGeom prst="curvedConnector3">
-            <a:avLst>
-              <a:gd name="adj1" fmla="val -191240000"/>
-            </a:avLst>
-          </a:prstGeom>
-          <a:ln w="19050">
-            <a:solidFill>
-              <a:schemeClr val="tx1"/>
-            </a:solidFill>
-            <a:prstDash val="sysDash"/>
-            <a:tailEnd type="triangle"/>
-          </a:ln>
-        </p:spPr>
-        <p:style>
-          <a:lnRef idx="2">
-            <a:schemeClr val="accent1"/>
-          </a:lnRef>
-          <a:fillRef idx="0">
-            <a:srgbClr val="FFFFFF"/>
-          </a:fillRef>
-          <a:effectRef idx="0">
-            <a:srgbClr val="FFFFFF"/>
-          </a:effectRef>
-          <a:fontRef idx="minor">
-            <a:schemeClr val="tx1"/>
-          </a:fontRef>
-        </p:style>
-      </p:cxnSp>
-      <p:cxnSp>
-        <p:nvCxnSpPr>
-          <p:cNvPr id="69" name="曲线连接符 68"/>
-          <p:cNvCxnSpPr>
-            <a:stCxn id="64" idx="1"/>
-            <a:endCxn id="27" idx="1"/>
-          </p:cNvCxnSpPr>
-          <p:nvPr/>
-        </p:nvCxnSpPr>
-        <p:spPr>
-          <a:xfrm rot="10800000" flipH="1">
-            <a:off x="4450080" y="2969895"/>
-            <a:ext cx="3175" cy="5387340"/>
-          </a:xfrm>
-          <a:prstGeom prst="curvedConnector3">
-            <a:avLst>
-              <a:gd name="adj1" fmla="val -159360000"/>
-            </a:avLst>
-          </a:prstGeom>
-          <a:ln w="19050">
-            <a:solidFill>
-              <a:schemeClr val="tx1"/>
-            </a:solidFill>
-            <a:prstDash val="sysDash"/>
-            <a:tailEnd type="triangle"/>
-          </a:ln>
-        </p:spPr>
-        <p:style>
-          <a:lnRef idx="2">
-            <a:schemeClr val="accent1"/>
-          </a:lnRef>
-          <a:fillRef idx="0">
-            <a:srgbClr val="FFFFFF"/>
-          </a:fillRef>
-          <a:effectRef idx="0">
-            <a:srgbClr val="FFFFFF"/>
-          </a:effectRef>
-          <a:fontRef idx="minor">
-            <a:schemeClr val="tx1"/>
-          </a:fontRef>
-        </p:style>
-      </p:cxnSp>
-      <p:cxnSp>
-        <p:nvCxnSpPr>
-          <p:cNvPr id="70" name="曲线连接符 69"/>
-          <p:cNvCxnSpPr/>
-          <p:nvPr/>
-        </p:nvCxnSpPr>
-        <p:spPr>
-          <a:xfrm rot="10800000" flipH="1">
-            <a:off x="4382135" y="3867785"/>
-            <a:ext cx="3175" cy="4489450"/>
-          </a:xfrm>
-          <a:prstGeom prst="curvedConnector3">
-            <a:avLst>
-              <a:gd name="adj1" fmla="val -135000000"/>
-            </a:avLst>
-          </a:prstGeom>
-          <a:ln w="19050">
-            <a:solidFill>
-              <a:schemeClr val="tx1"/>
-            </a:solidFill>
-            <a:prstDash val="sysDash"/>
-            <a:tailEnd type="triangle"/>
-          </a:ln>
-        </p:spPr>
-        <p:style>
-          <a:lnRef idx="2">
-            <a:schemeClr val="accent1"/>
-          </a:lnRef>
-          <a:fillRef idx="0">
-            <a:srgbClr val="FFFFFF"/>
-          </a:fillRef>
-          <a:effectRef idx="0">
-            <a:srgbClr val="FFFFFF"/>
-          </a:effectRef>
-          <a:fontRef idx="minor">
-            <a:schemeClr val="tx1"/>
-          </a:fontRef>
-        </p:style>
-      </p:cxnSp>
-      <p:cxnSp>
-        <p:nvCxnSpPr>
-          <p:cNvPr id="71" name="曲线连接符 70"/>
-          <p:cNvCxnSpPr>
-            <a:stCxn id="64" idx="1"/>
-            <a:endCxn id="50" idx="2"/>
-          </p:cNvCxnSpPr>
-          <p:nvPr/>
-        </p:nvCxnSpPr>
-        <p:spPr>
-          <a:xfrm rot="10800000" flipH="1">
-            <a:off x="4449445" y="5653405"/>
-            <a:ext cx="3811905" cy="2703195"/>
-          </a:xfrm>
-          <a:prstGeom prst="curvedConnector4">
-            <a:avLst>
-              <a:gd name="adj1" fmla="val -83141"/>
-              <a:gd name="adj2" fmla="val 87197"/>
-            </a:avLst>
-          </a:prstGeom>
-          <a:ln w="19050">
-            <a:solidFill>
-              <a:schemeClr val="tx1"/>
-            </a:solidFill>
-            <a:prstDash val="sysDash"/>
-            <a:tailEnd type="triangle"/>
-          </a:ln>
-        </p:spPr>
-        <p:style>
-          <a:lnRef idx="2">
-            <a:schemeClr val="accent1"/>
-          </a:lnRef>
-          <a:fillRef idx="0">
-            <a:srgbClr val="FFFFFF"/>
-          </a:fillRef>
-          <a:effectRef idx="0">
-            <a:srgbClr val="FFFFFF"/>
-          </a:effectRef>
-          <a:fontRef idx="minor">
-            <a:schemeClr val="tx1"/>
-          </a:fontRef>
-        </p:style>
-      </p:cxnSp>
-      <p:sp>
-        <p:nvSpPr>
-          <p:cNvPr id="72" name="文本框 71"/>
-          <p:cNvSpPr txBox="1"/>
-          <p:nvPr/>
-        </p:nvSpPr>
-        <p:spPr>
-          <a:xfrm>
-            <a:off x="5078413" y="8768715"/>
-            <a:ext cx="2343150" cy="140335"/>
-          </a:xfrm>
-          <a:prstGeom prst="rect">
-            <a:avLst/>
-          </a:prstGeom>
-          <a:solidFill>
-            <a:schemeClr val="accent4">
-              <a:lumMod val="20000"/>
-              <a:lumOff val="80000"/>
-            </a:schemeClr>
-          </a:solidFill>
-        </p:spPr>
-        <p:txBody>
-          <a:bodyPr wrap="square" rtlCol="0" anchor="ctr" anchorCtr="0">
-            <a:noAutofit/>
-          </a:bodyPr>
-          <a:p>
-            <a:pPr algn="ctr"/>
-            <a:r>
-              <a:rPr lang="en-US" altLang="zh-CN" sz="1200" b="1">
-                <a:latin typeface="Times New Roman" panose="02020603050405020304" charset="0"/>
-                <a:cs typeface="Times New Roman" panose="02020603050405020304" charset="0"/>
-              </a:rPr>
-              <a:t>PASS OR </a:t>
-            </a:r>
-            <a:r>
-              <a:rPr lang="en-US" altLang="zh-CN" sz="1200" b="1">
-                <a:latin typeface="Times New Roman" panose="02020603050405020304" charset="0"/>
-                <a:cs typeface="Times New Roman" panose="02020603050405020304" charset="0"/>
-              </a:rPr>
-              <a:t>MAX_TRY_COUNT</a:t>
-            </a:r>
-            <a:endParaRPr lang="en-US" altLang="zh-CN" sz="1200" b="1">
-              <a:latin typeface="Times New Roman" panose="02020603050405020304" charset="0"/>
-              <a:cs typeface="Times New Roman" panose="02020603050405020304" charset="0"/>
-            </a:endParaRPr>
-          </a:p>
-        </p:txBody>
-      </p:sp>
-      <p:sp>
-        <p:nvSpPr>
-          <p:cNvPr id="73" name="文本框 72"/>
-          <p:cNvSpPr txBox="1"/>
-          <p:nvPr/>
-        </p:nvSpPr>
-        <p:spPr>
-          <a:xfrm>
-            <a:off x="3688080" y="8276590"/>
-            <a:ext cx="577215" cy="165735"/>
-          </a:xfrm>
-          <a:prstGeom prst="rect">
-            <a:avLst/>
-          </a:prstGeom>
-          <a:solidFill>
-            <a:schemeClr val="accent6">
-              <a:lumMod val="20000"/>
-              <a:lumOff val="80000"/>
-            </a:schemeClr>
-          </a:solidFill>
-        </p:spPr>
-        <p:txBody>
-          <a:bodyPr wrap="square" rtlCol="0" anchor="ctr" anchorCtr="0">
-            <a:noAutofit/>
-          </a:bodyPr>
-          <a:p>
-            <a:pPr algn="ctr"/>
-            <a:r>
-              <a:rPr lang="en-US" altLang="zh-CN" sz="1200" b="1">
-                <a:latin typeface="Times New Roman" panose="02020603050405020304" charset="0"/>
-                <a:cs typeface="Times New Roman" panose="02020603050405020304" charset="0"/>
-              </a:rPr>
-              <a:t>FAIL</a:t>
-            </a:r>
-            <a:endParaRPr lang="en-US" altLang="zh-CN" sz="1200" b="1">
-              <a:latin typeface="Times New Roman" panose="02020603050405020304" charset="0"/>
-              <a:cs typeface="Times New Roman" panose="02020603050405020304" charset="0"/>
-            </a:endParaRPr>
-          </a:p>
-        </p:txBody>
-      </p:sp>
-      <p:grpSp>
-        <p:nvGrpSpPr>
-          <p:cNvPr id="63" name="组合 62"/>
-          <p:cNvGrpSpPr/>
-          <p:nvPr/>
-        </p:nvGrpSpPr>
-        <p:grpSpPr>
-          <a:xfrm>
-            <a:off x="2112645" y="6292850"/>
-            <a:ext cx="8275320" cy="1347470"/>
-            <a:chOff x="3327" y="11029"/>
-            <a:chExt cx="13032" cy="2122"/>
-          </a:xfrm>
-        </p:grpSpPr>
+            </a:fontRef>
+          </p:style>
+        </p:cxnSp>
         <p:sp>
           <p:nvSpPr>
-            <p:cNvPr id="53" name="矩形 52"/>
+            <p:cNvPr id="14" name="矩形 13"/>
             <p:cNvSpPr/>
             <p:nvPr/>
           </p:nvSpPr>
           <p:spPr>
             <a:xfrm>
-              <a:off x="3327" y="11029"/>
-              <a:ext cx="13032" cy="2122"/>
+              <a:off x="7008" y="2838"/>
+              <a:ext cx="5669" cy="850"/>
             </a:xfrm>
             <a:prstGeom prst="rect">
               <a:avLst/>
@@ -6841,9 +5453,8 @@
                   </a:solidFill>
                   <a:latin typeface="Times New Roman" panose="02020603050405020304" charset="0"/>
                   <a:ea typeface="微软雅黑" panose="020B0503020204020204" charset="-122"/>
-                  <a:sym typeface="+mn-ea"/>
                 </a:rPr>
-                <a:t>Quality Reviewer Agent</a:t>
+                <a:t>Metric Collector Agent</a:t>
               </a:r>
               <a:r>
                 <a:rPr lang="zh-CN" altLang="en-US" sz="1500">
@@ -6852,7 +5463,6 @@
                   </a:solidFill>
                   <a:latin typeface="Times New Roman" panose="02020603050405020304" charset="0"/>
                   <a:ea typeface="微软雅黑" panose="020B0503020204020204" charset="-122"/>
-                  <a:sym typeface="+mn-ea"/>
                 </a:rPr>
                 <a:t>：</a:t>
               </a:r>
@@ -6862,34 +5472,143 @@
                 </a:solidFill>
                 <a:latin typeface="Times New Roman" panose="02020603050405020304" charset="0"/>
                 <a:ea typeface="微软雅黑" panose="020B0503020204020204" charset="-122"/>
-                <a:sym typeface="+mn-ea"/>
               </a:endParaRPr>
             </a:p>
             <a:p>
               <a:pPr algn="ctr"/>
+              <a:r>
+                <a:rPr lang="zh-CN" altLang="en-US" sz="1500">
+                  <a:solidFill>
+                    <a:schemeClr val="tx1"/>
+                  </a:solidFill>
+                  <a:latin typeface="Times New Roman" panose="02020603050405020304" charset="0"/>
+                  <a:ea typeface="微软雅黑" panose="020B0503020204020204" charset="-122"/>
+                </a:rPr>
+                <a:t>调用接口获取指标数据</a:t>
+              </a:r>
               <a:endParaRPr lang="zh-CN" altLang="en-US" sz="1500">
                 <a:solidFill>
                   <a:schemeClr val="tx1"/>
                 </a:solidFill>
                 <a:latin typeface="Times New Roman" panose="02020603050405020304" charset="0"/>
                 <a:ea typeface="微软雅黑" panose="020B0503020204020204" charset="-122"/>
-                <a:sym typeface="+mn-ea"/>
               </a:endParaRPr>
             </a:p>
+          </p:txBody>
+        </p:sp>
+        <p:cxnSp>
+          <p:nvCxnSpPr>
+            <p:cNvPr id="26" name="直接箭头连接符 25"/>
+            <p:cNvCxnSpPr>
+              <a:stCxn id="3" idx="2"/>
+              <a:endCxn id="14" idx="0"/>
+            </p:cNvCxnSpPr>
+            <p:nvPr/>
+          </p:nvCxnSpPr>
+          <p:spPr>
+            <a:xfrm>
+              <a:off x="9843" y="2274"/>
+              <a:ext cx="0" cy="564"/>
+            </a:xfrm>
+            <a:prstGeom prst="straightConnector1">
+              <a:avLst/>
+            </a:prstGeom>
+            <a:ln w="19050">
+              <a:solidFill>
+                <a:schemeClr val="tx1"/>
+              </a:solidFill>
+              <a:tailEnd type="triangle"/>
+            </a:ln>
+          </p:spPr>
+          <p:style>
+            <a:lnRef idx="2">
+              <a:schemeClr val="accent1"/>
+            </a:lnRef>
+            <a:fillRef idx="0">
+              <a:srgbClr val="FFFFFF"/>
+            </a:fillRef>
+            <a:effectRef idx="0">
+              <a:srgbClr val="FFFFFF"/>
+            </a:effectRef>
+            <a:fontRef idx="minor">
+              <a:schemeClr val="tx1"/>
+            </a:fontRef>
+          </p:style>
+        </p:cxnSp>
+        <p:sp>
+          <p:nvSpPr>
+            <p:cNvPr id="27" name="矩形 26"/>
+            <p:cNvSpPr/>
+            <p:nvPr/>
+          </p:nvSpPr>
+          <p:spPr>
+            <a:xfrm>
+              <a:off x="7008" y="4252"/>
+              <a:ext cx="5669" cy="850"/>
+            </a:xfrm>
+            <a:prstGeom prst="rect">
+              <a:avLst/>
+            </a:prstGeom>
+            <a:solidFill>
+              <a:schemeClr val="bg1"/>
+            </a:solidFill>
+            <a:ln>
+              <a:solidFill>
+                <a:schemeClr val="tx1"/>
+              </a:solidFill>
+            </a:ln>
+          </p:spPr>
+          <p:style>
+            <a:lnRef idx="2">
+              <a:schemeClr val="accent1">
+                <a:lumMod val="75000"/>
+              </a:schemeClr>
+            </a:lnRef>
+            <a:fillRef idx="1">
+              <a:schemeClr val="accent1"/>
+            </a:fillRef>
+            <a:effectRef idx="0">
+              <a:srgbClr val="FFFFFF"/>
+            </a:effectRef>
+            <a:fontRef idx="minor">
+              <a:schemeClr val="lt1"/>
+            </a:fontRef>
+          </p:style>
+          <p:txBody>
+            <a:bodyPr rtlCol="0" anchor="ctr"/>
             <a:p>
               <a:pPr algn="ctr"/>
-              <a:endParaRPr lang="zh-CN" altLang="en-US" sz="1500">
-                <a:solidFill>
-                  <a:schemeClr val="tx1"/>
-                </a:solidFill>
-                <a:latin typeface="Times New Roman" panose="02020603050405020304" charset="0"/>
-                <a:ea typeface="微软雅黑" panose="020B0503020204020204" charset="-122"/>
-                <a:sym typeface="+mn-ea"/>
-              </a:endParaRPr>
-            </a:p>
-            <a:p>
-              <a:pPr algn="ctr"/>
-              <a:endParaRPr lang="en-US" altLang="zh-CN" sz="1500" b="1">
+              <a:r>
+                <a:rPr lang="en-US" altLang="zh-CN" sz="1500" b="1">
+                  <a:solidFill>
+                    <a:schemeClr val="tx1"/>
+                  </a:solidFill>
+                  <a:latin typeface="Times New Roman" panose="02020603050405020304" charset="0"/>
+                  <a:ea typeface="微软雅黑" panose="020B0503020204020204" charset="-122"/>
+                </a:rPr>
+                <a:t>Core Metric Selector Agent</a:t>
+              </a:r>
+              <a:r>
+                <a:rPr lang="zh-CN" altLang="en-US" sz="1500">
+                  <a:solidFill>
+                    <a:schemeClr val="tx1"/>
+                  </a:solidFill>
+                  <a:latin typeface="Times New Roman" panose="02020603050405020304" charset="0"/>
+                  <a:ea typeface="微软雅黑" panose="020B0503020204020204" charset="-122"/>
+                </a:rPr>
+                <a:t>：</a:t>
+              </a:r>
+              <a:r>
+                <a:rPr lang="en-US" altLang="zh-CN" sz="1500">
+                  <a:solidFill>
+                    <a:schemeClr val="tx1"/>
+                  </a:solidFill>
+                  <a:latin typeface="Times New Roman" panose="02020603050405020304" charset="0"/>
+                  <a:ea typeface="微软雅黑" panose="020B0503020204020204" charset="-122"/>
+                </a:rPr>
+                <a:t> </a:t>
+              </a:r>
+              <a:endParaRPr lang="en-US" altLang="zh-CN" sz="1500">
                 <a:solidFill>
                   <a:schemeClr val="tx1"/>
                 </a:solidFill>
@@ -6899,7 +5618,17 @@
             </a:p>
             <a:p>
               <a:pPr algn="ctr"/>
-              <a:endParaRPr lang="en-US" altLang="zh-CN" sz="1500" b="1">
+              <a:r>
+                <a:rPr lang="zh-CN" altLang="en-US" sz="1500">
+                  <a:solidFill>
+                    <a:schemeClr val="tx1"/>
+                  </a:solidFill>
+                  <a:latin typeface="Times New Roman" panose="02020603050405020304" charset="0"/>
+                  <a:ea typeface="微软雅黑" panose="020B0503020204020204" charset="-122"/>
+                </a:rPr>
+                <a:t>根据项目类型筛选关键指标</a:t>
+              </a:r>
+              <a:endParaRPr lang="zh-CN" altLang="en-US" sz="1500">
                 <a:solidFill>
                   <a:schemeClr val="tx1"/>
                 </a:solidFill>
@@ -6909,29 +5638,403 @@
             </a:p>
           </p:txBody>
         </p:sp>
+        <p:cxnSp>
+          <p:nvCxnSpPr>
+            <p:cNvPr id="28" name="直接箭头连接符 27"/>
+            <p:cNvCxnSpPr>
+              <a:stCxn id="14" idx="2"/>
+              <a:endCxn id="27" idx="0"/>
+            </p:cNvCxnSpPr>
+            <p:nvPr/>
+          </p:nvCxnSpPr>
+          <p:spPr>
+            <a:xfrm>
+              <a:off x="9843" y="3688"/>
+              <a:ext cx="0" cy="564"/>
+            </a:xfrm>
+            <a:prstGeom prst="straightConnector1">
+              <a:avLst/>
+            </a:prstGeom>
+            <a:ln w="19050">
+              <a:solidFill>
+                <a:schemeClr val="tx1"/>
+              </a:solidFill>
+              <a:tailEnd type="triangle"/>
+            </a:ln>
+          </p:spPr>
+          <p:style>
+            <a:lnRef idx="2">
+              <a:schemeClr val="accent1"/>
+            </a:lnRef>
+            <a:fillRef idx="0">
+              <a:srgbClr val="FFFFFF"/>
+            </a:fillRef>
+            <a:effectRef idx="0">
+              <a:srgbClr val="FFFFFF"/>
+            </a:effectRef>
+            <a:fontRef idx="minor">
+              <a:schemeClr val="tx1"/>
+            </a:fontRef>
+          </p:style>
+        </p:cxnSp>
+        <p:sp>
+          <p:nvSpPr>
+            <p:cNvPr id="30" name="矩形 29"/>
+            <p:cNvSpPr/>
+            <p:nvPr/>
+          </p:nvSpPr>
+          <p:spPr>
+            <a:xfrm>
+              <a:off x="7008" y="5666"/>
+              <a:ext cx="5669" cy="850"/>
+            </a:xfrm>
+            <a:prstGeom prst="rect">
+              <a:avLst/>
+            </a:prstGeom>
+            <a:solidFill>
+              <a:schemeClr val="bg1"/>
+            </a:solidFill>
+            <a:ln>
+              <a:solidFill>
+                <a:schemeClr val="tx1"/>
+              </a:solidFill>
+            </a:ln>
+          </p:spPr>
+          <p:style>
+            <a:lnRef idx="2">
+              <a:schemeClr val="accent1">
+                <a:lumMod val="75000"/>
+              </a:schemeClr>
+            </a:lnRef>
+            <a:fillRef idx="1">
+              <a:schemeClr val="accent1"/>
+            </a:fillRef>
+            <a:effectRef idx="0">
+              <a:srgbClr val="FFFFFF"/>
+            </a:effectRef>
+            <a:fontRef idx="minor">
+              <a:schemeClr val="lt1"/>
+            </a:fontRef>
+          </p:style>
+          <p:txBody>
+            <a:bodyPr rtlCol="0" anchor="ctr"/>
+            <a:p>
+              <a:pPr algn="ctr"/>
+              <a:r>
+                <a:rPr lang="en-US" altLang="zh-CN" sz="1500" b="1">
+                  <a:solidFill>
+                    <a:schemeClr val="tx1"/>
+                  </a:solidFill>
+                  <a:latin typeface="Times New Roman" panose="02020603050405020304" charset="0"/>
+                  <a:ea typeface="微软雅黑" panose="020B0503020204020204" charset="-122"/>
+                </a:rPr>
+                <a:t>RAG Retrieval Agent</a:t>
+              </a:r>
+              <a:r>
+                <a:rPr lang="zh-CN" altLang="en-US" sz="1500">
+                  <a:solidFill>
+                    <a:schemeClr val="tx1"/>
+                  </a:solidFill>
+                  <a:latin typeface="Times New Roman" panose="02020603050405020304" charset="0"/>
+                  <a:ea typeface="微软雅黑" panose="020B0503020204020204" charset="-122"/>
+                </a:rPr>
+                <a:t>：</a:t>
+              </a:r>
+              <a:endParaRPr lang="zh-CN" altLang="en-US" sz="1500">
+                <a:solidFill>
+                  <a:schemeClr val="tx1"/>
+                </a:solidFill>
+                <a:latin typeface="Times New Roman" panose="02020603050405020304" charset="0"/>
+                <a:ea typeface="微软雅黑" panose="020B0503020204020204" charset="-122"/>
+              </a:endParaRPr>
+            </a:p>
+            <a:p>
+              <a:pPr algn="ctr"/>
+              <a:r>
+                <a:rPr lang="zh-CN" altLang="en-US" sz="1500">
+                  <a:solidFill>
+                    <a:schemeClr val="tx1"/>
+                  </a:solidFill>
+                  <a:latin typeface="Times New Roman" panose="02020603050405020304" charset="0"/>
+                  <a:ea typeface="微软雅黑" panose="020B0503020204020204" charset="-122"/>
+                </a:rPr>
+                <a:t>从知识库中检索指标的定义和适用场景</a:t>
+              </a:r>
+              <a:endParaRPr lang="zh-CN" altLang="en-US" sz="1500">
+                <a:solidFill>
+                  <a:schemeClr val="tx1"/>
+                </a:solidFill>
+                <a:latin typeface="Times New Roman" panose="02020603050405020304" charset="0"/>
+                <a:ea typeface="微软雅黑" panose="020B0503020204020204" charset="-122"/>
+              </a:endParaRPr>
+            </a:p>
+          </p:txBody>
+        </p:sp>
+        <p:cxnSp>
+          <p:nvCxnSpPr>
+            <p:cNvPr id="34" name="直接箭头连接符 33"/>
+            <p:cNvCxnSpPr>
+              <a:stCxn id="27" idx="2"/>
+              <a:endCxn id="30" idx="0"/>
+            </p:cNvCxnSpPr>
+            <p:nvPr/>
+          </p:nvCxnSpPr>
+          <p:spPr>
+            <a:xfrm>
+              <a:off x="9843" y="5102"/>
+              <a:ext cx="0" cy="564"/>
+            </a:xfrm>
+            <a:prstGeom prst="straightConnector1">
+              <a:avLst/>
+            </a:prstGeom>
+            <a:ln w="19050">
+              <a:solidFill>
+                <a:schemeClr val="tx1"/>
+              </a:solidFill>
+              <a:tailEnd type="triangle"/>
+            </a:ln>
+          </p:spPr>
+          <p:style>
+            <a:lnRef idx="2">
+              <a:schemeClr val="accent1"/>
+            </a:lnRef>
+            <a:fillRef idx="0">
+              <a:srgbClr val="FFFFFF"/>
+            </a:fillRef>
+            <a:effectRef idx="0">
+              <a:srgbClr val="FFFFFF"/>
+            </a:effectRef>
+            <a:fontRef idx="minor">
+              <a:schemeClr val="tx1"/>
+            </a:fontRef>
+          </p:style>
+        </p:cxnSp>
+        <p:cxnSp>
+          <p:nvCxnSpPr>
+            <p:cNvPr id="54" name="直接箭头连接符 53"/>
+            <p:cNvCxnSpPr/>
+            <p:nvPr/>
+          </p:nvCxnSpPr>
+          <p:spPr>
+            <a:xfrm flipH="1">
+              <a:off x="9843" y="9202"/>
+              <a:ext cx="1" cy="706"/>
+            </a:xfrm>
+            <a:prstGeom prst="straightConnector1">
+              <a:avLst/>
+            </a:prstGeom>
+            <a:ln w="19050">
+              <a:solidFill>
+                <a:schemeClr val="tx1"/>
+              </a:solidFill>
+              <a:tailEnd type="triangle"/>
+            </a:ln>
+          </p:spPr>
+          <p:style>
+            <a:lnRef idx="2">
+              <a:schemeClr val="accent1"/>
+            </a:lnRef>
+            <a:fillRef idx="0">
+              <a:srgbClr val="FFFFFF"/>
+            </a:fillRef>
+            <a:effectRef idx="0">
+              <a:srgbClr val="FFFFFF"/>
+            </a:effectRef>
+            <a:fontRef idx="minor">
+              <a:schemeClr val="tx1"/>
+            </a:fontRef>
+          </p:style>
+        </p:cxnSp>
         <p:grpSp>
           <p:nvGrpSpPr>
-            <p:cNvPr id="62" name="组合 61"/>
+            <p:cNvPr id="74" name="组合 73"/>
             <p:cNvGrpSpPr/>
             <p:nvPr/>
           </p:nvGrpSpPr>
           <p:grpSpPr>
             <a:xfrm>
-              <a:off x="3843" y="11712"/>
-              <a:ext cx="12000" cy="1160"/>
-              <a:chOff x="3843" y="11712"/>
-              <a:chExt cx="12000" cy="1160"/>
+              <a:off x="3328" y="6516"/>
+              <a:ext cx="13032" cy="2686"/>
+              <a:chOff x="3328" y="6516"/>
+              <a:chExt cx="13032" cy="2686"/>
             </a:xfrm>
           </p:grpSpPr>
+          <p:cxnSp>
+            <p:nvCxnSpPr>
+              <p:cNvPr id="36" name="直接箭头连接符 35"/>
+              <p:cNvCxnSpPr>
+                <a:stCxn id="30" idx="2"/>
+                <a:endCxn id="35" idx="0"/>
+              </p:cNvCxnSpPr>
+              <p:nvPr/>
+            </p:nvCxnSpPr>
+            <p:spPr>
+              <a:xfrm>
+                <a:off x="9843" y="6516"/>
+                <a:ext cx="1" cy="564"/>
+              </a:xfrm>
+              <a:prstGeom prst="straightConnector1">
+                <a:avLst/>
+              </a:prstGeom>
+              <a:ln w="19050">
+                <a:solidFill>
+                  <a:schemeClr val="tx1"/>
+                </a:solidFill>
+                <a:tailEnd type="triangle"/>
+              </a:ln>
+            </p:spPr>
+            <p:style>
+              <a:lnRef idx="2">
+                <a:schemeClr val="accent1"/>
+              </a:lnRef>
+              <a:fillRef idx="0">
+                <a:srgbClr val="FFFFFF"/>
+              </a:fillRef>
+              <a:effectRef idx="0">
+                <a:srgbClr val="FFFFFF"/>
+              </a:effectRef>
+              <a:fontRef idx="minor">
+                <a:schemeClr val="tx1"/>
+              </a:fontRef>
+            </p:style>
+          </p:cxnSp>
           <p:sp>
             <p:nvSpPr>
-              <p:cNvPr id="55" name="矩形 54"/>
+              <p:cNvPr id="35" name="矩形 34"/>
               <p:cNvSpPr/>
               <p:nvPr/>
             </p:nvSpPr>
             <p:spPr>
               <a:xfrm>
-                <a:off x="3843" y="11712"/>
+                <a:off x="3328" y="7080"/>
+                <a:ext cx="13032" cy="2122"/>
+              </a:xfrm>
+              <a:prstGeom prst="rect">
+                <a:avLst/>
+              </a:prstGeom>
+              <a:solidFill>
+                <a:schemeClr val="bg1"/>
+              </a:solidFill>
+              <a:ln>
+                <a:solidFill>
+                  <a:schemeClr val="tx1"/>
+                </a:solidFill>
+              </a:ln>
+            </p:spPr>
+            <p:style>
+              <a:lnRef idx="2">
+                <a:schemeClr val="accent1">
+                  <a:lumMod val="75000"/>
+                </a:schemeClr>
+              </a:lnRef>
+              <a:fillRef idx="1">
+                <a:schemeClr val="accent1"/>
+              </a:fillRef>
+              <a:effectRef idx="0">
+                <a:srgbClr val="FFFFFF"/>
+              </a:effectRef>
+              <a:fontRef idx="minor">
+                <a:schemeClr val="lt1"/>
+              </a:fontRef>
+            </p:style>
+            <p:txBody>
+              <a:bodyPr rtlCol="0" anchor="ctr"/>
+              <a:p>
+                <a:pPr algn="ctr"/>
+                <a:r>
+                  <a:rPr lang="en-US" altLang="zh-CN" sz="1500" b="1">
+                    <a:solidFill>
+                      <a:schemeClr val="tx1"/>
+                    </a:solidFill>
+                    <a:latin typeface="Times New Roman" panose="02020603050405020304" charset="0"/>
+                    <a:ea typeface="微软雅黑" panose="020B0503020204020204" charset="-122"/>
+                  </a:rPr>
+                  <a:t>Report Generator </a:t>
+                </a:r>
+                <a:r>
+                  <a:rPr lang="en-US" altLang="zh-CN" sz="1500" b="1">
+                    <a:solidFill>
+                      <a:schemeClr val="tx1"/>
+                    </a:solidFill>
+                    <a:latin typeface="Times New Roman" panose="02020603050405020304" charset="0"/>
+                    <a:ea typeface="微软雅黑" panose="020B0503020204020204" charset="-122"/>
+                    <a:sym typeface="+mn-ea"/>
+                  </a:rPr>
+                  <a:t>Agent</a:t>
+                </a:r>
+                <a:r>
+                  <a:rPr lang="zh-CN" altLang="en-US" sz="1500">
+                    <a:solidFill>
+                      <a:schemeClr val="tx1"/>
+                    </a:solidFill>
+                    <a:latin typeface="Times New Roman" panose="02020603050405020304" charset="0"/>
+                    <a:ea typeface="微软雅黑" panose="020B0503020204020204" charset="-122"/>
+                    <a:sym typeface="+mn-ea"/>
+                  </a:rPr>
+                  <a:t>：</a:t>
+                </a:r>
+                <a:endParaRPr lang="zh-CN" altLang="en-US" sz="1500">
+                  <a:solidFill>
+                    <a:schemeClr val="tx1"/>
+                  </a:solidFill>
+                  <a:latin typeface="Times New Roman" panose="02020603050405020304" charset="0"/>
+                  <a:ea typeface="微软雅黑" panose="020B0503020204020204" charset="-122"/>
+                  <a:sym typeface="+mn-ea"/>
+                </a:endParaRPr>
+              </a:p>
+              <a:p>
+                <a:pPr algn="ctr"/>
+                <a:endParaRPr lang="zh-CN" altLang="en-US" sz="1500">
+                  <a:solidFill>
+                    <a:schemeClr val="tx1"/>
+                  </a:solidFill>
+                  <a:latin typeface="Times New Roman" panose="02020603050405020304" charset="0"/>
+                  <a:ea typeface="微软雅黑" panose="020B0503020204020204" charset="-122"/>
+                  <a:sym typeface="+mn-ea"/>
+                </a:endParaRPr>
+              </a:p>
+              <a:p>
+                <a:pPr algn="ctr"/>
+                <a:endParaRPr lang="zh-CN" altLang="en-US" sz="1500">
+                  <a:solidFill>
+                    <a:schemeClr val="tx1"/>
+                  </a:solidFill>
+                  <a:latin typeface="Times New Roman" panose="02020603050405020304" charset="0"/>
+                  <a:ea typeface="微软雅黑" panose="020B0503020204020204" charset="-122"/>
+                  <a:sym typeface="+mn-ea"/>
+                </a:endParaRPr>
+              </a:p>
+              <a:p>
+                <a:pPr algn="ctr"/>
+                <a:endParaRPr lang="en-US" altLang="zh-CN" sz="1500" b="1">
+                  <a:solidFill>
+                    <a:schemeClr val="tx1"/>
+                  </a:solidFill>
+                  <a:latin typeface="Times New Roman" panose="02020603050405020304" charset="0"/>
+                  <a:ea typeface="微软雅黑" panose="020B0503020204020204" charset="-122"/>
+                </a:endParaRPr>
+              </a:p>
+              <a:p>
+                <a:pPr algn="ctr"/>
+                <a:endParaRPr lang="en-US" altLang="zh-CN" sz="1500" b="1">
+                  <a:solidFill>
+                    <a:schemeClr val="tx1"/>
+                  </a:solidFill>
+                  <a:latin typeface="Times New Roman" panose="02020603050405020304" charset="0"/>
+                  <a:ea typeface="微软雅黑" panose="020B0503020204020204" charset="-122"/>
+                </a:endParaRPr>
+              </a:p>
+            </p:txBody>
+          </p:sp>
+          <p:sp>
+            <p:nvSpPr>
+              <p:cNvPr id="50" name="矩形 49"/>
+              <p:cNvSpPr/>
+              <p:nvPr/>
+            </p:nvSpPr>
+            <p:spPr>
+              <a:xfrm>
+                <a:off x="10176" y="7743"/>
                 <a:ext cx="5669" cy="1161"/>
               </a:xfrm>
               <a:prstGeom prst="rect">
@@ -6974,7 +6077,7 @@
                     <a:latin typeface="Times New Roman" panose="02020603050405020304" charset="0"/>
                     <a:ea typeface="微软雅黑" panose="020B0503020204020204" charset="-122"/>
                   </a:rPr>
-                  <a:t>Quality Guard</a:t>
+                  <a:t>LLM Report Generator</a:t>
                 </a:r>
                 <a:r>
                   <a:rPr lang="zh-CN" altLang="en-US" sz="1500">
@@ -7004,7 +6107,17 @@
                     <a:latin typeface="Times New Roman" panose="02020603050405020304" charset="0"/>
                     <a:ea typeface="微软雅黑" panose="020B0503020204020204" charset="-122"/>
                   </a:rPr>
-                  <a:t>进行规则质量检查</a:t>
+                  <a:t>基于规则报告、指标、上下文、评审反馈和修复计划，生成</a:t>
+                </a:r>
+                <a:r>
+                  <a:rPr lang="zh-CN" altLang="en-US" sz="1500">
+                    <a:solidFill>
+                      <a:schemeClr val="tx1"/>
+                    </a:solidFill>
+                    <a:latin typeface="Times New Roman" panose="02020603050405020304" charset="0"/>
+                    <a:ea typeface="微软雅黑" panose="020B0503020204020204" charset="-122"/>
+                  </a:rPr>
+                  <a:t>候选评估报告</a:t>
                 </a:r>
                 <a:endParaRPr lang="zh-CN" altLang="en-US" sz="1500">
                   <a:solidFill>
@@ -7016,15 +6129,54 @@
               </a:p>
             </p:txBody>
           </p:sp>
+          <p:cxnSp>
+            <p:nvCxnSpPr>
+              <p:cNvPr id="58" name="直接箭头连接符 57"/>
+              <p:cNvCxnSpPr>
+                <a:stCxn id="42" idx="3"/>
+                <a:endCxn id="50" idx="1"/>
+              </p:cNvCxnSpPr>
+              <p:nvPr/>
+            </p:nvCxnSpPr>
+            <p:spPr>
+              <a:xfrm flipV="1">
+                <a:off x="9512" y="8324"/>
+                <a:ext cx="664" cy="10"/>
+              </a:xfrm>
+              <a:prstGeom prst="straightConnector1">
+                <a:avLst/>
+              </a:prstGeom>
+              <a:ln w="19050">
+                <a:solidFill>
+                  <a:schemeClr val="tx1"/>
+                </a:solidFill>
+                <a:tailEnd type="triangle"/>
+              </a:ln>
+            </p:spPr>
+            <p:style>
+              <a:lnRef idx="2">
+                <a:schemeClr val="accent1"/>
+              </a:lnRef>
+              <a:fillRef idx="0">
+                <a:srgbClr val="FFFFFF"/>
+              </a:fillRef>
+              <a:effectRef idx="0">
+                <a:srgbClr val="FFFFFF"/>
+              </a:effectRef>
+              <a:fontRef idx="minor">
+                <a:schemeClr val="tx1"/>
+              </a:fontRef>
+            </p:style>
+          </p:cxnSp>
           <p:sp>
             <p:nvSpPr>
-              <p:cNvPr id="56" name="矩形 55"/>
+              <p:cNvPr id="42" name="矩形 41"/>
               <p:cNvSpPr/>
               <p:nvPr/>
             </p:nvSpPr>
             <p:spPr>
               <a:xfrm>
-                <a:off x="10175" y="11712"/>
+                <a:off x="3843" y="7753"/>
                 <a:ext cx="5669" cy="1161"/>
               </a:xfrm>
               <a:prstGeom prst="rect">
@@ -7067,7 +6219,7 @@
                     <a:latin typeface="Times New Roman" panose="02020603050405020304" charset="0"/>
                     <a:ea typeface="微软雅黑" panose="020B0503020204020204" charset="-122"/>
                   </a:rPr>
-                  <a:t>LLM Quality Reviewer</a:t>
+                  <a:t>Rule Report Generator</a:t>
                 </a:r>
                 <a:r>
                   <a:rPr lang="zh-CN" altLang="en-US" sz="1500">
@@ -7097,9 +6249,19 @@
                     <a:latin typeface="Times New Roman" panose="02020603050405020304" charset="0"/>
                     <a:ea typeface="微软雅黑" panose="020B0503020204020204" charset="-122"/>
                   </a:rPr>
-                  <a:t>进行语义复审</a:t>
+                  <a:t>生成规则报告，作为兜底 </a:t>
                 </a:r>
-                <a:endParaRPr lang="zh-CN" altLang="en-US" sz="1500">
+                <a:r>
+                  <a:rPr lang="en-US" altLang="zh-CN" sz="1500">
+                    <a:solidFill>
+                      <a:schemeClr val="tx1"/>
+                    </a:solidFill>
+                    <a:latin typeface="Times New Roman" panose="02020603050405020304" charset="0"/>
+                    <a:ea typeface="微软雅黑" panose="020B0503020204020204" charset="-122"/>
+                  </a:rPr>
+                  <a:t>baseline</a:t>
+                </a:r>
+                <a:endParaRPr lang="en-US" altLang="zh-CN" sz="1500">
                   <a:solidFill>
                     <a:schemeClr val="tx1"/>
                   </a:solidFill>
@@ -7109,291 +6271,1307 @@
               </a:p>
             </p:txBody>
           </p:sp>
-          <p:cxnSp>
-            <p:nvCxnSpPr>
-              <p:cNvPr id="61" name="直接箭头连接符 60"/>
-              <p:cNvCxnSpPr>
-                <a:stCxn id="55" idx="3"/>
-                <a:endCxn id="56" idx="1"/>
-              </p:cNvCxnSpPr>
-              <p:nvPr/>
-            </p:nvCxnSpPr>
-            <p:spPr>
-              <a:xfrm>
-                <a:off x="9512" y="12293"/>
-                <a:ext cx="663" cy="0"/>
-              </a:xfrm>
-              <a:prstGeom prst="straightConnector1">
-                <a:avLst/>
-              </a:prstGeom>
-              <a:ln w="19050">
+        </p:grpSp>
+        <p:sp>
+          <p:nvSpPr>
+            <p:cNvPr id="64" name="矩形 63"/>
+            <p:cNvSpPr/>
+            <p:nvPr/>
+          </p:nvSpPr>
+          <p:spPr>
+            <a:xfrm>
+              <a:off x="7008" y="12736"/>
+              <a:ext cx="5669" cy="850"/>
+            </a:xfrm>
+            <a:prstGeom prst="rect">
+              <a:avLst/>
+            </a:prstGeom>
+            <a:solidFill>
+              <a:schemeClr val="bg1"/>
+            </a:solidFill>
+            <a:ln>
+              <a:solidFill>
+                <a:schemeClr val="tx1"/>
+              </a:solidFill>
+            </a:ln>
+          </p:spPr>
+          <p:style>
+            <a:lnRef idx="2">
+              <a:schemeClr val="accent1">
+                <a:lumMod val="75000"/>
+              </a:schemeClr>
+            </a:lnRef>
+            <a:fillRef idx="1">
+              <a:schemeClr val="accent1"/>
+            </a:fillRef>
+            <a:effectRef idx="0">
+              <a:srgbClr val="FFFFFF"/>
+            </a:effectRef>
+            <a:fontRef idx="minor">
+              <a:schemeClr val="lt1"/>
+            </a:fontRef>
+          </p:style>
+          <p:txBody>
+            <a:bodyPr rtlCol="0" anchor="ctr"/>
+            <a:p>
+              <a:pPr algn="ctr"/>
+              <a:r>
+                <a:rPr lang="en-US" altLang="zh-CN" sz="1500" b="1">
+                  <a:solidFill>
+                    <a:schemeClr val="tx1"/>
+                  </a:solidFill>
+                  <a:latin typeface="Times New Roman" panose="02020603050405020304" charset="0"/>
+                  <a:ea typeface="微软雅黑" panose="020B0503020204020204" charset="-122"/>
+                </a:rPr>
+                <a:t>Repair Planner Agent</a:t>
+              </a:r>
+              <a:r>
+                <a:rPr lang="zh-CN" altLang="en-US" sz="1500">
+                  <a:solidFill>
+                    <a:schemeClr val="tx1"/>
+                  </a:solidFill>
+                  <a:latin typeface="Times New Roman" panose="02020603050405020304" charset="0"/>
+                  <a:ea typeface="微软雅黑" panose="020B0503020204020204" charset="-122"/>
+                </a:rPr>
+                <a:t>：</a:t>
+              </a:r>
+              <a:endParaRPr lang="zh-CN" altLang="en-US" sz="1500">
                 <a:solidFill>
                   <a:schemeClr val="tx1"/>
                 </a:solidFill>
-                <a:tailEnd type="triangle"/>
+                <a:latin typeface="Times New Roman" panose="02020603050405020304" charset="0"/>
+                <a:ea typeface="微软雅黑" panose="020B0503020204020204" charset="-122"/>
+              </a:endParaRPr>
+            </a:p>
+            <a:p>
+              <a:pPr algn="ctr"/>
+              <a:r>
+                <a:rPr lang="zh-CN" altLang="en-US" sz="1500">
+                  <a:solidFill>
+                    <a:schemeClr val="tx1"/>
+                  </a:solidFill>
+                  <a:latin typeface="Times New Roman" panose="02020603050405020304" charset="0"/>
+                  <a:ea typeface="微软雅黑" panose="020B0503020204020204" charset="-122"/>
+                </a:rPr>
+                <a:t>根据复审结果制定</a:t>
+              </a:r>
+              <a:r>
+                <a:rPr lang="zh-CN" altLang="en-US" sz="1500">
+                  <a:solidFill>
+                    <a:schemeClr val="tx1"/>
+                  </a:solidFill>
+                  <a:latin typeface="Times New Roman" panose="02020603050405020304" charset="0"/>
+                  <a:ea typeface="微软雅黑" panose="020B0503020204020204" charset="-122"/>
+                </a:rPr>
+                <a:t>修复计划</a:t>
+              </a:r>
+              <a:endParaRPr lang="zh-CN" altLang="en-US" sz="1500">
+                <a:solidFill>
+                  <a:schemeClr val="tx1"/>
+                </a:solidFill>
+                <a:latin typeface="Times New Roman" panose="02020603050405020304" charset="0"/>
+                <a:ea typeface="微软雅黑" panose="020B0503020204020204" charset="-122"/>
+              </a:endParaRPr>
+            </a:p>
+          </p:txBody>
+        </p:sp>
+        <p:cxnSp>
+          <p:nvCxnSpPr>
+            <p:cNvPr id="65" name="直接箭头连接符 64"/>
+            <p:cNvCxnSpPr>
+              <a:stCxn id="53" idx="2"/>
+              <a:endCxn id="64" idx="0"/>
+            </p:cNvCxnSpPr>
+            <p:nvPr/>
+          </p:nvCxnSpPr>
+          <p:spPr>
+            <a:xfrm>
+              <a:off x="9843" y="12032"/>
+              <a:ext cx="0" cy="704"/>
+            </a:xfrm>
+            <a:prstGeom prst="straightConnector1">
+              <a:avLst/>
+            </a:prstGeom>
+            <a:ln w="19050">
+              <a:solidFill>
+                <a:schemeClr val="tx1"/>
+              </a:solidFill>
+              <a:tailEnd type="triangle"/>
+            </a:ln>
+          </p:spPr>
+          <p:style>
+            <a:lnRef idx="2">
+              <a:schemeClr val="accent1"/>
+            </a:lnRef>
+            <a:fillRef idx="0">
+              <a:srgbClr val="FFFFFF"/>
+            </a:fillRef>
+            <a:effectRef idx="0">
+              <a:srgbClr val="FFFFFF"/>
+            </a:effectRef>
+            <a:fontRef idx="minor">
+              <a:schemeClr val="tx1"/>
+            </a:fontRef>
+          </p:style>
+        </p:cxnSp>
+        <p:sp>
+          <p:nvSpPr>
+            <p:cNvPr id="66" name="矩形 65"/>
+            <p:cNvSpPr/>
+            <p:nvPr/>
+          </p:nvSpPr>
+          <p:spPr>
+            <a:xfrm>
+              <a:off x="7008" y="14293"/>
+              <a:ext cx="5669" cy="566"/>
+            </a:xfrm>
+            <a:prstGeom prst="rect">
+              <a:avLst/>
+            </a:prstGeom>
+            <a:solidFill>
+              <a:schemeClr val="bg1"/>
+            </a:solidFill>
+            <a:ln>
+              <a:solidFill>
+                <a:schemeClr val="tx1"/>
+              </a:solidFill>
+            </a:ln>
+          </p:spPr>
+          <p:style>
+            <a:lnRef idx="2">
+              <a:schemeClr val="accent1">
+                <a:lumMod val="75000"/>
+              </a:schemeClr>
+            </a:lnRef>
+            <a:fillRef idx="1">
+              <a:schemeClr val="accent1"/>
+            </a:fillRef>
+            <a:effectRef idx="0">
+              <a:srgbClr val="FFFFFF"/>
+            </a:effectRef>
+            <a:fontRef idx="minor">
+              <a:schemeClr val="lt1"/>
+            </a:fontRef>
+          </p:style>
+          <p:txBody>
+            <a:bodyPr rtlCol="0" anchor="ctr"/>
+            <a:p>
+              <a:pPr algn="ctr"/>
+              <a:r>
+                <a:rPr lang="zh-CN" altLang="en-US" sz="1500" b="1">
+                  <a:solidFill>
+                    <a:schemeClr val="tx1"/>
+                  </a:solidFill>
+                  <a:latin typeface="Times New Roman" panose="02020603050405020304" charset="0"/>
+                  <a:ea typeface="微软雅黑" panose="020B0503020204020204" charset="-122"/>
+                </a:rPr>
+                <a:t>输出</a:t>
+              </a:r>
+              <a:r>
+                <a:rPr lang="zh-CN" altLang="en-US" sz="1500">
+                  <a:solidFill>
+                    <a:schemeClr val="tx1"/>
+                  </a:solidFill>
+                  <a:latin typeface="Times New Roman" panose="02020603050405020304" charset="0"/>
+                  <a:ea typeface="微软雅黑" panose="020B0503020204020204" charset="-122"/>
+                </a:rPr>
+                <a:t>：</a:t>
+              </a:r>
+              <a:r>
+                <a:rPr lang="zh-CN" altLang="en-US" sz="1500">
+                  <a:solidFill>
+                    <a:schemeClr val="tx1"/>
+                  </a:solidFill>
+                  <a:latin typeface="Times New Roman" panose="02020603050405020304" charset="0"/>
+                  <a:ea typeface="微软雅黑" panose="020B0503020204020204" charset="-122"/>
+                </a:rPr>
+                <a:t>仓库评估报告</a:t>
+              </a:r>
+              <a:endParaRPr lang="zh-CN" altLang="en-US" sz="1500">
+                <a:solidFill>
+                  <a:schemeClr val="tx1"/>
+                </a:solidFill>
+                <a:latin typeface="Times New Roman" panose="02020603050405020304" charset="0"/>
+                <a:ea typeface="微软雅黑" panose="020B0503020204020204" charset="-122"/>
+              </a:endParaRPr>
+            </a:p>
+          </p:txBody>
+        </p:sp>
+        <p:cxnSp>
+          <p:nvCxnSpPr>
+            <p:cNvPr id="67" name="直接箭头连接符 66"/>
+            <p:cNvCxnSpPr>
+              <a:stCxn id="64" idx="2"/>
+              <a:endCxn id="66" idx="0"/>
+            </p:cNvCxnSpPr>
+            <p:nvPr/>
+          </p:nvCxnSpPr>
+          <p:spPr>
+            <a:xfrm>
+              <a:off x="9843" y="13586"/>
+              <a:ext cx="0" cy="707"/>
+            </a:xfrm>
+            <a:prstGeom prst="straightConnector1">
+              <a:avLst/>
+            </a:prstGeom>
+            <a:ln w="19050">
+              <a:solidFill>
+                <a:schemeClr val="tx1"/>
+              </a:solidFill>
+              <a:tailEnd type="triangle"/>
+            </a:ln>
+          </p:spPr>
+          <p:style>
+            <a:lnRef idx="2">
+              <a:schemeClr val="accent1"/>
+            </a:lnRef>
+            <a:fillRef idx="0">
+              <a:srgbClr val="FFFFFF"/>
+            </a:fillRef>
+            <a:effectRef idx="0">
+              <a:srgbClr val="FFFFFF"/>
+            </a:effectRef>
+            <a:fontRef idx="minor">
+              <a:schemeClr val="tx1"/>
+            </a:fontRef>
+          </p:style>
+        </p:cxnSp>
+        <p:cxnSp>
+          <p:nvCxnSpPr>
+            <p:cNvPr id="68" name="曲线连接符 67"/>
+            <p:cNvCxnSpPr>
+              <a:stCxn id="64" idx="1"/>
+              <a:endCxn id="3" idx="1"/>
+            </p:cNvCxnSpPr>
+            <p:nvPr/>
+          </p:nvCxnSpPr>
+          <p:spPr>
+            <a:xfrm rot="10800000" flipH="1">
+              <a:off x="7008" y="1849"/>
+              <a:ext cx="5" cy="11312"/>
+            </a:xfrm>
+            <a:prstGeom prst="curvedConnector3">
+              <a:avLst>
+                <a:gd name="adj1" fmla="val -191240000"/>
+              </a:avLst>
+            </a:prstGeom>
+            <a:ln w="19050">
+              <a:solidFill>
+                <a:schemeClr val="tx1"/>
+              </a:solidFill>
+              <a:prstDash val="sysDash"/>
+              <a:tailEnd type="triangle"/>
+            </a:ln>
+          </p:spPr>
+          <p:style>
+            <a:lnRef idx="2">
+              <a:schemeClr val="accent1"/>
+            </a:lnRef>
+            <a:fillRef idx="0">
+              <a:srgbClr val="FFFFFF"/>
+            </a:fillRef>
+            <a:effectRef idx="0">
+              <a:srgbClr val="FFFFFF"/>
+            </a:effectRef>
+            <a:fontRef idx="minor">
+              <a:schemeClr val="tx1"/>
+            </a:fontRef>
+          </p:style>
+        </p:cxnSp>
+        <p:cxnSp>
+          <p:nvCxnSpPr>
+            <p:cNvPr id="69" name="曲线连接符 68"/>
+            <p:cNvCxnSpPr>
+              <a:stCxn id="64" idx="1"/>
+              <a:endCxn id="27" idx="1"/>
+            </p:cNvCxnSpPr>
+            <p:nvPr/>
+          </p:nvCxnSpPr>
+          <p:spPr>
+            <a:xfrm rot="10800000" flipH="1">
+              <a:off x="7008" y="4677"/>
+              <a:ext cx="5" cy="8484"/>
+            </a:xfrm>
+            <a:prstGeom prst="curvedConnector3">
+              <a:avLst>
+                <a:gd name="adj1" fmla="val -159360000"/>
+              </a:avLst>
+            </a:prstGeom>
+            <a:ln w="19050">
+              <a:solidFill>
+                <a:schemeClr val="tx1"/>
+              </a:solidFill>
+              <a:prstDash val="sysDash"/>
+              <a:tailEnd type="triangle"/>
+            </a:ln>
+          </p:spPr>
+          <p:style>
+            <a:lnRef idx="2">
+              <a:schemeClr val="accent1"/>
+            </a:lnRef>
+            <a:fillRef idx="0">
+              <a:srgbClr val="FFFFFF"/>
+            </a:fillRef>
+            <a:effectRef idx="0">
+              <a:srgbClr val="FFFFFF"/>
+            </a:effectRef>
+            <a:fontRef idx="minor">
+              <a:schemeClr val="tx1"/>
+            </a:fontRef>
+          </p:style>
+        </p:cxnSp>
+        <p:cxnSp>
+          <p:nvCxnSpPr>
+            <p:cNvPr id="70" name="曲线连接符 69"/>
+            <p:cNvCxnSpPr/>
+            <p:nvPr/>
+          </p:nvCxnSpPr>
+          <p:spPr>
+            <a:xfrm rot="10800000" flipH="1">
+              <a:off x="6901" y="6091"/>
+              <a:ext cx="5" cy="7070"/>
+            </a:xfrm>
+            <a:prstGeom prst="curvedConnector3">
+              <a:avLst>
+                <a:gd name="adj1" fmla="val -135000000"/>
+              </a:avLst>
+            </a:prstGeom>
+            <a:ln w="19050">
+              <a:solidFill>
+                <a:schemeClr val="tx1"/>
+              </a:solidFill>
+              <a:prstDash val="sysDash"/>
+              <a:tailEnd type="triangle"/>
+            </a:ln>
+          </p:spPr>
+          <p:style>
+            <a:lnRef idx="2">
+              <a:schemeClr val="accent1"/>
+            </a:lnRef>
+            <a:fillRef idx="0">
+              <a:srgbClr val="FFFFFF"/>
+            </a:fillRef>
+            <a:effectRef idx="0">
+              <a:srgbClr val="FFFFFF"/>
+            </a:effectRef>
+            <a:fontRef idx="minor">
+              <a:schemeClr val="tx1"/>
+            </a:fontRef>
+          </p:style>
+        </p:cxnSp>
+        <p:cxnSp>
+          <p:nvCxnSpPr>
+            <p:cNvPr id="71" name="曲线连接符 70"/>
+            <p:cNvCxnSpPr>
+              <a:stCxn id="64" idx="1"/>
+              <a:endCxn id="50" idx="2"/>
+            </p:cNvCxnSpPr>
+            <p:nvPr/>
+          </p:nvCxnSpPr>
+          <p:spPr>
+            <a:xfrm rot="10800000" flipH="1">
+              <a:off x="7007" y="8903"/>
+              <a:ext cx="6003" cy="4257"/>
+            </a:xfrm>
+            <a:prstGeom prst="curvedConnector4">
+              <a:avLst>
+                <a:gd name="adj1" fmla="val -83141"/>
+                <a:gd name="adj2" fmla="val 87197"/>
+              </a:avLst>
+            </a:prstGeom>
+            <a:ln w="19050">
+              <a:solidFill>
+                <a:schemeClr val="tx1"/>
+              </a:solidFill>
+              <a:prstDash val="sysDash"/>
+              <a:tailEnd type="triangle"/>
+            </a:ln>
+          </p:spPr>
+          <p:style>
+            <a:lnRef idx="2">
+              <a:schemeClr val="accent1"/>
+            </a:lnRef>
+            <a:fillRef idx="0">
+              <a:srgbClr val="FFFFFF"/>
+            </a:fillRef>
+            <a:effectRef idx="0">
+              <a:srgbClr val="FFFFFF"/>
+            </a:effectRef>
+            <a:fontRef idx="minor">
+              <a:schemeClr val="tx1"/>
+            </a:fontRef>
+          </p:style>
+        </p:cxnSp>
+        <p:sp>
+          <p:nvSpPr>
+            <p:cNvPr id="72" name="文本框 71"/>
+            <p:cNvSpPr txBox="1"/>
+            <p:nvPr/>
+          </p:nvSpPr>
+          <p:spPr>
+            <a:xfrm>
+              <a:off x="7998" y="13809"/>
+              <a:ext cx="3690" cy="221"/>
+            </a:xfrm>
+            <a:prstGeom prst="rect">
+              <a:avLst/>
+            </a:prstGeom>
+            <a:solidFill>
+              <a:schemeClr val="accent4">
+                <a:lumMod val="20000"/>
+                <a:lumOff val="80000"/>
+              </a:schemeClr>
+            </a:solidFill>
+          </p:spPr>
+          <p:txBody>
+            <a:bodyPr wrap="square" rtlCol="0" anchor="ctr" anchorCtr="0">
+              <a:noAutofit/>
+            </a:bodyPr>
+            <a:p>
+              <a:pPr algn="ctr"/>
+              <a:r>
+                <a:rPr lang="en-US" altLang="zh-CN" sz="1200" b="1">
+                  <a:latin typeface="Times New Roman" panose="02020603050405020304" charset="0"/>
+                  <a:cs typeface="Times New Roman" panose="02020603050405020304" charset="0"/>
+                </a:rPr>
+                <a:t>PASS OR </a:t>
+              </a:r>
+              <a:r>
+                <a:rPr lang="en-US" altLang="zh-CN" sz="1200" b="1">
+                  <a:latin typeface="Times New Roman" panose="02020603050405020304" charset="0"/>
+                  <a:cs typeface="Times New Roman" panose="02020603050405020304" charset="0"/>
+                </a:rPr>
+                <a:t>MAX_TRY_COUNT</a:t>
+              </a:r>
+              <a:endParaRPr lang="en-US" altLang="zh-CN" sz="1200" b="1">
+                <a:latin typeface="Times New Roman" panose="02020603050405020304" charset="0"/>
+                <a:cs typeface="Times New Roman" panose="02020603050405020304" charset="0"/>
+              </a:endParaRPr>
+            </a:p>
+          </p:txBody>
+        </p:sp>
+        <p:sp>
+          <p:nvSpPr>
+            <p:cNvPr id="73" name="文本框 72"/>
+            <p:cNvSpPr txBox="1"/>
+            <p:nvPr/>
+          </p:nvSpPr>
+          <p:spPr>
+            <a:xfrm>
+              <a:off x="5808" y="13034"/>
+              <a:ext cx="909" cy="261"/>
+            </a:xfrm>
+            <a:prstGeom prst="rect">
+              <a:avLst/>
+            </a:prstGeom>
+            <a:solidFill>
+              <a:schemeClr val="accent6">
+                <a:lumMod val="20000"/>
+                <a:lumOff val="80000"/>
+              </a:schemeClr>
+            </a:solidFill>
+          </p:spPr>
+          <p:txBody>
+            <a:bodyPr wrap="square" rtlCol="0" anchor="ctr" anchorCtr="0">
+              <a:noAutofit/>
+            </a:bodyPr>
+            <a:p>
+              <a:pPr algn="ctr"/>
+              <a:r>
+                <a:rPr lang="en-US" altLang="zh-CN" sz="1200" b="1">
+                  <a:latin typeface="Times New Roman" panose="02020603050405020304" charset="0"/>
+                  <a:cs typeface="Times New Roman" panose="02020603050405020304" charset="0"/>
+                </a:rPr>
+                <a:t>FAIL</a:t>
+              </a:r>
+              <a:endParaRPr lang="en-US" altLang="zh-CN" sz="1200" b="1">
+                <a:latin typeface="Times New Roman" panose="02020603050405020304" charset="0"/>
+                <a:cs typeface="Times New Roman" panose="02020603050405020304" charset="0"/>
+              </a:endParaRPr>
+            </a:p>
+          </p:txBody>
+        </p:sp>
+        <p:grpSp>
+          <p:nvGrpSpPr>
+            <p:cNvPr id="63" name="组合 62"/>
+            <p:cNvGrpSpPr/>
+            <p:nvPr/>
+          </p:nvGrpSpPr>
+          <p:grpSpPr>
+            <a:xfrm>
+              <a:off x="3327" y="9910"/>
+              <a:ext cx="13032" cy="2122"/>
+              <a:chOff x="3327" y="11029"/>
+              <a:chExt cx="13032" cy="2122"/>
+            </a:xfrm>
+          </p:grpSpPr>
+          <p:sp>
+            <p:nvSpPr>
+              <p:cNvPr id="53" name="矩形 52"/>
+              <p:cNvSpPr/>
+              <p:nvPr/>
+            </p:nvSpPr>
+            <p:spPr>
+              <a:xfrm>
+                <a:off x="3327" y="11029"/>
+                <a:ext cx="13032" cy="2122"/>
+              </a:xfrm>
+              <a:prstGeom prst="rect">
+                <a:avLst/>
+              </a:prstGeom>
+              <a:solidFill>
+                <a:schemeClr val="bg1"/>
+              </a:solidFill>
+              <a:ln>
+                <a:solidFill>
+                  <a:schemeClr val="tx1"/>
+                </a:solidFill>
               </a:ln>
             </p:spPr>
             <p:style>
               <a:lnRef idx="2">
+                <a:schemeClr val="accent1">
+                  <a:lumMod val="75000"/>
+                </a:schemeClr>
+              </a:lnRef>
+              <a:fillRef idx="1">
                 <a:schemeClr val="accent1"/>
-              </a:lnRef>
-              <a:fillRef idx="0">
-                <a:srgbClr val="FFFFFF"/>
               </a:fillRef>
               <a:effectRef idx="0">
                 <a:srgbClr val="FFFFFF"/>
               </a:effectRef>
               <a:fontRef idx="minor">
-                <a:schemeClr val="tx1"/>
+                <a:schemeClr val="lt1"/>
               </a:fontRef>
             </p:style>
-          </p:cxnSp>
+            <p:txBody>
+              <a:bodyPr rtlCol="0" anchor="ctr"/>
+              <a:p>
+                <a:pPr algn="ctr"/>
+                <a:r>
+                  <a:rPr lang="en-US" altLang="zh-CN" sz="1500" b="1">
+                    <a:solidFill>
+                      <a:schemeClr val="tx1"/>
+                    </a:solidFill>
+                    <a:latin typeface="Times New Roman" panose="02020603050405020304" charset="0"/>
+                    <a:ea typeface="微软雅黑" panose="020B0503020204020204" charset="-122"/>
+                    <a:sym typeface="+mn-ea"/>
+                  </a:rPr>
+                  <a:t>Quality Reviewer Agent</a:t>
+                </a:r>
+                <a:r>
+                  <a:rPr lang="zh-CN" altLang="en-US" sz="1500">
+                    <a:solidFill>
+                      <a:schemeClr val="tx1"/>
+                    </a:solidFill>
+                    <a:latin typeface="Times New Roman" panose="02020603050405020304" charset="0"/>
+                    <a:ea typeface="微软雅黑" panose="020B0503020204020204" charset="-122"/>
+                    <a:sym typeface="+mn-ea"/>
+                  </a:rPr>
+                  <a:t>：</a:t>
+                </a:r>
+                <a:endParaRPr lang="zh-CN" altLang="en-US" sz="1500">
+                  <a:solidFill>
+                    <a:schemeClr val="tx1"/>
+                  </a:solidFill>
+                  <a:latin typeface="Times New Roman" panose="02020603050405020304" charset="0"/>
+                  <a:ea typeface="微软雅黑" panose="020B0503020204020204" charset="-122"/>
+                  <a:sym typeface="+mn-ea"/>
+                </a:endParaRPr>
+              </a:p>
+              <a:p>
+                <a:pPr algn="ctr"/>
+                <a:endParaRPr lang="zh-CN" altLang="en-US" sz="1500">
+                  <a:solidFill>
+                    <a:schemeClr val="tx1"/>
+                  </a:solidFill>
+                  <a:latin typeface="Times New Roman" panose="02020603050405020304" charset="0"/>
+                  <a:ea typeface="微软雅黑" panose="020B0503020204020204" charset="-122"/>
+                  <a:sym typeface="+mn-ea"/>
+                </a:endParaRPr>
+              </a:p>
+              <a:p>
+                <a:pPr algn="ctr"/>
+                <a:endParaRPr lang="zh-CN" altLang="en-US" sz="1500">
+                  <a:solidFill>
+                    <a:schemeClr val="tx1"/>
+                  </a:solidFill>
+                  <a:latin typeface="Times New Roman" panose="02020603050405020304" charset="0"/>
+                  <a:ea typeface="微软雅黑" panose="020B0503020204020204" charset="-122"/>
+                  <a:sym typeface="+mn-ea"/>
+                </a:endParaRPr>
+              </a:p>
+              <a:p>
+                <a:pPr algn="ctr"/>
+                <a:endParaRPr lang="en-US" altLang="zh-CN" sz="1500" b="1">
+                  <a:solidFill>
+                    <a:schemeClr val="tx1"/>
+                  </a:solidFill>
+                  <a:latin typeface="Times New Roman" panose="02020603050405020304" charset="0"/>
+                  <a:ea typeface="微软雅黑" panose="020B0503020204020204" charset="-122"/>
+                </a:endParaRPr>
+              </a:p>
+              <a:p>
+                <a:pPr algn="ctr"/>
+                <a:endParaRPr lang="en-US" altLang="zh-CN" sz="1500" b="1">
+                  <a:solidFill>
+                    <a:schemeClr val="tx1"/>
+                  </a:solidFill>
+                  <a:latin typeface="Times New Roman" panose="02020603050405020304" charset="0"/>
+                  <a:ea typeface="微软雅黑" panose="020B0503020204020204" charset="-122"/>
+                </a:endParaRPr>
+              </a:p>
+            </p:txBody>
+          </p:sp>
+          <p:grpSp>
+            <p:nvGrpSpPr>
+              <p:cNvPr id="62" name="组合 61"/>
+              <p:cNvGrpSpPr/>
+              <p:nvPr/>
+            </p:nvGrpSpPr>
+            <p:grpSpPr>
+              <a:xfrm>
+                <a:off x="3843" y="11712"/>
+                <a:ext cx="12000" cy="1160"/>
+                <a:chOff x="3843" y="11712"/>
+                <a:chExt cx="12000" cy="1160"/>
+              </a:xfrm>
+            </p:grpSpPr>
+            <p:sp>
+              <p:nvSpPr>
+                <p:cNvPr id="55" name="矩形 54"/>
+                <p:cNvSpPr/>
+                <p:nvPr/>
+              </p:nvSpPr>
+              <p:spPr>
+                <a:xfrm>
+                  <a:off x="3843" y="11712"/>
+                  <a:ext cx="5669" cy="1161"/>
+                </a:xfrm>
+                <a:prstGeom prst="rect">
+                  <a:avLst/>
+                </a:prstGeom>
+                <a:solidFill>
+                  <a:schemeClr val="bg1"/>
+                </a:solidFill>
+                <a:ln>
+                  <a:solidFill>
+                    <a:schemeClr val="tx1"/>
+                  </a:solidFill>
+                </a:ln>
+              </p:spPr>
+              <p:style>
+                <a:lnRef idx="2">
+                  <a:schemeClr val="accent1">
+                    <a:lumMod val="75000"/>
+                  </a:schemeClr>
+                </a:lnRef>
+                <a:fillRef idx="1">
+                  <a:schemeClr val="accent1"/>
+                </a:fillRef>
+                <a:effectRef idx="0">
+                  <a:srgbClr val="FFFFFF"/>
+                </a:effectRef>
+                <a:fontRef idx="minor">
+                  <a:schemeClr val="lt1"/>
+                </a:fontRef>
+              </p:style>
+              <p:txBody>
+                <a:bodyPr rtlCol="0" anchor="ctr"/>
+                <a:p>
+                  <a:pPr algn="ctr"/>
+                  <a:r>
+                    <a:rPr lang="en-US" altLang="zh-CN" sz="1500" b="1">
+                      <a:solidFill>
+                        <a:schemeClr val="tx1"/>
+                      </a:solidFill>
+                      <a:latin typeface="Times New Roman" panose="02020603050405020304" charset="0"/>
+                      <a:ea typeface="微软雅黑" panose="020B0503020204020204" charset="-122"/>
+                    </a:rPr>
+                    <a:t>Quality Guard</a:t>
+                  </a:r>
+                  <a:r>
+                    <a:rPr lang="zh-CN" altLang="en-US" sz="1500">
+                      <a:solidFill>
+                        <a:schemeClr val="tx1"/>
+                      </a:solidFill>
+                      <a:latin typeface="Times New Roman" panose="02020603050405020304" charset="0"/>
+                      <a:ea typeface="微软雅黑" panose="020B0503020204020204" charset="-122"/>
+                    </a:rPr>
+                    <a:t>：</a:t>
+                  </a:r>
+                  <a:endParaRPr lang="zh-CN" altLang="en-US" sz="1500">
+                    <a:solidFill>
+                      <a:schemeClr val="tx1"/>
+                    </a:solidFill>
+                    <a:latin typeface="Times New Roman" panose="02020603050405020304" charset="0"/>
+                    <a:ea typeface="微软雅黑" panose="020B0503020204020204" charset="-122"/>
+                  </a:endParaRPr>
+                </a:p>
+                <a:p>
+                  <a:pPr algn="ctr"/>
+                  <a:r>
+                    <a:rPr lang="zh-CN" altLang="en-US" sz="1500">
+                      <a:solidFill>
+                        <a:schemeClr val="tx1"/>
+                      </a:solidFill>
+                      <a:latin typeface="Times New Roman" panose="02020603050405020304" charset="0"/>
+                      <a:ea typeface="微软雅黑" panose="020B0503020204020204" charset="-122"/>
+                    </a:rPr>
+                    <a:t>进行规则质量检查</a:t>
+                  </a:r>
+                  <a:endParaRPr lang="zh-CN" altLang="en-US" sz="1500">
+                    <a:solidFill>
+                      <a:schemeClr val="tx1"/>
+                    </a:solidFill>
+                    <a:latin typeface="Times New Roman" panose="02020603050405020304" charset="0"/>
+                    <a:ea typeface="微软雅黑" panose="020B0503020204020204" charset="-122"/>
+                  </a:endParaRPr>
+                </a:p>
+              </p:txBody>
+            </p:sp>
+            <p:sp>
+              <p:nvSpPr>
+                <p:cNvPr id="56" name="矩形 55"/>
+                <p:cNvSpPr/>
+                <p:nvPr/>
+              </p:nvSpPr>
+              <p:spPr>
+                <a:xfrm>
+                  <a:off x="10175" y="11712"/>
+                  <a:ext cx="5669" cy="1161"/>
+                </a:xfrm>
+                <a:prstGeom prst="rect">
+                  <a:avLst/>
+                </a:prstGeom>
+                <a:solidFill>
+                  <a:schemeClr val="bg1"/>
+                </a:solidFill>
+                <a:ln>
+                  <a:solidFill>
+                    <a:schemeClr val="tx1"/>
+                  </a:solidFill>
+                </a:ln>
+              </p:spPr>
+              <p:style>
+                <a:lnRef idx="2">
+                  <a:schemeClr val="accent1">
+                    <a:lumMod val="75000"/>
+                  </a:schemeClr>
+                </a:lnRef>
+                <a:fillRef idx="1">
+                  <a:schemeClr val="accent1"/>
+                </a:fillRef>
+                <a:effectRef idx="0">
+                  <a:srgbClr val="FFFFFF"/>
+                </a:effectRef>
+                <a:fontRef idx="minor">
+                  <a:schemeClr val="lt1"/>
+                </a:fontRef>
+              </p:style>
+              <p:txBody>
+                <a:bodyPr rtlCol="0" anchor="ctr"/>
+                <a:p>
+                  <a:pPr algn="ctr"/>
+                  <a:r>
+                    <a:rPr lang="en-US" altLang="zh-CN" sz="1500" b="1">
+                      <a:solidFill>
+                        <a:schemeClr val="tx1"/>
+                      </a:solidFill>
+                      <a:latin typeface="Times New Roman" panose="02020603050405020304" charset="0"/>
+                      <a:ea typeface="微软雅黑" panose="020B0503020204020204" charset="-122"/>
+                    </a:rPr>
+                    <a:t>LLM Quality Reviewer</a:t>
+                  </a:r>
+                  <a:r>
+                    <a:rPr lang="zh-CN" altLang="en-US" sz="1500">
+                      <a:solidFill>
+                        <a:schemeClr val="tx1"/>
+                      </a:solidFill>
+                      <a:latin typeface="Times New Roman" panose="02020603050405020304" charset="0"/>
+                      <a:ea typeface="微软雅黑" panose="020B0503020204020204" charset="-122"/>
+                    </a:rPr>
+                    <a:t>：</a:t>
+                  </a:r>
+                  <a:endParaRPr lang="zh-CN" altLang="en-US" sz="1500">
+                    <a:solidFill>
+                      <a:schemeClr val="tx1"/>
+                    </a:solidFill>
+                    <a:latin typeface="Times New Roman" panose="02020603050405020304" charset="0"/>
+                    <a:ea typeface="微软雅黑" panose="020B0503020204020204" charset="-122"/>
+                  </a:endParaRPr>
+                </a:p>
+                <a:p>
+                  <a:pPr algn="ctr"/>
+                  <a:r>
+                    <a:rPr lang="zh-CN" altLang="en-US" sz="1500">
+                      <a:solidFill>
+                        <a:schemeClr val="tx1"/>
+                      </a:solidFill>
+                      <a:latin typeface="Times New Roman" panose="02020603050405020304" charset="0"/>
+                      <a:ea typeface="微软雅黑" panose="020B0503020204020204" charset="-122"/>
+                    </a:rPr>
+                    <a:t>进行语义复审</a:t>
+                  </a:r>
+                  <a:endParaRPr lang="zh-CN" altLang="en-US" sz="1500">
+                    <a:solidFill>
+                      <a:schemeClr val="tx1"/>
+                    </a:solidFill>
+                    <a:latin typeface="Times New Roman" panose="02020603050405020304" charset="0"/>
+                    <a:ea typeface="微软雅黑" panose="020B0503020204020204" charset="-122"/>
+                  </a:endParaRPr>
+                </a:p>
+              </p:txBody>
+            </p:sp>
+            <p:cxnSp>
+              <p:nvCxnSpPr>
+                <p:cNvPr id="61" name="直接箭头连接符 60"/>
+                <p:cNvCxnSpPr>
+                  <a:stCxn id="55" idx="3"/>
+                  <a:endCxn id="56" idx="1"/>
+                </p:cNvCxnSpPr>
+                <p:nvPr/>
+              </p:nvCxnSpPr>
+              <p:spPr>
+                <a:xfrm>
+                  <a:off x="9512" y="12293"/>
+                  <a:ext cx="663" cy="0"/>
+                </a:xfrm>
+                <a:prstGeom prst="straightConnector1">
+                  <a:avLst/>
+                </a:prstGeom>
+                <a:ln w="19050">
+                  <a:solidFill>
+                    <a:schemeClr val="tx1"/>
+                  </a:solidFill>
+                  <a:tailEnd type="triangle"/>
+                </a:ln>
+              </p:spPr>
+              <p:style>
+                <a:lnRef idx="2">
+                  <a:schemeClr val="accent1"/>
+                </a:lnRef>
+                <a:fillRef idx="0">
+                  <a:srgbClr val="FFFFFF"/>
+                </a:fillRef>
+                <a:effectRef idx="0">
+                  <a:srgbClr val="FFFFFF"/>
+                </a:effectRef>
+                <a:fontRef idx="minor">
+                  <a:schemeClr val="tx1"/>
+                </a:fontRef>
+              </p:style>
+            </p:cxnSp>
+          </p:grpSp>
         </p:grpSp>
-      </p:grpSp>
-      <p:sp>
-        <p:nvSpPr>
-          <p:cNvPr id="75" name="流程图: 磁盘 74"/>
-          <p:cNvSpPr/>
-          <p:nvPr/>
-        </p:nvSpPr>
-        <p:spPr>
-          <a:xfrm>
-            <a:off x="9007475" y="3531870"/>
-            <a:ext cx="1233805" cy="671830"/>
-          </a:xfrm>
-          <a:prstGeom prst="flowChartMagneticDisk">
-            <a:avLst/>
-          </a:prstGeom>
-          <a:solidFill>
-            <a:schemeClr val="bg1"/>
-          </a:solidFill>
-          <a:ln>
+        <p:sp>
+          <p:nvSpPr>
+            <p:cNvPr id="75" name="流程图: 磁盘 74"/>
+            <p:cNvSpPr/>
+            <p:nvPr/>
+          </p:nvSpPr>
+          <p:spPr>
+            <a:xfrm>
+              <a:off x="14185" y="5562"/>
+              <a:ext cx="1943" cy="1058"/>
+            </a:xfrm>
+            <a:prstGeom prst="flowChartMagneticDisk">
+              <a:avLst/>
+            </a:prstGeom>
             <a:solidFill>
-              <a:schemeClr val="tx1"/>
+              <a:schemeClr val="bg1"/>
             </a:solidFill>
-          </a:ln>
-        </p:spPr>
-        <p:style>
-          <a:lnRef idx="2">
-            <a:schemeClr val="accent1">
-              <a:lumMod val="75000"/>
-            </a:schemeClr>
-          </a:lnRef>
-          <a:fillRef idx="1">
-            <a:schemeClr val="accent1"/>
-          </a:fillRef>
-          <a:effectRef idx="0">
-            <a:srgbClr val="FFFFFF"/>
-          </a:effectRef>
-          <a:fontRef idx="minor">
-            <a:schemeClr val="lt1"/>
-          </a:fontRef>
-        </p:style>
-        <p:txBody>
-          <a:bodyPr rtlCol="0" anchor="ctr"/>
-          <a:p>
-            <a:pPr algn="ctr"/>
-            <a:r>
-              <a:rPr lang="zh-CN" altLang="en-US" sz="1500" b="1">
+            <a:ln>
+              <a:solidFill>
+                <a:schemeClr val="tx1"/>
+              </a:solidFill>
+            </a:ln>
+          </p:spPr>
+          <p:style>
+            <a:lnRef idx="2">
+              <a:schemeClr val="accent1">
+                <a:lumMod val="75000"/>
+              </a:schemeClr>
+            </a:lnRef>
+            <a:fillRef idx="1">
+              <a:schemeClr val="accent1"/>
+            </a:fillRef>
+            <a:effectRef idx="0">
+              <a:srgbClr val="FFFFFF"/>
+            </a:effectRef>
+            <a:fontRef idx="minor">
+              <a:schemeClr val="lt1"/>
+            </a:fontRef>
+          </p:style>
+          <p:txBody>
+            <a:bodyPr rtlCol="0" anchor="ctr"/>
+            <a:p>
+              <a:pPr algn="ctr"/>
+              <a:r>
+                <a:rPr lang="zh-CN" altLang="en-US" sz="1500" b="1">
+                  <a:solidFill>
+                    <a:schemeClr val="tx1"/>
+                  </a:solidFill>
+                  <a:latin typeface="微软雅黑" panose="020B0503020204020204" charset="-122"/>
+                  <a:ea typeface="微软雅黑" panose="020B0503020204020204" charset="-122"/>
+                </a:rPr>
+                <a:t>知识库</a:t>
+              </a:r>
+              <a:endParaRPr lang="zh-CN" altLang="en-US" sz="1500" b="1">
                 <a:solidFill>
                   <a:schemeClr val="tx1"/>
                 </a:solidFill>
                 <a:latin typeface="微软雅黑" panose="020B0503020204020204" charset="-122"/>
                 <a:ea typeface="微软雅黑" panose="020B0503020204020204" charset="-122"/>
-              </a:rPr>
-              <a:t>知识库</a:t>
-            </a:r>
-            <a:endParaRPr lang="zh-CN" altLang="en-US" sz="1500" b="1">
+              </a:endParaRPr>
+            </a:p>
+          </p:txBody>
+        </p:sp>
+        <p:cxnSp>
+          <p:nvCxnSpPr>
+            <p:cNvPr id="76" name="直接箭头连接符 75"/>
+            <p:cNvCxnSpPr>
+              <a:stCxn id="75" idx="2"/>
+              <a:endCxn id="30" idx="3"/>
+            </p:cNvCxnSpPr>
+            <p:nvPr/>
+          </p:nvCxnSpPr>
+          <p:spPr>
+            <a:xfrm flipH="1">
+              <a:off x="12677" y="6091"/>
+              <a:ext cx="1508" cy="0"/>
+            </a:xfrm>
+            <a:prstGeom prst="straightConnector1">
+              <a:avLst/>
+            </a:prstGeom>
+            <a:ln w="19050">
               <a:solidFill>
                 <a:schemeClr val="tx1"/>
               </a:solidFill>
-              <a:latin typeface="微软雅黑" panose="020B0503020204020204" charset="-122"/>
-              <a:ea typeface="微软雅黑" panose="020B0503020204020204" charset="-122"/>
-            </a:endParaRPr>
-          </a:p>
-        </p:txBody>
-      </p:sp>
-      <p:cxnSp>
-        <p:nvCxnSpPr>
-          <p:cNvPr id="76" name="直接箭头连接符 75"/>
-          <p:cNvCxnSpPr>
-            <a:stCxn id="75" idx="2"/>
-            <a:endCxn id="30" idx="3"/>
-          </p:cNvCxnSpPr>
-          <p:nvPr/>
-        </p:nvCxnSpPr>
-        <p:spPr>
-          <a:xfrm flipH="1">
-            <a:off x="8049895" y="3867785"/>
-            <a:ext cx="957580" cy="0"/>
-          </a:xfrm>
-          <a:prstGeom prst="straightConnector1">
-            <a:avLst/>
-          </a:prstGeom>
-          <a:ln w="19050">
-            <a:solidFill>
+              <a:headEnd type="triangle"/>
+              <a:tailEnd type="triangle"/>
+            </a:ln>
+          </p:spPr>
+          <p:style>
+            <a:lnRef idx="2">
+              <a:schemeClr val="accent1"/>
+            </a:lnRef>
+            <a:fillRef idx="0">
+              <a:srgbClr val="FFFFFF"/>
+            </a:fillRef>
+            <a:effectRef idx="0">
+              <a:srgbClr val="FFFFFF"/>
+            </a:effectRef>
+            <a:fontRef idx="minor">
               <a:schemeClr val="tx1"/>
-            </a:solidFill>
-            <a:headEnd type="triangle"/>
-            <a:tailEnd type="triangle"/>
-          </a:ln>
-        </p:spPr>
-        <p:style>
-          <a:lnRef idx="2">
-            <a:schemeClr val="accent1"/>
-          </a:lnRef>
-          <a:fillRef idx="0">
-            <a:srgbClr val="FFFFFF"/>
-          </a:fillRef>
-          <a:effectRef idx="0">
-            <a:srgbClr val="FFFFFF"/>
-          </a:effectRef>
-          <a:fontRef idx="minor">
-            <a:schemeClr val="tx1"/>
-          </a:fontRef>
-        </p:style>
-      </p:cxnSp>
-      <p:cxnSp>
-        <p:nvCxnSpPr>
-          <p:cNvPr id="80" name="肘形连接符 79"/>
-          <p:cNvCxnSpPr>
-            <a:stCxn id="56" idx="3"/>
-            <a:endCxn id="78" idx="2"/>
-          </p:cNvCxnSpPr>
-          <p:nvPr/>
-        </p:nvCxnSpPr>
-        <p:spPr>
-          <a:xfrm flipV="1">
-            <a:off x="10060305" y="6785610"/>
-            <a:ext cx="1508760" cy="309880"/>
-          </a:xfrm>
-          <a:prstGeom prst="bentConnector2">
-            <a:avLst/>
-          </a:prstGeom>
-          <a:ln w="19050">
-            <a:solidFill>
+            </a:fontRef>
+          </p:style>
+        </p:cxnSp>
+        <p:cxnSp>
+          <p:nvCxnSpPr>
+            <p:cNvPr id="80" name="肘形连接符 79"/>
+            <p:cNvCxnSpPr>
+              <a:stCxn id="56" idx="3"/>
+              <a:endCxn id="78" idx="2"/>
+            </p:cNvCxnSpPr>
+            <p:nvPr/>
+          </p:nvCxnSpPr>
+          <p:spPr>
+            <a:xfrm flipV="1">
+              <a:off x="15843" y="10686"/>
+              <a:ext cx="2376" cy="488"/>
+            </a:xfrm>
+            <a:prstGeom prst="bentConnector2">
+              <a:avLst/>
+            </a:prstGeom>
+            <a:ln w="19050">
+              <a:solidFill>
+                <a:schemeClr val="tx1"/>
+              </a:solidFill>
+              <a:tailEnd type="triangle"/>
+            </a:ln>
+          </p:spPr>
+          <p:style>
+            <a:lnRef idx="2">
+              <a:schemeClr val="accent1"/>
+            </a:lnRef>
+            <a:fillRef idx="0">
+              <a:srgbClr val="FFFFFF"/>
+            </a:fillRef>
+            <a:effectRef idx="0">
+              <a:srgbClr val="FFFFFF"/>
+            </a:effectRef>
+            <a:fontRef idx="minor">
               <a:schemeClr val="tx1"/>
-            </a:solidFill>
-            <a:tailEnd type="triangle"/>
-          </a:ln>
-        </p:spPr>
-        <p:style>
-          <a:lnRef idx="2">
-            <a:schemeClr val="accent1"/>
-          </a:lnRef>
-          <a:fillRef idx="0">
-            <a:srgbClr val="FFFFFF"/>
-          </a:fillRef>
-          <a:effectRef idx="0">
-            <a:srgbClr val="FFFFFF"/>
-          </a:effectRef>
-          <a:fontRef idx="minor">
-            <a:schemeClr val="tx1"/>
-          </a:fontRef>
-        </p:style>
-      </p:cxnSp>
-      <p:cxnSp>
-        <p:nvCxnSpPr>
-          <p:cNvPr id="81" name="肘形连接符 80"/>
-          <p:cNvCxnSpPr>
-            <a:stCxn id="77" idx="0"/>
-            <a:endCxn id="50" idx="3"/>
-          </p:cNvCxnSpPr>
-          <p:nvPr/>
-        </p:nvCxnSpPr>
-        <p:spPr>
-          <a:xfrm rot="16200000" flipV="1">
-            <a:off x="10683240" y="4664075"/>
-            <a:ext cx="263525" cy="1506855"/>
-          </a:xfrm>
-          <a:prstGeom prst="bentConnector2">
-            <a:avLst/>
-          </a:prstGeom>
-          <a:ln w="19050">
-            <a:solidFill>
+            </a:fontRef>
+          </p:style>
+        </p:cxnSp>
+        <p:cxnSp>
+          <p:nvCxnSpPr>
+            <p:cNvPr id="81" name="肘形连接符 80"/>
+            <p:cNvCxnSpPr>
+              <a:stCxn id="77" idx="0"/>
+              <a:endCxn id="50" idx="3"/>
+            </p:cNvCxnSpPr>
+            <p:nvPr/>
+          </p:nvCxnSpPr>
+          <p:spPr>
+            <a:xfrm rot="16200000" flipV="1">
+              <a:off x="16824" y="7345"/>
+              <a:ext cx="415" cy="2373"/>
+            </a:xfrm>
+            <a:prstGeom prst="bentConnector2">
+              <a:avLst/>
+            </a:prstGeom>
+            <a:ln w="19050">
+              <a:solidFill>
+                <a:schemeClr val="tx1"/>
+              </a:solidFill>
+              <a:tailEnd type="triangle"/>
+            </a:ln>
+          </p:spPr>
+          <p:style>
+            <a:lnRef idx="2">
+              <a:schemeClr val="accent1"/>
+            </a:lnRef>
+            <a:fillRef idx="0">
+              <a:srgbClr val="FFFFFF"/>
+            </a:fillRef>
+            <a:effectRef idx="0">
+              <a:srgbClr val="FFFFFF"/>
+            </a:effectRef>
+            <a:fontRef idx="minor">
               <a:schemeClr val="tx1"/>
-            </a:solidFill>
-            <a:tailEnd type="triangle"/>
-          </a:ln>
-        </p:spPr>
-        <p:style>
-          <a:lnRef idx="2">
-            <a:schemeClr val="accent1"/>
-          </a:lnRef>
-          <a:fillRef idx="0">
-            <a:srgbClr val="FFFFFF"/>
-          </a:fillRef>
-          <a:effectRef idx="0">
-            <a:srgbClr val="FFFFFF"/>
-          </a:effectRef>
-          <a:fontRef idx="minor">
-            <a:schemeClr val="tx1"/>
-          </a:fontRef>
-        </p:style>
-      </p:cxnSp>
-      <p:grpSp>
-        <p:nvGrpSpPr>
-          <p:cNvPr id="83" name="组合 82"/>
-          <p:cNvGrpSpPr/>
-          <p:nvPr/>
-        </p:nvGrpSpPr>
-        <p:grpSpPr>
-          <a:xfrm>
-            <a:off x="10782935" y="5499100"/>
-            <a:ext cx="1296035" cy="1285875"/>
-            <a:chOff x="16981" y="8660"/>
-            <a:chExt cx="2041" cy="2025"/>
-          </a:xfrm>
-        </p:grpSpPr>
-        <p:pic>
-          <p:nvPicPr>
-            <p:cNvPr id="77" name="图片 76" descr="文件"/>
-            <p:cNvPicPr>
-              <a:picLocks noChangeAspect="1"/>
-            </p:cNvPicPr>
-            <p:nvPr>
-              <p:custDataLst>
-                <p:tags r:id="rId1"/>
-              </p:custDataLst>
-            </p:nvPr>
-          </p:nvPicPr>
-          <p:blipFill>
-            <a:blip r:embed="rId2">
-              <a:extLst>
-                <a:ext uri="{96DAC541-7B7A-43D3-8B79-37D633B846F1}">
-                  <asvg:svgBlip xmlns:asvg="http://schemas.microsoft.com/office/drawing/2016/SVG/main" r:embed="rId3"/>
-                </a:ext>
-              </a:extLst>
-            </a:blip>
-            <a:stretch>
-              <a:fillRect/>
-            </a:stretch>
-          </p:blipFill>
+            </a:fontRef>
+          </p:style>
+        </p:cxnSp>
+        <p:grpSp>
+          <p:nvGrpSpPr>
+            <p:cNvPr id="83" name="组合 82"/>
+            <p:cNvGrpSpPr/>
+            <p:nvPr/>
+          </p:nvGrpSpPr>
+          <p:grpSpPr>
+            <a:xfrm>
+              <a:off x="16981" y="8660"/>
+              <a:ext cx="2041" cy="2025"/>
+              <a:chOff x="16981" y="8660"/>
+              <a:chExt cx="2041" cy="2025"/>
+            </a:xfrm>
+          </p:grpSpPr>
+          <p:pic>
+            <p:nvPicPr>
+              <p:cNvPr id="77" name="图片 76" descr="文件"/>
+              <p:cNvPicPr>
+                <a:picLocks noChangeAspect="1"/>
+              </p:cNvPicPr>
+              <p:nvPr>
+                <p:custDataLst>
+                  <p:tags r:id="rId1"/>
+                </p:custDataLst>
+              </p:nvPr>
+            </p:nvPicPr>
+            <p:blipFill>
+              <a:blip r:embed="rId2">
+                <a:extLst>
+                  <a:ext uri="{96DAC541-7B7A-43D3-8B79-37D633B846F1}">
+                    <asvg:svgBlip xmlns:asvg="http://schemas.microsoft.com/office/drawing/2016/SVG/main" r:embed="rId3"/>
+                  </a:ext>
+                </a:extLst>
+              </a:blip>
+              <a:stretch>
+                <a:fillRect/>
+              </a:stretch>
+            </p:blipFill>
+            <p:spPr>
+              <a:xfrm>
+                <a:off x="17498" y="8739"/>
+                <a:ext cx="1440" cy="1440"/>
+              </a:xfrm>
+              <a:prstGeom prst="rect">
+                <a:avLst/>
+              </a:prstGeom>
+            </p:spPr>
+          </p:pic>
+          <p:sp>
+            <p:nvSpPr>
+              <p:cNvPr id="78" name="文本框 77"/>
+              <p:cNvSpPr txBox="1"/>
+              <p:nvPr/>
+            </p:nvSpPr>
+            <p:spPr>
+              <a:xfrm>
+                <a:off x="17414" y="10179"/>
+                <a:ext cx="1609" cy="507"/>
+              </a:xfrm>
+              <a:prstGeom prst="rect">
+                <a:avLst/>
+              </a:prstGeom>
+              <a:noFill/>
+            </p:spPr>
+            <p:txBody>
+              <a:bodyPr wrap="square" rtlCol="0">
+                <a:spAutoFit/>
+              </a:bodyPr>
+              <a:p>
+                <a:pPr algn="ctr"/>
+                <a:r>
+                  <a:rPr lang="zh-CN" altLang="en-US" sz="1500" b="1"/>
+                  <a:t>记忆文件</a:t>
+                </a:r>
+                <a:endParaRPr lang="zh-CN" altLang="en-US" sz="1500" b="1"/>
+              </a:p>
+            </p:txBody>
+          </p:sp>
+          <p:sp>
+            <p:nvSpPr>
+              <p:cNvPr id="82" name="文本框 81"/>
+              <p:cNvSpPr txBox="1"/>
+              <p:nvPr/>
+            </p:nvSpPr>
+            <p:spPr>
+              <a:xfrm>
+                <a:off x="16981" y="8660"/>
+                <a:ext cx="517" cy="1598"/>
+              </a:xfrm>
+              <a:prstGeom prst="rect">
+                <a:avLst/>
+              </a:prstGeom>
+              <a:noFill/>
+            </p:spPr>
+            <p:txBody>
+              <a:bodyPr wrap="square" rtlCol="0">
+                <a:spAutoFit/>
+              </a:bodyPr>
+              <a:p>
+                <a:r>
+                  <a:rPr lang="zh-CN" altLang="en-US" sz="1500"/>
+                  <a:t>评审建议</a:t>
+                </a:r>
+                <a:endParaRPr lang="zh-CN" altLang="en-US" sz="1500"/>
+              </a:p>
+            </p:txBody>
+          </p:sp>
+        </p:grpSp>
+        <p:sp>
+          <p:nvSpPr>
+            <p:cNvPr id="84" name="矩形 83"/>
+            <p:cNvSpPr/>
+            <p:nvPr/>
+          </p:nvSpPr>
           <p:spPr>
             <a:xfrm>
-              <a:off x="17498" y="8739"/>
-              <a:ext cx="1440" cy="1440"/>
+              <a:off x="19849" y="263"/>
+              <a:ext cx="1094" cy="7921"/>
             </a:xfrm>
             <a:prstGeom prst="rect">
               <a:avLst/>
             </a:prstGeom>
+            <a:solidFill>
+              <a:schemeClr val="bg1"/>
+            </a:solidFill>
+            <a:ln>
+              <a:solidFill>
+                <a:schemeClr val="tx1"/>
+              </a:solidFill>
+            </a:ln>
           </p:spPr>
-        </p:pic>
+          <p:style>
+            <a:lnRef idx="2">
+              <a:schemeClr val="accent1">
+                <a:lumMod val="75000"/>
+              </a:schemeClr>
+            </a:lnRef>
+            <a:fillRef idx="1">
+              <a:schemeClr val="accent1"/>
+            </a:fillRef>
+            <a:effectRef idx="0">
+              <a:srgbClr val="FFFFFF"/>
+            </a:effectRef>
+            <a:fontRef idx="minor">
+              <a:schemeClr val="lt1"/>
+            </a:fontRef>
+          </p:style>
+          <p:txBody>
+            <a:bodyPr rtlCol="0" anchor="ctr"/>
+            <a:p>
+              <a:pPr algn="ctr"/>
+              <a:r>
+                <a:rPr lang="en-US" altLang="zh-CN" sz="1500" b="1">
+                  <a:solidFill>
+                    <a:schemeClr val="tx1"/>
+                  </a:solidFill>
+                  <a:latin typeface="Times New Roman" panose="02020603050405020304" charset="0"/>
+                  <a:cs typeface="Times New Roman" panose="02020603050405020304" charset="0"/>
+                </a:rPr>
+                <a:t>Redis</a:t>
+              </a:r>
+              <a:endParaRPr lang="en-US" altLang="zh-CN" sz="1500" b="1">
+                <a:solidFill>
+                  <a:schemeClr val="tx1"/>
+                </a:solidFill>
+                <a:latin typeface="Times New Roman" panose="02020603050405020304" charset="0"/>
+                <a:cs typeface="Times New Roman" panose="02020603050405020304" charset="0"/>
+              </a:endParaRPr>
+            </a:p>
+          </p:txBody>
+        </p:sp>
+        <p:cxnSp>
+          <p:nvCxnSpPr>
+            <p:cNvPr id="85" name="直接箭头连接符 84"/>
+            <p:cNvCxnSpPr>
+              <a:endCxn id="14" idx="3"/>
+            </p:cNvCxnSpPr>
+            <p:nvPr/>
+          </p:nvCxnSpPr>
+          <p:spPr>
+            <a:xfrm flipH="1" flipV="1">
+              <a:off x="12677" y="3263"/>
+              <a:ext cx="7158" cy="0"/>
+            </a:xfrm>
+            <a:prstGeom prst="straightConnector1">
+              <a:avLst/>
+            </a:prstGeom>
+            <a:ln w="19050">
+              <a:solidFill>
+                <a:schemeClr val="tx1"/>
+              </a:solidFill>
+              <a:headEnd type="triangle"/>
+              <a:tailEnd type="triangle"/>
+            </a:ln>
+          </p:spPr>
+          <p:style>
+            <a:lnRef idx="2">
+              <a:schemeClr val="accent1"/>
+            </a:lnRef>
+            <a:fillRef idx="0">
+              <a:srgbClr val="FFFFFF"/>
+            </a:fillRef>
+            <a:effectRef idx="0">
+              <a:srgbClr val="FFFFFF"/>
+            </a:effectRef>
+            <a:fontRef idx="minor">
+              <a:schemeClr val="tx1"/>
+            </a:fontRef>
+          </p:style>
+        </p:cxnSp>
         <p:sp>
           <p:nvSpPr>
-            <p:cNvPr id="78" name="文本框 77"/>
+            <p:cNvPr id="86" name="文本框 85"/>
             <p:cNvSpPr txBox="1"/>
             <p:nvPr/>
           </p:nvSpPr>
           <p:spPr>
             <a:xfrm>
-              <a:off x="17414" y="10179"/>
-              <a:ext cx="1609" cy="507"/>
+              <a:off x="15660" y="3046"/>
+              <a:ext cx="1556" cy="434"/>
             </a:xfrm>
             <a:prstGeom prst="rect">
               <a:avLst/>
             </a:prstGeom>
-            <a:noFill/>
+            <a:solidFill>
+              <a:schemeClr val="bg1"/>
+            </a:solidFill>
           </p:spPr>
           <p:txBody>
             <a:bodyPr wrap="square" rtlCol="0">
@@ -7402,39 +7580,208 @@
             <a:p>
               <a:pPr algn="ctr"/>
               <a:r>
-                <a:rPr lang="zh-CN" altLang="en-US" sz="1500" b="1"/>
-                <a:t>记忆文件</a:t>
+                <a:rPr lang="zh-CN" altLang="en-US" sz="1200" b="1">
+                  <a:solidFill>
+                    <a:schemeClr val="tx1"/>
+                  </a:solidFill>
+                  <a:latin typeface="Times New Roman" panose="02020603050405020304" charset="0"/>
+                  <a:cs typeface="Times New Roman" panose="02020603050405020304" charset="0"/>
+                </a:rPr>
+                <a:t>指标</a:t>
               </a:r>
-              <a:endParaRPr lang="zh-CN" altLang="en-US" sz="1500" b="1"/>
+              <a:r>
+                <a:rPr lang="zh-CN" altLang="en-US" sz="1200" b="1">
+                  <a:solidFill>
+                    <a:schemeClr val="tx1"/>
+                  </a:solidFill>
+                  <a:latin typeface="Times New Roman" panose="02020603050405020304" charset="0"/>
+                  <a:cs typeface="Times New Roman" panose="02020603050405020304" charset="0"/>
+                </a:rPr>
+                <a:t>缓存</a:t>
+              </a:r>
+              <a:endParaRPr lang="zh-CN" altLang="en-US" sz="1200" b="1">
+                <a:solidFill>
+                  <a:schemeClr val="tx1"/>
+                </a:solidFill>
+                <a:latin typeface="Times New Roman" panose="02020603050405020304" charset="0"/>
+                <a:cs typeface="Times New Roman" panose="02020603050405020304" charset="0"/>
+              </a:endParaRPr>
             </a:p>
           </p:txBody>
         </p:sp>
+        <p:cxnSp>
+          <p:nvCxnSpPr>
+            <p:cNvPr id="87" name="直接箭头连接符 86"/>
+            <p:cNvCxnSpPr>
+              <a:endCxn id="35" idx="3"/>
+            </p:cNvCxnSpPr>
+            <p:nvPr/>
+          </p:nvCxnSpPr>
+          <p:spPr>
+            <a:xfrm flipH="1">
+              <a:off x="16360" y="8056"/>
+              <a:ext cx="3474" cy="0"/>
+            </a:xfrm>
+            <a:prstGeom prst="straightConnector1">
+              <a:avLst/>
+            </a:prstGeom>
+            <a:ln w="19050">
+              <a:solidFill>
+                <a:schemeClr val="tx1"/>
+              </a:solidFill>
+              <a:headEnd type="triangle"/>
+              <a:tailEnd type="triangle"/>
+            </a:ln>
+          </p:spPr>
+          <p:style>
+            <a:lnRef idx="2">
+              <a:schemeClr val="accent1"/>
+            </a:lnRef>
+            <a:fillRef idx="0">
+              <a:srgbClr val="FFFFFF"/>
+            </a:fillRef>
+            <a:effectRef idx="0">
+              <a:srgbClr val="FFFFFF"/>
+            </a:effectRef>
+            <a:fontRef idx="minor">
+              <a:schemeClr val="tx1"/>
+            </a:fontRef>
+          </p:style>
+        </p:cxnSp>
         <p:sp>
           <p:nvSpPr>
-            <p:cNvPr id="82" name="文本框 81"/>
+            <p:cNvPr id="88" name="文本框 87"/>
             <p:cNvSpPr txBox="1"/>
             <p:nvPr/>
           </p:nvSpPr>
           <p:spPr>
             <a:xfrm>
-              <a:off x="16981" y="8660"/>
-              <a:ext cx="517" cy="1598"/>
+              <a:off x="17454" y="7824"/>
+              <a:ext cx="1457" cy="434"/>
             </a:xfrm>
             <a:prstGeom prst="rect">
               <a:avLst/>
             </a:prstGeom>
-            <a:noFill/>
+            <a:solidFill>
+              <a:schemeClr val="bg1"/>
+            </a:solidFill>
           </p:spPr>
           <p:txBody>
             <a:bodyPr wrap="square" rtlCol="0">
               <a:spAutoFit/>
             </a:bodyPr>
             <a:p>
+              <a:pPr algn="ctr"/>
               <a:r>
-                <a:rPr lang="zh-CN" altLang="en-US" sz="1500"/>
-                <a:t>评审建议</a:t>
+                <a:rPr lang="zh-CN" altLang="en-US" sz="1200" b="1">
+                  <a:solidFill>
+                    <a:schemeClr val="tx1"/>
+                  </a:solidFill>
+                  <a:latin typeface="Times New Roman" panose="02020603050405020304" charset="0"/>
+                  <a:cs typeface="Times New Roman" panose="02020603050405020304" charset="0"/>
+                </a:rPr>
+                <a:t>历史报告</a:t>
               </a:r>
-              <a:endParaRPr lang="zh-CN" altLang="en-US" sz="1500"/>
+              <a:endParaRPr lang="zh-CN" altLang="en-US" sz="1200" b="1">
+                <a:solidFill>
+                  <a:schemeClr val="tx1"/>
+                </a:solidFill>
+                <a:latin typeface="Times New Roman" panose="02020603050405020304" charset="0"/>
+                <a:cs typeface="Times New Roman" panose="02020603050405020304" charset="0"/>
+              </a:endParaRPr>
+            </a:p>
+          </p:txBody>
+        </p:sp>
+        <p:cxnSp>
+          <p:nvCxnSpPr>
+            <p:cNvPr id="89" name="直接箭头连接符 88"/>
+            <p:cNvCxnSpPr>
+              <a:endCxn id="2" idx="3"/>
+            </p:cNvCxnSpPr>
+            <p:nvPr/>
+          </p:nvCxnSpPr>
+          <p:spPr>
+            <a:xfrm flipH="1" flipV="1">
+              <a:off x="12677" y="435"/>
+              <a:ext cx="7148" cy="0"/>
+            </a:xfrm>
+            <a:prstGeom prst="straightConnector1">
+              <a:avLst/>
+            </a:prstGeom>
+            <a:ln w="19050">
+              <a:solidFill>
+                <a:schemeClr val="tx1"/>
+              </a:solidFill>
+              <a:headEnd type="triangle"/>
+              <a:tailEnd type="triangle"/>
+            </a:ln>
+          </p:spPr>
+          <p:style>
+            <a:lnRef idx="2">
+              <a:schemeClr val="accent1"/>
+            </a:lnRef>
+            <a:fillRef idx="0">
+              <a:srgbClr val="FFFFFF"/>
+            </a:fillRef>
+            <a:effectRef idx="0">
+              <a:srgbClr val="FFFFFF"/>
+            </a:effectRef>
+            <a:fontRef idx="minor">
+              <a:schemeClr val="tx1"/>
+            </a:fontRef>
+          </p:style>
+        </p:cxnSp>
+        <p:sp>
+          <p:nvSpPr>
+            <p:cNvPr id="90" name="文本框 89"/>
+            <p:cNvSpPr txBox="1"/>
+            <p:nvPr/>
+          </p:nvSpPr>
+          <p:spPr>
+            <a:xfrm>
+              <a:off x="15404" y="209"/>
+              <a:ext cx="2069" cy="434"/>
+            </a:xfrm>
+            <a:prstGeom prst="rect">
+              <a:avLst/>
+            </a:prstGeom>
+            <a:solidFill>
+              <a:schemeClr val="bg1"/>
+            </a:solidFill>
+          </p:spPr>
+          <p:txBody>
+            <a:bodyPr wrap="square" rtlCol="0">
+              <a:spAutoFit/>
+            </a:bodyPr>
+            <a:p>
+              <a:pPr algn="ctr"/>
+              <a:r>
+                <a:rPr lang="zh-CN" altLang="en-US" sz="1200" b="1">
+                  <a:solidFill>
+                    <a:schemeClr val="tx1"/>
+                  </a:solidFill>
+                  <a:latin typeface="Times New Roman" panose="02020603050405020304" charset="0"/>
+                  <a:cs typeface="Times New Roman" panose="02020603050405020304" charset="0"/>
+                </a:rPr>
+                <a:t>仓库信息</a:t>
+              </a:r>
+              <a:r>
+                <a:rPr lang="zh-CN" altLang="en-US" sz="1200" b="1">
+                  <a:solidFill>
+                    <a:schemeClr val="tx1"/>
+                  </a:solidFill>
+                  <a:latin typeface="Times New Roman" panose="02020603050405020304" charset="0"/>
+                  <a:cs typeface="Times New Roman" panose="02020603050405020304" charset="0"/>
+                </a:rPr>
+                <a:t>缓存</a:t>
+              </a:r>
+              <a:endParaRPr lang="zh-CN" altLang="en-US" sz="1200" b="1">
+                <a:solidFill>
+                  <a:schemeClr val="tx1"/>
+                </a:solidFill>
+                <a:latin typeface="Times New Roman" panose="02020603050405020304" charset="0"/>
+                <a:cs typeface="Times New Roman" panose="02020603050405020304" charset="0"/>
+              </a:endParaRPr>
             </a:p>
           </p:txBody>
         </p:sp>

--- a/pictures/pic.pptx
+++ b/pictures/pic.pptx
@@ -7,11 +7,12 @@
   <p:sldIdLst>
     <p:sldId id="256" r:id="rId3"/>
     <p:sldId id="257" r:id="rId4"/>
+    <p:sldId id="258" r:id="rId5"/>
   </p:sldIdLst>
   <p:sldSz cx="12192000" cy="6858000"/>
   <p:notesSz cx="6858000" cy="9144000"/>
   <p:custDataLst>
-    <p:tags r:id="rId8"/>
+    <p:tags r:id="rId9"/>
   </p:custDataLst>
   <p:defaultTextStyle>
     <a:defPPr>
@@ -111,12 +112,12 @@
   <p:extLst>
     <p:ext uri="{EFAFB233-063F-42B5-8137-9DF3F51BA10A}">
       <p15:sldGuideLst xmlns:p15="http://schemas.microsoft.com/office/powerpoint/2012/main">
-        <p15:guide id="1" orient="horz" pos="2153" userDrawn="1">
+        <p15:guide id="1" orient="horz" pos="2160" userDrawn="1">
           <p15:clr>
             <a:srgbClr val="A4A3A4"/>
           </p15:clr>
         </p15:guide>
-        <p15:guide id="2" pos="3805" userDrawn="1">
+        <p15:guide id="2" pos="3854" userDrawn="1">
           <p15:clr>
             <a:srgbClr val="A4A3A4"/>
           </p15:clr>
@@ -7794,6 +7795,2440 @@
 </p:sld>
 </file>
 
+<file path=ppt/slides/slide3.xml><?xml version="1.0" encoding="utf-8"?>
+<p:sld xmlns:a="http://schemas.openxmlformats.org/drawingml/2006/main" xmlns:r="http://schemas.openxmlformats.org/officeDocument/2006/relationships" xmlns:p="http://schemas.openxmlformats.org/presentationml/2006/main">
+  <p:cSld>
+    <p:spTree>
+      <p:nvGrpSpPr>
+        <p:cNvPr id="1" name=""/>
+        <p:cNvGrpSpPr/>
+        <p:nvPr/>
+      </p:nvGrpSpPr>
+      <p:grpSpPr/>
+      <p:grpSp>
+        <p:nvGrpSpPr>
+          <p:cNvPr id="87" name="组合 86"/>
+          <p:cNvGrpSpPr/>
+          <p:nvPr/>
+        </p:nvGrpSpPr>
+        <p:grpSpPr>
+          <a:xfrm>
+            <a:off x="-2298700" y="1397000"/>
+            <a:ext cx="17999710" cy="5180330"/>
+            <a:chOff x="-3620" y="2200"/>
+            <a:chExt cx="28346" cy="8158"/>
+          </a:xfrm>
+        </p:grpSpPr>
+        <p:cxnSp>
+          <p:nvCxnSpPr>
+            <p:cNvPr id="2" name="直接连接符 1"/>
+            <p:cNvCxnSpPr/>
+            <p:nvPr/>
+          </p:nvCxnSpPr>
+          <p:spPr>
+            <a:xfrm flipV="1">
+              <a:off x="-3620" y="5400"/>
+              <a:ext cx="28346" cy="0"/>
+            </a:xfrm>
+            <a:prstGeom prst="line">
+              <a:avLst/>
+            </a:prstGeom>
+            <a:ln w="19050" cmpd="sng">
+              <a:solidFill>
+                <a:schemeClr val="tx1"/>
+              </a:solidFill>
+              <a:prstDash val="solid"/>
+            </a:ln>
+          </p:spPr>
+          <p:style>
+            <a:lnRef idx="2">
+              <a:schemeClr val="accent1"/>
+            </a:lnRef>
+            <a:fillRef idx="0">
+              <a:srgbClr val="FFFFFF"/>
+            </a:fillRef>
+            <a:effectRef idx="0">
+              <a:srgbClr val="FFFFFF"/>
+            </a:effectRef>
+            <a:fontRef idx="minor">
+              <a:schemeClr val="tx1"/>
+            </a:fontRef>
+          </p:style>
+        </p:cxnSp>
+        <p:sp>
+          <p:nvSpPr>
+            <p:cNvPr id="3" name="矩形 2"/>
+            <p:cNvSpPr/>
+            <p:nvPr/>
+          </p:nvSpPr>
+          <p:spPr>
+            <a:xfrm>
+              <a:off x="1458" y="3844"/>
+              <a:ext cx="3225" cy="1263"/>
+            </a:xfrm>
+            <a:prstGeom prst="rect">
+              <a:avLst/>
+            </a:prstGeom>
+            <a:noFill/>
+            <a:ln>
+              <a:solidFill>
+                <a:schemeClr val="tx1"/>
+              </a:solidFill>
+            </a:ln>
+          </p:spPr>
+          <p:style>
+            <a:lnRef idx="2">
+              <a:schemeClr val="accent1">
+                <a:lumMod val="75000"/>
+              </a:schemeClr>
+            </a:lnRef>
+            <a:fillRef idx="1">
+              <a:schemeClr val="accent1"/>
+            </a:fillRef>
+            <a:effectRef idx="0">
+              <a:srgbClr val="FFFFFF"/>
+            </a:effectRef>
+            <a:fontRef idx="minor">
+              <a:schemeClr val="lt1"/>
+            </a:fontRef>
+          </p:style>
+          <p:txBody>
+            <a:bodyPr rtlCol="0" anchor="ctr"/>
+            <a:p>
+              <a:pPr algn="ctr"/>
+              <a:r>
+                <a:rPr lang="en-US" altLang="zh-CN" sz="1500" b="1">
+                  <a:solidFill>
+                    <a:schemeClr val="tx1"/>
+                  </a:solidFill>
+                  <a:latin typeface="Times New Roman" panose="02020603050405020304" charset="0"/>
+                  <a:ea typeface="微软雅黑" panose="020B0503020204020204" charset="-122"/>
+                </a:rPr>
+                <a:t>Document Loader</a:t>
+              </a:r>
+              <a:r>
+                <a:rPr lang="zh-CN" altLang="en-US" sz="1500">
+                  <a:solidFill>
+                    <a:schemeClr val="tx1"/>
+                  </a:solidFill>
+                  <a:latin typeface="Times New Roman" panose="02020603050405020304" charset="0"/>
+                  <a:ea typeface="微软雅黑" panose="020B0503020204020204" charset="-122"/>
+                </a:rPr>
+                <a:t>：</a:t>
+              </a:r>
+              <a:endParaRPr lang="zh-CN" altLang="en-US" sz="1500">
+                <a:solidFill>
+                  <a:schemeClr val="tx1"/>
+                </a:solidFill>
+                <a:latin typeface="Times New Roman" panose="02020603050405020304" charset="0"/>
+                <a:ea typeface="微软雅黑" panose="020B0503020204020204" charset="-122"/>
+              </a:endParaRPr>
+            </a:p>
+            <a:p>
+              <a:pPr algn="ctr"/>
+              <a:r>
+                <a:rPr lang="zh-CN" altLang="en-US" sz="1500">
+                  <a:solidFill>
+                    <a:schemeClr val="tx1"/>
+                  </a:solidFill>
+                  <a:latin typeface="Times New Roman" panose="02020603050405020304" charset="0"/>
+                  <a:ea typeface="微软雅黑" panose="020B0503020204020204" charset="-122"/>
+                </a:rPr>
+                <a:t>读取知识库中</a:t>
+              </a:r>
+              <a:r>
+                <a:rPr lang="zh-CN" altLang="en-US" sz="1500">
+                  <a:solidFill>
+                    <a:schemeClr val="tx1"/>
+                  </a:solidFill>
+                  <a:latin typeface="Times New Roman" panose="02020603050405020304" charset="0"/>
+                  <a:ea typeface="微软雅黑" panose="020B0503020204020204" charset="-122"/>
+                </a:rPr>
+                <a:t>的文件</a:t>
+              </a:r>
+              <a:endParaRPr lang="zh-CN" altLang="en-US" sz="1500">
+                <a:solidFill>
+                  <a:schemeClr val="tx1"/>
+                </a:solidFill>
+                <a:latin typeface="Times New Roman" panose="02020603050405020304" charset="0"/>
+                <a:ea typeface="微软雅黑" panose="020B0503020204020204" charset="-122"/>
+              </a:endParaRPr>
+            </a:p>
+          </p:txBody>
+        </p:sp>
+        <p:sp>
+          <p:nvSpPr>
+            <p:cNvPr id="6" name="矩形 5"/>
+            <p:cNvSpPr/>
+            <p:nvPr/>
+          </p:nvSpPr>
+          <p:spPr>
+            <a:xfrm>
+              <a:off x="5547" y="3844"/>
+              <a:ext cx="3225" cy="1263"/>
+            </a:xfrm>
+            <a:prstGeom prst="rect">
+              <a:avLst/>
+            </a:prstGeom>
+            <a:noFill/>
+            <a:ln>
+              <a:solidFill>
+                <a:schemeClr val="tx1"/>
+              </a:solidFill>
+            </a:ln>
+          </p:spPr>
+          <p:style>
+            <a:lnRef idx="2">
+              <a:schemeClr val="accent1">
+                <a:lumMod val="75000"/>
+              </a:schemeClr>
+            </a:lnRef>
+            <a:fillRef idx="1">
+              <a:schemeClr val="accent1"/>
+            </a:fillRef>
+            <a:effectRef idx="0">
+              <a:srgbClr val="FFFFFF"/>
+            </a:effectRef>
+            <a:fontRef idx="minor">
+              <a:schemeClr val="lt1"/>
+            </a:fontRef>
+          </p:style>
+          <p:txBody>
+            <a:bodyPr rtlCol="0" anchor="ctr"/>
+            <a:p>
+              <a:pPr algn="ctr"/>
+              <a:r>
+                <a:rPr lang="en-US" altLang="zh-CN" sz="1500" b="1">
+                  <a:solidFill>
+                    <a:schemeClr val="tx1"/>
+                  </a:solidFill>
+                  <a:latin typeface="Times New Roman" panose="02020603050405020304" charset="0"/>
+                  <a:ea typeface="微软雅黑" panose="020B0503020204020204" charset="-122"/>
+                </a:rPr>
+                <a:t>Document Splitter</a:t>
+              </a:r>
+              <a:r>
+                <a:rPr lang="zh-CN" altLang="en-US" sz="1500">
+                  <a:solidFill>
+                    <a:schemeClr val="tx1"/>
+                  </a:solidFill>
+                  <a:latin typeface="Times New Roman" panose="02020603050405020304" charset="0"/>
+                  <a:ea typeface="微软雅黑" panose="020B0503020204020204" charset="-122"/>
+                </a:rPr>
+                <a:t>：</a:t>
+              </a:r>
+              <a:endParaRPr lang="zh-CN" altLang="en-US" sz="1500">
+                <a:solidFill>
+                  <a:schemeClr val="tx1"/>
+                </a:solidFill>
+                <a:latin typeface="Times New Roman" panose="02020603050405020304" charset="0"/>
+                <a:ea typeface="微软雅黑" panose="020B0503020204020204" charset="-122"/>
+              </a:endParaRPr>
+            </a:p>
+            <a:p>
+              <a:pPr algn="ctr"/>
+              <a:r>
+                <a:rPr lang="zh-CN" altLang="en-US" sz="1500">
+                  <a:solidFill>
+                    <a:schemeClr val="tx1"/>
+                  </a:solidFill>
+                  <a:latin typeface="Times New Roman" panose="02020603050405020304" charset="0"/>
+                  <a:ea typeface="微软雅黑" panose="020B0503020204020204" charset="-122"/>
+                </a:rPr>
+                <a:t>文本</a:t>
+              </a:r>
+              <a:r>
+                <a:rPr lang="zh-CN" altLang="en-US" sz="1500">
+                  <a:solidFill>
+                    <a:schemeClr val="tx1"/>
+                  </a:solidFill>
+                  <a:latin typeface="Times New Roman" panose="02020603050405020304" charset="0"/>
+                  <a:ea typeface="微软雅黑" panose="020B0503020204020204" charset="-122"/>
+                </a:rPr>
+                <a:t>分块</a:t>
+              </a:r>
+              <a:endParaRPr lang="zh-CN" altLang="en-US" sz="1500">
+                <a:solidFill>
+                  <a:schemeClr val="tx1"/>
+                </a:solidFill>
+                <a:latin typeface="Times New Roman" panose="02020603050405020304" charset="0"/>
+                <a:ea typeface="微软雅黑" panose="020B0503020204020204" charset="-122"/>
+              </a:endParaRPr>
+            </a:p>
+          </p:txBody>
+        </p:sp>
+        <p:sp>
+          <p:nvSpPr>
+            <p:cNvPr id="14" name="矩形 13"/>
+            <p:cNvSpPr/>
+            <p:nvPr/>
+          </p:nvSpPr>
+          <p:spPr>
+            <a:xfrm>
+              <a:off x="9636" y="3844"/>
+              <a:ext cx="3225" cy="1263"/>
+            </a:xfrm>
+            <a:prstGeom prst="rect">
+              <a:avLst/>
+            </a:prstGeom>
+            <a:noFill/>
+            <a:ln>
+              <a:solidFill>
+                <a:schemeClr val="tx1"/>
+              </a:solidFill>
+            </a:ln>
+          </p:spPr>
+          <p:style>
+            <a:lnRef idx="2">
+              <a:schemeClr val="accent1">
+                <a:lumMod val="75000"/>
+              </a:schemeClr>
+            </a:lnRef>
+            <a:fillRef idx="1">
+              <a:schemeClr val="accent1"/>
+            </a:fillRef>
+            <a:effectRef idx="0">
+              <a:srgbClr val="FFFFFF"/>
+            </a:effectRef>
+            <a:fontRef idx="minor">
+              <a:schemeClr val="lt1"/>
+            </a:fontRef>
+          </p:style>
+          <p:txBody>
+            <a:bodyPr rtlCol="0" anchor="ctr"/>
+            <a:p>
+              <a:pPr algn="ctr"/>
+              <a:r>
+                <a:rPr lang="en-US" altLang="zh-CN" sz="1500" b="1">
+                  <a:solidFill>
+                    <a:schemeClr val="tx1"/>
+                  </a:solidFill>
+                  <a:latin typeface="Times New Roman" panose="02020603050405020304" charset="0"/>
+                  <a:ea typeface="微软雅黑" panose="020B0503020204020204" charset="-122"/>
+                </a:rPr>
+                <a:t>Chunk Builder</a:t>
+              </a:r>
+              <a:r>
+                <a:rPr lang="zh-CN" altLang="en-US" sz="1500">
+                  <a:solidFill>
+                    <a:schemeClr val="tx1"/>
+                  </a:solidFill>
+                  <a:latin typeface="Times New Roman" panose="02020603050405020304" charset="0"/>
+                  <a:ea typeface="微软雅黑" panose="020B0503020204020204" charset="-122"/>
+                </a:rPr>
+                <a:t>：</a:t>
+              </a:r>
+              <a:endParaRPr lang="zh-CN" altLang="en-US" sz="1500">
+                <a:solidFill>
+                  <a:schemeClr val="tx1"/>
+                </a:solidFill>
+                <a:latin typeface="Times New Roman" panose="02020603050405020304" charset="0"/>
+                <a:ea typeface="微软雅黑" panose="020B0503020204020204" charset="-122"/>
+              </a:endParaRPr>
+            </a:p>
+            <a:p>
+              <a:pPr algn="ctr"/>
+              <a:r>
+                <a:rPr lang="zh-CN" altLang="en-US" sz="1500">
+                  <a:solidFill>
+                    <a:schemeClr val="tx1"/>
+                  </a:solidFill>
+                  <a:latin typeface="Times New Roman" panose="02020603050405020304" charset="0"/>
+                  <a:ea typeface="微软雅黑" panose="020B0503020204020204" charset="-122"/>
+                </a:rPr>
+                <a:t>把文本</a:t>
+              </a:r>
+              <a:r>
+                <a:rPr lang="zh-CN" altLang="en-US" sz="1500">
+                  <a:solidFill>
+                    <a:schemeClr val="tx1"/>
+                  </a:solidFill>
+                  <a:latin typeface="Times New Roman" panose="02020603050405020304" charset="0"/>
+                  <a:ea typeface="微软雅黑" panose="020B0503020204020204" charset="-122"/>
+                </a:rPr>
+                <a:t>变成 </a:t>
+              </a:r>
+              <a:r>
+                <a:rPr lang="en-US" altLang="zh-CN" sz="1500">
+                  <a:solidFill>
+                    <a:schemeClr val="tx1"/>
+                  </a:solidFill>
+                  <a:latin typeface="Times New Roman" panose="02020603050405020304" charset="0"/>
+                  <a:ea typeface="微软雅黑" panose="020B0503020204020204" charset="-122"/>
+                </a:rPr>
+                <a:t>RAG </a:t>
+              </a:r>
+              <a:endParaRPr lang="en-US" altLang="zh-CN" sz="1500">
+                <a:solidFill>
+                  <a:schemeClr val="tx1"/>
+                </a:solidFill>
+                <a:latin typeface="Times New Roman" panose="02020603050405020304" charset="0"/>
+                <a:ea typeface="微软雅黑" panose="020B0503020204020204" charset="-122"/>
+              </a:endParaRPr>
+            </a:p>
+            <a:p>
+              <a:pPr algn="ctr"/>
+              <a:r>
+                <a:rPr lang="zh-CN" altLang="en-US" sz="1500">
+                  <a:solidFill>
+                    <a:schemeClr val="tx1"/>
+                  </a:solidFill>
+                  <a:latin typeface="Times New Roman" panose="02020603050405020304" charset="0"/>
+                  <a:ea typeface="微软雅黑" panose="020B0503020204020204" charset="-122"/>
+                </a:rPr>
+                <a:t>标准 </a:t>
+              </a:r>
+              <a:r>
+                <a:rPr lang="en-US" altLang="zh-CN" sz="1500">
+                  <a:solidFill>
+                    <a:schemeClr val="tx1"/>
+                  </a:solidFill>
+                  <a:latin typeface="Times New Roman" panose="02020603050405020304" charset="0"/>
+                  <a:ea typeface="微软雅黑" panose="020B0503020204020204" charset="-122"/>
+                </a:rPr>
+                <a:t>Chunk</a:t>
+              </a:r>
+              <a:endParaRPr lang="en-US" altLang="zh-CN" sz="1500">
+                <a:solidFill>
+                  <a:schemeClr val="tx1"/>
+                </a:solidFill>
+                <a:latin typeface="Times New Roman" panose="02020603050405020304" charset="0"/>
+                <a:ea typeface="微软雅黑" panose="020B0503020204020204" charset="-122"/>
+              </a:endParaRPr>
+            </a:p>
+          </p:txBody>
+        </p:sp>
+        <p:sp>
+          <p:nvSpPr>
+            <p:cNvPr id="26" name="矩形 25"/>
+            <p:cNvSpPr/>
+            <p:nvPr/>
+          </p:nvSpPr>
+          <p:spPr>
+            <a:xfrm>
+              <a:off x="13725" y="3844"/>
+              <a:ext cx="3225" cy="1263"/>
+            </a:xfrm>
+            <a:prstGeom prst="rect">
+              <a:avLst/>
+            </a:prstGeom>
+            <a:noFill/>
+            <a:ln>
+              <a:solidFill>
+                <a:schemeClr val="tx1"/>
+              </a:solidFill>
+            </a:ln>
+          </p:spPr>
+          <p:style>
+            <a:lnRef idx="2">
+              <a:schemeClr val="accent1">
+                <a:lumMod val="75000"/>
+              </a:schemeClr>
+            </a:lnRef>
+            <a:fillRef idx="1">
+              <a:schemeClr val="accent1"/>
+            </a:fillRef>
+            <a:effectRef idx="0">
+              <a:srgbClr val="FFFFFF"/>
+            </a:effectRef>
+            <a:fontRef idx="minor">
+              <a:schemeClr val="lt1"/>
+            </a:fontRef>
+          </p:style>
+          <p:txBody>
+            <a:bodyPr rtlCol="0" anchor="ctr"/>
+            <a:p>
+              <a:pPr algn="ctr"/>
+              <a:r>
+                <a:rPr lang="en-US" altLang="zh-CN" sz="1500" b="1">
+                  <a:solidFill>
+                    <a:schemeClr val="tx1"/>
+                  </a:solidFill>
+                  <a:latin typeface="Times New Roman" panose="02020603050405020304" charset="0"/>
+                  <a:ea typeface="微软雅黑" panose="020B0503020204020204" charset="-122"/>
+                </a:rPr>
+                <a:t>Embedding Service</a:t>
+              </a:r>
+              <a:r>
+                <a:rPr lang="zh-CN" altLang="en-US" sz="1500">
+                  <a:solidFill>
+                    <a:schemeClr val="tx1"/>
+                  </a:solidFill>
+                  <a:latin typeface="Times New Roman" panose="02020603050405020304" charset="0"/>
+                  <a:ea typeface="微软雅黑" panose="020B0503020204020204" charset="-122"/>
+                </a:rPr>
+                <a:t>：</a:t>
+              </a:r>
+              <a:endParaRPr lang="zh-CN" altLang="en-US" sz="1500">
+                <a:solidFill>
+                  <a:schemeClr val="tx1"/>
+                </a:solidFill>
+                <a:latin typeface="Times New Roman" panose="02020603050405020304" charset="0"/>
+                <a:ea typeface="微软雅黑" panose="020B0503020204020204" charset="-122"/>
+              </a:endParaRPr>
+            </a:p>
+            <a:p>
+              <a:pPr algn="ctr"/>
+              <a:r>
+                <a:rPr lang="zh-CN" altLang="en-US" sz="1500">
+                  <a:solidFill>
+                    <a:schemeClr val="tx1"/>
+                  </a:solidFill>
+                  <a:latin typeface="Times New Roman" panose="02020603050405020304" charset="0"/>
+                  <a:ea typeface="微软雅黑" panose="020B0503020204020204" charset="-122"/>
+                </a:rPr>
+                <a:t>将文本块变成</a:t>
+              </a:r>
+              <a:r>
+                <a:rPr lang="zh-CN" altLang="en-US" sz="1500">
+                  <a:solidFill>
+                    <a:schemeClr val="tx1"/>
+                  </a:solidFill>
+                  <a:latin typeface="Times New Roman" panose="02020603050405020304" charset="0"/>
+                  <a:ea typeface="微软雅黑" panose="020B0503020204020204" charset="-122"/>
+                </a:rPr>
+                <a:t>向量</a:t>
+              </a:r>
+              <a:endParaRPr lang="zh-CN" altLang="en-US" sz="1500">
+                <a:solidFill>
+                  <a:schemeClr val="tx1"/>
+                </a:solidFill>
+                <a:latin typeface="Times New Roman" panose="02020603050405020304" charset="0"/>
+                <a:ea typeface="微软雅黑" panose="020B0503020204020204" charset="-122"/>
+              </a:endParaRPr>
+            </a:p>
+          </p:txBody>
+        </p:sp>
+        <p:sp>
+          <p:nvSpPr>
+            <p:cNvPr id="27" name="矩形 26"/>
+            <p:cNvSpPr/>
+            <p:nvPr/>
+          </p:nvSpPr>
+          <p:spPr>
+            <a:xfrm>
+              <a:off x="17815" y="3844"/>
+              <a:ext cx="3225" cy="1263"/>
+            </a:xfrm>
+            <a:prstGeom prst="rect">
+              <a:avLst/>
+            </a:prstGeom>
+            <a:noFill/>
+            <a:ln>
+              <a:solidFill>
+                <a:schemeClr val="tx1"/>
+              </a:solidFill>
+            </a:ln>
+          </p:spPr>
+          <p:style>
+            <a:lnRef idx="2">
+              <a:schemeClr val="accent1">
+                <a:lumMod val="75000"/>
+              </a:schemeClr>
+            </a:lnRef>
+            <a:fillRef idx="1">
+              <a:schemeClr val="accent1"/>
+            </a:fillRef>
+            <a:effectRef idx="0">
+              <a:srgbClr val="FFFFFF"/>
+            </a:effectRef>
+            <a:fontRef idx="minor">
+              <a:schemeClr val="lt1"/>
+            </a:fontRef>
+          </p:style>
+          <p:txBody>
+            <a:bodyPr rtlCol="0" anchor="ctr"/>
+            <a:p>
+              <a:pPr algn="ctr"/>
+              <a:r>
+                <a:rPr lang="en-US" altLang="zh-CN" sz="1500" b="1">
+                  <a:solidFill>
+                    <a:schemeClr val="tx1"/>
+                  </a:solidFill>
+                  <a:latin typeface="Times New Roman" panose="02020603050405020304" charset="0"/>
+                  <a:ea typeface="微软雅黑" panose="020B0503020204020204" charset="-122"/>
+                </a:rPr>
+                <a:t>Vector Store</a:t>
+              </a:r>
+              <a:r>
+                <a:rPr lang="zh-CN" altLang="en-US" sz="1500">
+                  <a:solidFill>
+                    <a:schemeClr val="tx1"/>
+                  </a:solidFill>
+                  <a:latin typeface="Times New Roman" panose="02020603050405020304" charset="0"/>
+                  <a:ea typeface="微软雅黑" panose="020B0503020204020204" charset="-122"/>
+                </a:rPr>
+                <a:t>：</a:t>
+              </a:r>
+              <a:endParaRPr lang="zh-CN" altLang="en-US" sz="1500">
+                <a:solidFill>
+                  <a:schemeClr val="tx1"/>
+                </a:solidFill>
+                <a:latin typeface="Times New Roman" panose="02020603050405020304" charset="0"/>
+                <a:ea typeface="微软雅黑" panose="020B0503020204020204" charset="-122"/>
+              </a:endParaRPr>
+            </a:p>
+            <a:p>
+              <a:pPr algn="ctr"/>
+              <a:r>
+                <a:rPr lang="zh-CN" altLang="en-US" sz="1500">
+                  <a:solidFill>
+                    <a:schemeClr val="tx1"/>
+                  </a:solidFill>
+                  <a:latin typeface="Times New Roman" panose="02020603050405020304" charset="0"/>
+                  <a:ea typeface="微软雅黑" panose="020B0503020204020204" charset="-122"/>
+                </a:rPr>
+                <a:t>把</a:t>
+              </a:r>
+              <a:r>
+                <a:rPr lang="en-US" altLang="zh-CN" sz="1500">
+                  <a:solidFill>
+                    <a:schemeClr val="tx1"/>
+                  </a:solidFill>
+                  <a:latin typeface="Times New Roman" panose="02020603050405020304" charset="0"/>
+                  <a:ea typeface="微软雅黑" panose="020B0503020204020204" charset="-122"/>
+                </a:rPr>
+                <a:t> Chunk </a:t>
+              </a:r>
+              <a:r>
+                <a:rPr lang="zh-CN" altLang="en-US" sz="1500">
+                  <a:solidFill>
+                    <a:schemeClr val="tx1"/>
+                  </a:solidFill>
+                  <a:latin typeface="Times New Roman" panose="02020603050405020304" charset="0"/>
+                  <a:ea typeface="微软雅黑" panose="020B0503020204020204" charset="-122"/>
+                </a:rPr>
+                <a:t>写入</a:t>
+              </a:r>
+              <a:r>
+                <a:rPr lang="zh-CN" altLang="en-US" sz="1500">
+                  <a:solidFill>
+                    <a:schemeClr val="tx1"/>
+                  </a:solidFill>
+                  <a:latin typeface="Times New Roman" panose="02020603050405020304" charset="0"/>
+                  <a:ea typeface="微软雅黑" panose="020B0503020204020204" charset="-122"/>
+                </a:rPr>
+                <a:t>向量库</a:t>
+              </a:r>
+              <a:endParaRPr lang="zh-CN" altLang="en-US" sz="1500">
+                <a:solidFill>
+                  <a:schemeClr val="tx1"/>
+                </a:solidFill>
+                <a:latin typeface="Times New Roman" panose="02020603050405020304" charset="0"/>
+                <a:ea typeface="微软雅黑" panose="020B0503020204020204" charset="-122"/>
+              </a:endParaRPr>
+            </a:p>
+          </p:txBody>
+        </p:sp>
+        <p:sp>
+          <p:nvSpPr>
+            <p:cNvPr id="28" name="矩形 27"/>
+            <p:cNvSpPr/>
+            <p:nvPr/>
+          </p:nvSpPr>
+          <p:spPr>
+            <a:xfrm>
+              <a:off x="-2631" y="3844"/>
+              <a:ext cx="3225" cy="1263"/>
+            </a:xfrm>
+            <a:prstGeom prst="rect">
+              <a:avLst/>
+            </a:prstGeom>
+            <a:noFill/>
+            <a:ln>
+              <a:solidFill>
+                <a:schemeClr val="tx1"/>
+              </a:solidFill>
+            </a:ln>
+          </p:spPr>
+          <p:style>
+            <a:lnRef idx="2">
+              <a:schemeClr val="accent1">
+                <a:lumMod val="75000"/>
+              </a:schemeClr>
+            </a:lnRef>
+            <a:fillRef idx="1">
+              <a:schemeClr val="accent1"/>
+            </a:fillRef>
+            <a:effectRef idx="0">
+              <a:srgbClr val="FFFFFF"/>
+            </a:effectRef>
+            <a:fontRef idx="minor">
+              <a:schemeClr val="lt1"/>
+            </a:fontRef>
+          </p:style>
+          <p:txBody>
+            <a:bodyPr rtlCol="0" anchor="ctr"/>
+            <a:p>
+              <a:pPr algn="ctr"/>
+              <a:r>
+                <a:rPr lang="en-US" altLang="zh-CN" sz="1500" b="1">
+                  <a:solidFill>
+                    <a:schemeClr val="tx1"/>
+                  </a:solidFill>
+                  <a:latin typeface="Times New Roman" panose="02020603050405020304" charset="0"/>
+                  <a:ea typeface="微软雅黑" panose="020B0503020204020204" charset="-122"/>
+                </a:rPr>
+                <a:t>Index Service</a:t>
+              </a:r>
+              <a:r>
+                <a:rPr lang="zh-CN" altLang="en-US" sz="1500">
+                  <a:solidFill>
+                    <a:schemeClr val="tx1"/>
+                  </a:solidFill>
+                  <a:latin typeface="Times New Roman" panose="02020603050405020304" charset="0"/>
+                  <a:ea typeface="微软雅黑" panose="020B0503020204020204" charset="-122"/>
+                </a:rPr>
+                <a:t>：</a:t>
+              </a:r>
+              <a:endParaRPr lang="zh-CN" altLang="en-US" sz="1500">
+                <a:solidFill>
+                  <a:schemeClr val="tx1"/>
+                </a:solidFill>
+                <a:latin typeface="Times New Roman" panose="02020603050405020304" charset="0"/>
+                <a:ea typeface="微软雅黑" panose="020B0503020204020204" charset="-122"/>
+              </a:endParaRPr>
+            </a:p>
+            <a:p>
+              <a:pPr algn="ctr"/>
+              <a:r>
+                <a:rPr lang="zh-CN" altLang="en-US" sz="1500">
+                  <a:solidFill>
+                    <a:schemeClr val="tx1"/>
+                  </a:solidFill>
+                  <a:latin typeface="Times New Roman" panose="02020603050405020304" charset="0"/>
+                  <a:ea typeface="微软雅黑" panose="020B0503020204020204" charset="-122"/>
+                </a:rPr>
+                <a:t>管理索引构建动作，</a:t>
+              </a:r>
+              <a:endParaRPr lang="zh-CN" altLang="en-US" sz="1500">
+                <a:solidFill>
+                  <a:schemeClr val="tx1"/>
+                </a:solidFill>
+                <a:latin typeface="Times New Roman" panose="02020603050405020304" charset="0"/>
+                <a:ea typeface="微软雅黑" panose="020B0503020204020204" charset="-122"/>
+              </a:endParaRPr>
+            </a:p>
+            <a:p>
+              <a:pPr algn="ctr"/>
+              <a:r>
+                <a:rPr lang="zh-CN" altLang="en-US" sz="1500">
+                  <a:solidFill>
+                    <a:schemeClr val="tx1"/>
+                  </a:solidFill>
+                  <a:latin typeface="Times New Roman" panose="02020603050405020304" charset="0"/>
+                  <a:ea typeface="微软雅黑" panose="020B0503020204020204" charset="-122"/>
+                </a:rPr>
+                <a:t>支持单文件</a:t>
+              </a:r>
+              <a:r>
+                <a:rPr lang="zh-CN" altLang="en-US" sz="1500">
+                  <a:solidFill>
+                    <a:schemeClr val="tx1"/>
+                  </a:solidFill>
+                  <a:latin typeface="Times New Roman" panose="02020603050405020304" charset="0"/>
+                  <a:ea typeface="微软雅黑" panose="020B0503020204020204" charset="-122"/>
+                </a:rPr>
+                <a:t>重索引</a:t>
+              </a:r>
+              <a:endParaRPr lang="zh-CN" altLang="en-US" sz="1500">
+                <a:solidFill>
+                  <a:schemeClr val="tx1"/>
+                </a:solidFill>
+                <a:latin typeface="Times New Roman" panose="02020603050405020304" charset="0"/>
+                <a:ea typeface="微软雅黑" panose="020B0503020204020204" charset="-122"/>
+              </a:endParaRPr>
+            </a:p>
+          </p:txBody>
+        </p:sp>
+        <p:sp>
+          <p:nvSpPr>
+            <p:cNvPr id="30" name="矩形 29"/>
+            <p:cNvSpPr/>
+            <p:nvPr/>
+          </p:nvSpPr>
+          <p:spPr>
+            <a:xfrm>
+              <a:off x="1459" y="5839"/>
+              <a:ext cx="3225" cy="1263"/>
+            </a:xfrm>
+            <a:prstGeom prst="rect">
+              <a:avLst/>
+            </a:prstGeom>
+            <a:noFill/>
+            <a:ln>
+              <a:solidFill>
+                <a:schemeClr val="tx1"/>
+              </a:solidFill>
+            </a:ln>
+          </p:spPr>
+          <p:style>
+            <a:lnRef idx="2">
+              <a:schemeClr val="accent1">
+                <a:lumMod val="75000"/>
+              </a:schemeClr>
+            </a:lnRef>
+            <a:fillRef idx="1">
+              <a:schemeClr val="accent1"/>
+            </a:fillRef>
+            <a:effectRef idx="0">
+              <a:srgbClr val="FFFFFF"/>
+            </a:effectRef>
+            <a:fontRef idx="minor">
+              <a:schemeClr val="lt1"/>
+            </a:fontRef>
+          </p:style>
+          <p:txBody>
+            <a:bodyPr rtlCol="0" anchor="ctr"/>
+            <a:p>
+              <a:pPr algn="ctr"/>
+              <a:r>
+                <a:rPr lang="en-US" altLang="zh-CN" sz="1500" b="1">
+                  <a:solidFill>
+                    <a:schemeClr val="tx1"/>
+                  </a:solidFill>
+                  <a:latin typeface="Times New Roman" panose="02020603050405020304" charset="0"/>
+                  <a:ea typeface="微软雅黑" panose="020B0503020204020204" charset="-122"/>
+                </a:rPr>
+                <a:t>RAG Service</a:t>
+              </a:r>
+              <a:r>
+                <a:rPr lang="zh-CN" altLang="en-US" sz="1500">
+                  <a:solidFill>
+                    <a:schemeClr val="tx1"/>
+                  </a:solidFill>
+                  <a:latin typeface="Times New Roman" panose="02020603050405020304" charset="0"/>
+                  <a:ea typeface="微软雅黑" panose="020B0503020204020204" charset="-122"/>
+                </a:rPr>
+                <a:t>：</a:t>
+              </a:r>
+              <a:endParaRPr lang="zh-CN" altLang="en-US" sz="1500">
+                <a:solidFill>
+                  <a:schemeClr val="tx1"/>
+                </a:solidFill>
+                <a:latin typeface="Times New Roman" panose="02020603050405020304" charset="0"/>
+                <a:ea typeface="微软雅黑" panose="020B0503020204020204" charset="-122"/>
+              </a:endParaRPr>
+            </a:p>
+            <a:p>
+              <a:pPr algn="ctr"/>
+              <a:r>
+                <a:rPr lang="zh-CN" altLang="en-US" sz="1500">
+                  <a:solidFill>
+                    <a:schemeClr val="tx1"/>
+                  </a:solidFill>
+                  <a:latin typeface="Times New Roman" panose="02020603050405020304" charset="0"/>
+                  <a:ea typeface="微软雅黑" panose="020B0503020204020204" charset="-122"/>
+                </a:rPr>
+                <a:t>在线 </a:t>
+              </a:r>
+              <a:r>
+                <a:rPr lang="en-US" altLang="zh-CN" sz="1500">
+                  <a:solidFill>
+                    <a:schemeClr val="tx1"/>
+                  </a:solidFill>
+                  <a:latin typeface="Times New Roman" panose="02020603050405020304" charset="0"/>
+                  <a:ea typeface="微软雅黑" panose="020B0503020204020204" charset="-122"/>
+                </a:rPr>
+                <a:t>RAG </a:t>
+              </a:r>
+              <a:r>
+                <a:rPr lang="zh-CN" altLang="en-US" sz="1500">
+                  <a:solidFill>
+                    <a:schemeClr val="tx1"/>
+                  </a:solidFill>
+                  <a:latin typeface="Times New Roman" panose="02020603050405020304" charset="0"/>
+                  <a:ea typeface="微软雅黑" panose="020B0503020204020204" charset="-122"/>
+                </a:rPr>
+                <a:t>检索入口</a:t>
+              </a:r>
+              <a:endParaRPr lang="zh-CN" altLang="en-US" sz="1500">
+                <a:solidFill>
+                  <a:schemeClr val="tx1"/>
+                </a:solidFill>
+                <a:latin typeface="Times New Roman" panose="02020603050405020304" charset="0"/>
+                <a:ea typeface="微软雅黑" panose="020B0503020204020204" charset="-122"/>
+              </a:endParaRPr>
+            </a:p>
+          </p:txBody>
+        </p:sp>
+        <p:sp>
+          <p:nvSpPr>
+            <p:cNvPr id="34" name="平行四边形 33"/>
+            <p:cNvSpPr/>
+            <p:nvPr/>
+          </p:nvSpPr>
+          <p:spPr>
+            <a:xfrm>
+              <a:off x="13566" y="5839"/>
+              <a:ext cx="3544" cy="1263"/>
+            </a:xfrm>
+            <a:prstGeom prst="parallelogram">
+              <a:avLst/>
+            </a:prstGeom>
+            <a:noFill/>
+            <a:ln>
+              <a:solidFill>
+                <a:schemeClr val="tx1"/>
+              </a:solidFill>
+            </a:ln>
+          </p:spPr>
+          <p:style>
+            <a:lnRef idx="2">
+              <a:schemeClr val="accent1">
+                <a:lumMod val="75000"/>
+              </a:schemeClr>
+            </a:lnRef>
+            <a:fillRef idx="1">
+              <a:schemeClr val="accent1"/>
+            </a:fillRef>
+            <a:effectRef idx="0">
+              <a:srgbClr val="FFFFFF"/>
+            </a:effectRef>
+            <a:fontRef idx="minor">
+              <a:schemeClr val="lt1"/>
+            </a:fontRef>
+          </p:style>
+          <p:txBody>
+            <a:bodyPr rtlCol="0" anchor="ctr"/>
+            <a:p>
+              <a:pPr algn="ctr"/>
+              <a:r>
+                <a:rPr lang="en-US" altLang="zh-CN" sz="1500" b="1">
+                  <a:solidFill>
+                    <a:schemeClr val="tx1"/>
+                  </a:solidFill>
+                  <a:latin typeface="Times New Roman" panose="02020603050405020304" charset="0"/>
+                  <a:ea typeface="微软雅黑" panose="020B0503020204020204" charset="-122"/>
+                  <a:sym typeface="+mn-ea"/>
+                </a:rPr>
+                <a:t>Report Generator</a:t>
+              </a:r>
+              <a:r>
+                <a:rPr lang="zh-CN" altLang="en-US" sz="1500">
+                  <a:solidFill>
+                    <a:schemeClr val="tx1"/>
+                  </a:solidFill>
+                  <a:latin typeface="Times New Roman" panose="02020603050405020304" charset="0"/>
+                  <a:ea typeface="微软雅黑" panose="020B0503020204020204" charset="-122"/>
+                </a:rPr>
+                <a:t>：</a:t>
+              </a:r>
+              <a:endParaRPr lang="zh-CN" altLang="en-US" sz="1500">
+                <a:solidFill>
+                  <a:schemeClr val="tx1"/>
+                </a:solidFill>
+                <a:latin typeface="Times New Roman" panose="02020603050405020304" charset="0"/>
+                <a:ea typeface="微软雅黑" panose="020B0503020204020204" charset="-122"/>
+              </a:endParaRPr>
+            </a:p>
+            <a:p>
+              <a:pPr algn="ctr"/>
+              <a:r>
+                <a:rPr lang="zh-CN" altLang="en-US" sz="1500">
+                  <a:solidFill>
+                    <a:schemeClr val="tx1"/>
+                  </a:solidFill>
+                  <a:latin typeface="Times New Roman" panose="02020603050405020304" charset="0"/>
+                  <a:ea typeface="微软雅黑" panose="020B0503020204020204" charset="-122"/>
+                </a:rPr>
+                <a:t>基于检索结果生成</a:t>
+              </a:r>
+              <a:endParaRPr lang="zh-CN" altLang="en-US" sz="1500">
+                <a:solidFill>
+                  <a:schemeClr val="tx1"/>
+                </a:solidFill>
+                <a:latin typeface="Times New Roman" panose="02020603050405020304" charset="0"/>
+                <a:ea typeface="微软雅黑" panose="020B0503020204020204" charset="-122"/>
+              </a:endParaRPr>
+            </a:p>
+            <a:p>
+              <a:pPr algn="ctr"/>
+              <a:r>
+                <a:rPr lang="zh-CN" altLang="en-US" sz="1500">
+                  <a:solidFill>
+                    <a:schemeClr val="tx1"/>
+                  </a:solidFill>
+                  <a:latin typeface="Times New Roman" panose="02020603050405020304" charset="0"/>
+                  <a:ea typeface="微软雅黑" panose="020B0503020204020204" charset="-122"/>
+                </a:rPr>
+                <a:t>评估报告</a:t>
+              </a:r>
+              <a:endParaRPr lang="zh-CN" altLang="en-US" sz="1500">
+                <a:solidFill>
+                  <a:schemeClr val="tx1"/>
+                </a:solidFill>
+                <a:latin typeface="Times New Roman" panose="02020603050405020304" charset="0"/>
+                <a:ea typeface="微软雅黑" panose="020B0503020204020204" charset="-122"/>
+              </a:endParaRPr>
+            </a:p>
+          </p:txBody>
+        </p:sp>
+        <p:sp>
+          <p:nvSpPr>
+            <p:cNvPr id="35" name="矩形 34"/>
+            <p:cNvSpPr/>
+            <p:nvPr/>
+          </p:nvSpPr>
+          <p:spPr>
+            <a:xfrm>
+              <a:off x="3899" y="7582"/>
+              <a:ext cx="3225" cy="1263"/>
+            </a:xfrm>
+            <a:prstGeom prst="rect">
+              <a:avLst/>
+            </a:prstGeom>
+            <a:noFill/>
+            <a:ln>
+              <a:solidFill>
+                <a:schemeClr val="tx1"/>
+              </a:solidFill>
+            </a:ln>
+          </p:spPr>
+          <p:style>
+            <a:lnRef idx="2">
+              <a:schemeClr val="accent1">
+                <a:lumMod val="75000"/>
+              </a:schemeClr>
+            </a:lnRef>
+            <a:fillRef idx="1">
+              <a:schemeClr val="accent1"/>
+            </a:fillRef>
+            <a:effectRef idx="0">
+              <a:srgbClr val="FFFFFF"/>
+            </a:effectRef>
+            <a:fontRef idx="minor">
+              <a:schemeClr val="lt1"/>
+            </a:fontRef>
+          </p:style>
+          <p:txBody>
+            <a:bodyPr rtlCol="0" anchor="ctr"/>
+            <a:p>
+              <a:pPr algn="ctr"/>
+              <a:r>
+                <a:rPr lang="en-US" altLang="zh-CN" sz="1500" b="1">
+                  <a:solidFill>
+                    <a:schemeClr val="tx1"/>
+                  </a:solidFill>
+                  <a:latin typeface="Times New Roman" panose="02020603050405020304" charset="0"/>
+                  <a:ea typeface="微软雅黑" panose="020B0503020204020204" charset="-122"/>
+                </a:rPr>
+                <a:t>BM25 Retriever</a:t>
+              </a:r>
+              <a:r>
+                <a:rPr lang="zh-CN" altLang="en-US" sz="1500">
+                  <a:solidFill>
+                    <a:schemeClr val="tx1"/>
+                  </a:solidFill>
+                  <a:latin typeface="Times New Roman" panose="02020603050405020304" charset="0"/>
+                  <a:ea typeface="微软雅黑" panose="020B0503020204020204" charset="-122"/>
+                </a:rPr>
+                <a:t>：</a:t>
+              </a:r>
+              <a:endParaRPr lang="zh-CN" altLang="en-US" sz="1500">
+                <a:solidFill>
+                  <a:schemeClr val="tx1"/>
+                </a:solidFill>
+                <a:latin typeface="Times New Roman" panose="02020603050405020304" charset="0"/>
+                <a:ea typeface="微软雅黑" panose="020B0503020204020204" charset="-122"/>
+              </a:endParaRPr>
+            </a:p>
+            <a:p>
+              <a:pPr algn="ctr"/>
+              <a:r>
+                <a:rPr lang="zh-CN" altLang="en-US" sz="1500">
+                  <a:solidFill>
+                    <a:schemeClr val="tx1"/>
+                  </a:solidFill>
+                  <a:latin typeface="Times New Roman" panose="02020603050405020304" charset="0"/>
+                  <a:ea typeface="微软雅黑" panose="020B0503020204020204" charset="-122"/>
+                </a:rPr>
+                <a:t>基于关键词</a:t>
+              </a:r>
+              <a:r>
+                <a:rPr lang="zh-CN" altLang="en-US" sz="1500">
+                  <a:solidFill>
+                    <a:schemeClr val="tx1"/>
+                  </a:solidFill>
+                  <a:latin typeface="Times New Roman" panose="02020603050405020304" charset="0"/>
+                  <a:ea typeface="微软雅黑" panose="020B0503020204020204" charset="-122"/>
+                </a:rPr>
+                <a:t>进行检索</a:t>
+              </a:r>
+              <a:endParaRPr lang="zh-CN" altLang="en-US" sz="1500">
+                <a:solidFill>
+                  <a:schemeClr val="tx1"/>
+                </a:solidFill>
+                <a:latin typeface="Times New Roman" panose="02020603050405020304" charset="0"/>
+                <a:ea typeface="微软雅黑" panose="020B0503020204020204" charset="-122"/>
+              </a:endParaRPr>
+            </a:p>
+          </p:txBody>
+        </p:sp>
+        <p:sp>
+          <p:nvSpPr>
+            <p:cNvPr id="42" name="矩形 41"/>
+            <p:cNvSpPr/>
+            <p:nvPr/>
+          </p:nvSpPr>
+          <p:spPr>
+            <a:xfrm>
+              <a:off x="9636" y="5839"/>
+              <a:ext cx="3225" cy="1263"/>
+            </a:xfrm>
+            <a:prstGeom prst="rect">
+              <a:avLst/>
+            </a:prstGeom>
+            <a:noFill/>
+            <a:ln>
+              <a:solidFill>
+                <a:schemeClr val="tx1"/>
+              </a:solidFill>
+            </a:ln>
+          </p:spPr>
+          <p:style>
+            <a:lnRef idx="2">
+              <a:schemeClr val="accent1">
+                <a:lumMod val="75000"/>
+              </a:schemeClr>
+            </a:lnRef>
+            <a:fillRef idx="1">
+              <a:schemeClr val="accent1"/>
+            </a:fillRef>
+            <a:effectRef idx="0">
+              <a:srgbClr val="FFFFFF"/>
+            </a:effectRef>
+            <a:fontRef idx="minor">
+              <a:schemeClr val="lt1"/>
+            </a:fontRef>
+          </p:style>
+          <p:txBody>
+            <a:bodyPr rtlCol="0" anchor="ctr"/>
+            <a:p>
+              <a:pPr algn="ctr"/>
+              <a:r>
+                <a:rPr lang="en-US" altLang="zh-CN" sz="1500" b="1">
+                  <a:solidFill>
+                    <a:schemeClr val="tx1"/>
+                  </a:solidFill>
+                  <a:latin typeface="Times New Roman" panose="02020603050405020304" charset="0"/>
+                  <a:ea typeface="微软雅黑" panose="020B0503020204020204" charset="-122"/>
+                </a:rPr>
+                <a:t>Reranker</a:t>
+              </a:r>
+              <a:r>
+                <a:rPr lang="zh-CN" altLang="en-US" sz="1500">
+                  <a:solidFill>
+                    <a:schemeClr val="tx1"/>
+                  </a:solidFill>
+                  <a:latin typeface="Times New Roman" panose="02020603050405020304" charset="0"/>
+                  <a:ea typeface="微软雅黑" panose="020B0503020204020204" charset="-122"/>
+                </a:rPr>
+                <a:t>：</a:t>
+              </a:r>
+              <a:endParaRPr lang="zh-CN" altLang="en-US" sz="1500">
+                <a:solidFill>
+                  <a:schemeClr val="tx1"/>
+                </a:solidFill>
+                <a:latin typeface="Times New Roman" panose="02020603050405020304" charset="0"/>
+                <a:ea typeface="微软雅黑" panose="020B0503020204020204" charset="-122"/>
+              </a:endParaRPr>
+            </a:p>
+            <a:p>
+              <a:pPr algn="ctr"/>
+              <a:r>
+                <a:rPr lang="zh-CN" altLang="en-US" sz="1500">
+                  <a:solidFill>
+                    <a:schemeClr val="tx1"/>
+                  </a:solidFill>
+                  <a:latin typeface="Times New Roman" panose="02020603050405020304" charset="0"/>
+                  <a:ea typeface="微软雅黑" panose="020B0503020204020204" charset="-122"/>
+                </a:rPr>
+                <a:t>对候选结果重新排序</a:t>
+              </a:r>
+              <a:endParaRPr lang="zh-CN" altLang="en-US" sz="1500">
+                <a:solidFill>
+                  <a:schemeClr val="tx1"/>
+                </a:solidFill>
+                <a:latin typeface="Times New Roman" panose="02020603050405020304" charset="0"/>
+                <a:ea typeface="微软雅黑" panose="020B0503020204020204" charset="-122"/>
+              </a:endParaRPr>
+            </a:p>
+          </p:txBody>
+        </p:sp>
+        <p:sp>
+          <p:nvSpPr>
+            <p:cNvPr id="50" name="流程图: 磁盘 49"/>
+            <p:cNvSpPr/>
+            <p:nvPr/>
+          </p:nvSpPr>
+          <p:spPr>
+            <a:xfrm>
+              <a:off x="2099" y="2200"/>
+              <a:ext cx="1943" cy="1058"/>
+            </a:xfrm>
+            <a:prstGeom prst="flowChartMagneticDisk">
+              <a:avLst/>
+            </a:prstGeom>
+            <a:solidFill>
+              <a:schemeClr val="bg1"/>
+            </a:solidFill>
+            <a:ln>
+              <a:solidFill>
+                <a:schemeClr val="tx1"/>
+              </a:solidFill>
+            </a:ln>
+          </p:spPr>
+          <p:style>
+            <a:lnRef idx="2">
+              <a:schemeClr val="accent1">
+                <a:lumMod val="75000"/>
+              </a:schemeClr>
+            </a:lnRef>
+            <a:fillRef idx="1">
+              <a:schemeClr val="accent1"/>
+            </a:fillRef>
+            <a:effectRef idx="0">
+              <a:srgbClr val="FFFFFF"/>
+            </a:effectRef>
+            <a:fontRef idx="minor">
+              <a:schemeClr val="lt1"/>
+            </a:fontRef>
+          </p:style>
+          <p:txBody>
+            <a:bodyPr rtlCol="0" anchor="ctr"/>
+            <a:p>
+              <a:pPr algn="ctr"/>
+              <a:r>
+                <a:rPr lang="zh-CN" altLang="en-US" sz="1500" b="1">
+                  <a:solidFill>
+                    <a:schemeClr val="tx1"/>
+                  </a:solidFill>
+                  <a:latin typeface="微软雅黑" panose="020B0503020204020204" charset="-122"/>
+                  <a:ea typeface="微软雅黑" panose="020B0503020204020204" charset="-122"/>
+                </a:rPr>
+                <a:t>知识库</a:t>
+              </a:r>
+              <a:endParaRPr lang="zh-CN" altLang="en-US" sz="1500" b="1">
+                <a:solidFill>
+                  <a:schemeClr val="tx1"/>
+                </a:solidFill>
+                <a:latin typeface="微软雅黑" panose="020B0503020204020204" charset="-122"/>
+                <a:ea typeface="微软雅黑" panose="020B0503020204020204" charset="-122"/>
+              </a:endParaRPr>
+            </a:p>
+          </p:txBody>
+        </p:sp>
+        <p:grpSp>
+          <p:nvGrpSpPr>
+            <p:cNvPr id="56" name="组合 55"/>
+            <p:cNvGrpSpPr/>
+            <p:nvPr/>
+          </p:nvGrpSpPr>
+          <p:grpSpPr>
+            <a:xfrm rot="0">
+              <a:off x="21905" y="3338"/>
+              <a:ext cx="1944" cy="1767"/>
+              <a:chOff x="21901" y="3338"/>
+              <a:chExt cx="1944" cy="1767"/>
+            </a:xfrm>
+          </p:grpSpPr>
+          <p:pic>
+            <p:nvPicPr>
+              <p:cNvPr id="51" name="图片 50" descr="数据库"/>
+              <p:cNvPicPr>
+                <a:picLocks noChangeAspect="1"/>
+              </p:cNvPicPr>
+              <p:nvPr>
+                <p:custDataLst>
+                  <p:tags r:id="rId1"/>
+                </p:custDataLst>
+              </p:nvPr>
+            </p:nvPicPr>
+            <p:blipFill>
+              <a:blip r:embed="rId2">
+                <a:extLst>
+                  <a:ext uri="{96DAC541-7B7A-43D3-8B79-37D633B846F1}">
+                    <asvg:svgBlip xmlns:asvg="http://schemas.microsoft.com/office/drawing/2016/SVG/main" r:embed="rId3"/>
+                  </a:ext>
+                </a:extLst>
+              </a:blip>
+              <a:stretch>
+                <a:fillRect/>
+              </a:stretch>
+            </p:blipFill>
+            <p:spPr>
+              <a:xfrm>
+                <a:off x="21901" y="3845"/>
+                <a:ext cx="1945" cy="1261"/>
+              </a:xfrm>
+              <a:prstGeom prst="rect">
+                <a:avLst/>
+              </a:prstGeom>
+            </p:spPr>
+          </p:pic>
+          <p:sp>
+            <p:nvSpPr>
+              <p:cNvPr id="55" name="文本框 54"/>
+              <p:cNvSpPr txBox="1"/>
+              <p:nvPr/>
+            </p:nvSpPr>
+            <p:spPr>
+              <a:xfrm>
+                <a:off x="22047" y="3338"/>
+                <a:ext cx="1654" cy="507"/>
+              </a:xfrm>
+              <a:prstGeom prst="rect">
+                <a:avLst/>
+              </a:prstGeom>
+              <a:noFill/>
+            </p:spPr>
+            <p:txBody>
+              <a:bodyPr wrap="square" rtlCol="0">
+                <a:spAutoFit/>
+              </a:bodyPr>
+              <a:p>
+                <a:pPr algn="ctr">
+                  <a:buClrTx/>
+                  <a:buSzTx/>
+                  <a:buFontTx/>
+                </a:pPr>
+                <a:r>
+                  <a:rPr lang="zh-CN" altLang="en-US" sz="1500" b="1">
+                    <a:latin typeface="微软雅黑" panose="020B0503020204020204" charset="-122"/>
+                    <a:ea typeface="微软雅黑" panose="020B0503020204020204" charset="-122"/>
+                  </a:rPr>
+                  <a:t>向量库</a:t>
+                </a:r>
+                <a:endParaRPr lang="zh-CN" altLang="en-US" sz="1500" b="1">
+                  <a:latin typeface="微软雅黑" panose="020B0503020204020204" charset="-122"/>
+                  <a:ea typeface="微软雅黑" panose="020B0503020204020204" charset="-122"/>
+                </a:endParaRPr>
+              </a:p>
+            </p:txBody>
+          </p:sp>
+        </p:grpSp>
+        <p:grpSp>
+          <p:nvGrpSpPr>
+            <p:cNvPr id="84" name="组合 83"/>
+            <p:cNvGrpSpPr/>
+            <p:nvPr/>
+          </p:nvGrpSpPr>
+          <p:grpSpPr>
+            <a:xfrm>
+              <a:off x="7981" y="9186"/>
+              <a:ext cx="2160" cy="1173"/>
+              <a:chOff x="8231" y="7583"/>
+              <a:chExt cx="2160" cy="1400"/>
+            </a:xfrm>
+          </p:grpSpPr>
+          <p:pic>
+            <p:nvPicPr>
+              <p:cNvPr id="58" name="图片 57" descr="数据库"/>
+              <p:cNvPicPr>
+                <a:picLocks noChangeAspect="1"/>
+              </p:cNvPicPr>
+              <p:nvPr>
+                <p:custDataLst>
+                  <p:tags r:id="rId4"/>
+                </p:custDataLst>
+              </p:nvPr>
+            </p:nvPicPr>
+            <p:blipFill>
+              <a:blip r:embed="rId2">
+                <a:extLst>
+                  <a:ext uri="{96DAC541-7B7A-43D3-8B79-37D633B846F1}">
+                    <asvg:svgBlip xmlns:asvg="http://schemas.microsoft.com/office/drawing/2016/SVG/main" r:embed="rId3"/>
+                  </a:ext>
+                </a:extLst>
+              </a:blip>
+              <a:stretch>
+                <a:fillRect/>
+              </a:stretch>
+            </p:blipFill>
+            <p:spPr>
+              <a:xfrm>
+                <a:off x="8231" y="7583"/>
+                <a:ext cx="2160" cy="1400"/>
+              </a:xfrm>
+              <a:prstGeom prst="rect">
+                <a:avLst/>
+              </a:prstGeom>
+            </p:spPr>
+          </p:pic>
+          <p:sp>
+            <p:nvSpPr>
+              <p:cNvPr id="59" name="文本框 58"/>
+              <p:cNvSpPr txBox="1"/>
+              <p:nvPr/>
+            </p:nvSpPr>
+            <p:spPr>
+              <a:xfrm>
+                <a:off x="8627" y="7980"/>
+                <a:ext cx="1369" cy="605"/>
+              </a:xfrm>
+              <a:prstGeom prst="rect">
+                <a:avLst/>
+              </a:prstGeom>
+              <a:noFill/>
+            </p:spPr>
+            <p:txBody>
+              <a:bodyPr wrap="square" rtlCol="0">
+                <a:spAutoFit/>
+              </a:bodyPr>
+              <a:p>
+                <a:pPr algn="ctr">
+                  <a:buClrTx/>
+                  <a:buSzTx/>
+                  <a:buFontTx/>
+                </a:pPr>
+                <a:r>
+                  <a:rPr lang="zh-CN" altLang="en-US" sz="1500" b="1">
+                    <a:latin typeface="微软雅黑" panose="020B0503020204020204" charset="-122"/>
+                    <a:ea typeface="微软雅黑" panose="020B0503020204020204" charset="-122"/>
+                  </a:rPr>
+                  <a:t>向量库</a:t>
+                </a:r>
+                <a:endParaRPr lang="zh-CN" altLang="en-US" sz="1500" b="1">
+                  <a:latin typeface="微软雅黑" panose="020B0503020204020204" charset="-122"/>
+                  <a:ea typeface="微软雅黑" panose="020B0503020204020204" charset="-122"/>
+                </a:endParaRPr>
+              </a:p>
+            </p:txBody>
+          </p:sp>
+        </p:grpSp>
+        <p:cxnSp>
+          <p:nvCxnSpPr>
+            <p:cNvPr id="60" name="直接箭头连接符 59"/>
+            <p:cNvCxnSpPr>
+              <a:stCxn id="28" idx="3"/>
+              <a:endCxn id="3" idx="1"/>
+            </p:cNvCxnSpPr>
+            <p:nvPr/>
+          </p:nvCxnSpPr>
+          <p:spPr>
+            <a:xfrm>
+              <a:off x="594" y="4476"/>
+              <a:ext cx="864" cy="0"/>
+            </a:xfrm>
+            <a:prstGeom prst="straightConnector1">
+              <a:avLst/>
+            </a:prstGeom>
+            <a:ln w="19050">
+              <a:solidFill>
+                <a:schemeClr val="tx1"/>
+              </a:solidFill>
+              <a:tailEnd type="triangle"/>
+            </a:ln>
+          </p:spPr>
+          <p:style>
+            <a:lnRef idx="2">
+              <a:schemeClr val="accent1"/>
+            </a:lnRef>
+            <a:fillRef idx="0">
+              <a:srgbClr val="FFFFFF"/>
+            </a:fillRef>
+            <a:effectRef idx="0">
+              <a:srgbClr val="FFFFFF"/>
+            </a:effectRef>
+            <a:fontRef idx="minor">
+              <a:schemeClr val="tx1"/>
+            </a:fontRef>
+          </p:style>
+        </p:cxnSp>
+        <p:cxnSp>
+          <p:nvCxnSpPr>
+            <p:cNvPr id="61" name="直接箭头连接符 60"/>
+            <p:cNvCxnSpPr>
+              <a:stCxn id="3" idx="3"/>
+              <a:endCxn id="6" idx="1"/>
+            </p:cNvCxnSpPr>
+            <p:nvPr/>
+          </p:nvCxnSpPr>
+          <p:spPr>
+            <a:xfrm>
+              <a:off x="4683" y="4476"/>
+              <a:ext cx="864" cy="0"/>
+            </a:xfrm>
+            <a:prstGeom prst="straightConnector1">
+              <a:avLst/>
+            </a:prstGeom>
+            <a:ln w="19050">
+              <a:solidFill>
+                <a:schemeClr val="tx1"/>
+              </a:solidFill>
+              <a:tailEnd type="triangle"/>
+            </a:ln>
+          </p:spPr>
+          <p:style>
+            <a:lnRef idx="2">
+              <a:schemeClr val="accent1"/>
+            </a:lnRef>
+            <a:fillRef idx="0">
+              <a:srgbClr val="FFFFFF"/>
+            </a:fillRef>
+            <a:effectRef idx="0">
+              <a:srgbClr val="FFFFFF"/>
+            </a:effectRef>
+            <a:fontRef idx="minor">
+              <a:schemeClr val="tx1"/>
+            </a:fontRef>
+          </p:style>
+        </p:cxnSp>
+        <p:cxnSp>
+          <p:nvCxnSpPr>
+            <p:cNvPr id="62" name="直接箭头连接符 61"/>
+            <p:cNvCxnSpPr>
+              <a:stCxn id="6" idx="3"/>
+              <a:endCxn id="14" idx="1"/>
+            </p:cNvCxnSpPr>
+            <p:nvPr/>
+          </p:nvCxnSpPr>
+          <p:spPr>
+            <a:xfrm>
+              <a:off x="8772" y="4476"/>
+              <a:ext cx="864" cy="0"/>
+            </a:xfrm>
+            <a:prstGeom prst="straightConnector1">
+              <a:avLst/>
+            </a:prstGeom>
+            <a:ln w="19050">
+              <a:solidFill>
+                <a:schemeClr val="tx1"/>
+              </a:solidFill>
+              <a:tailEnd type="triangle"/>
+            </a:ln>
+          </p:spPr>
+          <p:style>
+            <a:lnRef idx="2">
+              <a:schemeClr val="accent1"/>
+            </a:lnRef>
+            <a:fillRef idx="0">
+              <a:srgbClr val="FFFFFF"/>
+            </a:fillRef>
+            <a:effectRef idx="0">
+              <a:srgbClr val="FFFFFF"/>
+            </a:effectRef>
+            <a:fontRef idx="minor">
+              <a:schemeClr val="tx1"/>
+            </a:fontRef>
+          </p:style>
+        </p:cxnSp>
+        <p:cxnSp>
+          <p:nvCxnSpPr>
+            <p:cNvPr id="63" name="直接箭头连接符 62"/>
+            <p:cNvCxnSpPr>
+              <a:stCxn id="14" idx="3"/>
+              <a:endCxn id="26" idx="1"/>
+            </p:cNvCxnSpPr>
+            <p:nvPr/>
+          </p:nvCxnSpPr>
+          <p:spPr>
+            <a:xfrm>
+              <a:off x="12861" y="4476"/>
+              <a:ext cx="864" cy="0"/>
+            </a:xfrm>
+            <a:prstGeom prst="straightConnector1">
+              <a:avLst/>
+            </a:prstGeom>
+            <a:ln w="19050">
+              <a:solidFill>
+                <a:schemeClr val="tx1"/>
+              </a:solidFill>
+              <a:tailEnd type="triangle"/>
+            </a:ln>
+          </p:spPr>
+          <p:style>
+            <a:lnRef idx="2">
+              <a:schemeClr val="accent1"/>
+            </a:lnRef>
+            <a:fillRef idx="0">
+              <a:srgbClr val="FFFFFF"/>
+            </a:fillRef>
+            <a:effectRef idx="0">
+              <a:srgbClr val="FFFFFF"/>
+            </a:effectRef>
+            <a:fontRef idx="minor">
+              <a:schemeClr val="tx1"/>
+            </a:fontRef>
+          </p:style>
+        </p:cxnSp>
+        <p:cxnSp>
+          <p:nvCxnSpPr>
+            <p:cNvPr id="64" name="直接箭头连接符 63"/>
+            <p:cNvCxnSpPr>
+              <a:stCxn id="35" idx="2"/>
+              <a:endCxn id="76" idx="1"/>
+            </p:cNvCxnSpPr>
+            <p:nvPr/>
+          </p:nvCxnSpPr>
+          <p:spPr>
+            <a:xfrm>
+              <a:off x="5512" y="8845"/>
+              <a:ext cx="0" cy="341"/>
+            </a:xfrm>
+            <a:prstGeom prst="straightConnector1">
+              <a:avLst/>
+            </a:prstGeom>
+            <a:ln w="19050">
+              <a:solidFill>
+                <a:schemeClr val="tx1"/>
+              </a:solidFill>
+              <a:tailEnd type="triangle"/>
+            </a:ln>
+          </p:spPr>
+          <p:style>
+            <a:lnRef idx="2">
+              <a:schemeClr val="accent1"/>
+            </a:lnRef>
+            <a:fillRef idx="0">
+              <a:srgbClr val="FFFFFF"/>
+            </a:fillRef>
+            <a:effectRef idx="0">
+              <a:srgbClr val="FFFFFF"/>
+            </a:effectRef>
+            <a:fontRef idx="minor">
+              <a:schemeClr val="tx1"/>
+            </a:fontRef>
+          </p:style>
+        </p:cxnSp>
+        <p:cxnSp>
+          <p:nvCxnSpPr>
+            <p:cNvPr id="66" name="直接箭头连接符 65"/>
+            <p:cNvCxnSpPr>
+              <a:stCxn id="79" idx="3"/>
+              <a:endCxn id="42" idx="1"/>
+            </p:cNvCxnSpPr>
+            <p:nvPr/>
+          </p:nvCxnSpPr>
+          <p:spPr>
+            <a:xfrm>
+              <a:off x="8851" y="6471"/>
+              <a:ext cx="785" cy="0"/>
+            </a:xfrm>
+            <a:prstGeom prst="straightConnector1">
+              <a:avLst/>
+            </a:prstGeom>
+            <a:ln w="19050">
+              <a:solidFill>
+                <a:schemeClr val="tx1"/>
+              </a:solidFill>
+              <a:tailEnd type="triangle"/>
+            </a:ln>
+          </p:spPr>
+          <p:style>
+            <a:lnRef idx="2">
+              <a:schemeClr val="accent1"/>
+            </a:lnRef>
+            <a:fillRef idx="0">
+              <a:srgbClr val="FFFFFF"/>
+            </a:fillRef>
+            <a:effectRef idx="0">
+              <a:srgbClr val="FFFFFF"/>
+            </a:effectRef>
+            <a:fontRef idx="minor">
+              <a:schemeClr val="tx1"/>
+            </a:fontRef>
+          </p:style>
+        </p:cxnSp>
+        <p:cxnSp>
+          <p:nvCxnSpPr>
+            <p:cNvPr id="67" name="直接箭头连接符 66"/>
+            <p:cNvCxnSpPr>
+              <a:stCxn id="26" idx="3"/>
+              <a:endCxn id="27" idx="1"/>
+            </p:cNvCxnSpPr>
+            <p:nvPr/>
+          </p:nvCxnSpPr>
+          <p:spPr>
+            <a:xfrm>
+              <a:off x="16950" y="4476"/>
+              <a:ext cx="865" cy="0"/>
+            </a:xfrm>
+            <a:prstGeom prst="straightConnector1">
+              <a:avLst/>
+            </a:prstGeom>
+            <a:ln w="19050">
+              <a:solidFill>
+                <a:schemeClr val="tx1"/>
+              </a:solidFill>
+              <a:tailEnd type="triangle"/>
+            </a:ln>
+          </p:spPr>
+          <p:style>
+            <a:lnRef idx="2">
+              <a:schemeClr val="accent1"/>
+            </a:lnRef>
+            <a:fillRef idx="0">
+              <a:srgbClr val="FFFFFF"/>
+            </a:fillRef>
+            <a:effectRef idx="0">
+              <a:srgbClr val="FFFFFF"/>
+            </a:effectRef>
+            <a:fontRef idx="minor">
+              <a:schemeClr val="tx1"/>
+            </a:fontRef>
+          </p:style>
+        </p:cxnSp>
+        <p:cxnSp>
+          <p:nvCxnSpPr>
+            <p:cNvPr id="68" name="直接箭头连接符 67"/>
+            <p:cNvCxnSpPr>
+              <a:stCxn id="42" idx="3"/>
+              <a:endCxn id="34" idx="5"/>
+            </p:cNvCxnSpPr>
+            <p:nvPr/>
+          </p:nvCxnSpPr>
+          <p:spPr>
+            <a:xfrm>
+              <a:off x="12861" y="6471"/>
+              <a:ext cx="863" cy="0"/>
+            </a:xfrm>
+            <a:prstGeom prst="straightConnector1">
+              <a:avLst/>
+            </a:prstGeom>
+            <a:ln w="19050">
+              <a:solidFill>
+                <a:schemeClr val="tx1"/>
+              </a:solidFill>
+              <a:tailEnd type="triangle"/>
+            </a:ln>
+          </p:spPr>
+          <p:style>
+            <a:lnRef idx="2">
+              <a:schemeClr val="accent1"/>
+            </a:lnRef>
+            <a:fillRef idx="0">
+              <a:srgbClr val="FFFFFF"/>
+            </a:fillRef>
+            <a:effectRef idx="0">
+              <a:srgbClr val="FFFFFF"/>
+            </a:effectRef>
+            <a:fontRef idx="minor">
+              <a:schemeClr val="tx1"/>
+            </a:fontRef>
+          </p:style>
+        </p:cxnSp>
+        <p:cxnSp>
+          <p:nvCxnSpPr>
+            <p:cNvPr id="69" name="直接箭头连接符 68"/>
+            <p:cNvCxnSpPr>
+              <a:stCxn id="27" idx="3"/>
+              <a:endCxn id="51" idx="1"/>
+            </p:cNvCxnSpPr>
+            <p:nvPr/>
+          </p:nvCxnSpPr>
+          <p:spPr>
+            <a:xfrm>
+              <a:off x="21040" y="4476"/>
+              <a:ext cx="865" cy="0"/>
+            </a:xfrm>
+            <a:prstGeom prst="straightConnector1">
+              <a:avLst/>
+            </a:prstGeom>
+            <a:ln w="19050">
+              <a:solidFill>
+                <a:schemeClr val="tx1"/>
+              </a:solidFill>
+              <a:tailEnd type="triangle"/>
+            </a:ln>
+          </p:spPr>
+          <p:style>
+            <a:lnRef idx="2">
+              <a:schemeClr val="accent1"/>
+            </a:lnRef>
+            <a:fillRef idx="0">
+              <a:srgbClr val="FFFFFF"/>
+            </a:fillRef>
+            <a:effectRef idx="0">
+              <a:srgbClr val="FFFFFF"/>
+            </a:effectRef>
+            <a:fontRef idx="minor">
+              <a:schemeClr val="tx1"/>
+            </a:fontRef>
+          </p:style>
+        </p:cxnSp>
+        <p:cxnSp>
+          <p:nvCxnSpPr>
+            <p:cNvPr id="85" name="直接箭头连接符 84"/>
+            <p:cNvCxnSpPr>
+              <a:stCxn id="3" idx="0"/>
+              <a:endCxn id="50" idx="3"/>
+            </p:cNvCxnSpPr>
+            <p:nvPr/>
+          </p:nvCxnSpPr>
+          <p:spPr>
+            <a:xfrm flipV="1">
+              <a:off x="3071" y="3258"/>
+              <a:ext cx="0" cy="586"/>
+            </a:xfrm>
+            <a:prstGeom prst="straightConnector1">
+              <a:avLst/>
+            </a:prstGeom>
+            <a:ln w="19050">
+              <a:solidFill>
+                <a:schemeClr val="tx1"/>
+              </a:solidFill>
+              <a:headEnd type="triangle"/>
+              <a:tailEnd type="triangle"/>
+            </a:ln>
+          </p:spPr>
+          <p:style>
+            <a:lnRef idx="2">
+              <a:schemeClr val="accent1"/>
+            </a:lnRef>
+            <a:fillRef idx="0">
+              <a:srgbClr val="FFFFFF"/>
+            </a:fillRef>
+            <a:effectRef idx="0">
+              <a:srgbClr val="FFFFFF"/>
+            </a:effectRef>
+            <a:fontRef idx="minor">
+              <a:schemeClr val="tx1"/>
+            </a:fontRef>
+          </p:style>
+        </p:cxnSp>
+        <p:sp>
+          <p:nvSpPr>
+            <p:cNvPr id="71" name="平行四边形 70"/>
+            <p:cNvSpPr/>
+            <p:nvPr/>
+          </p:nvSpPr>
+          <p:spPr>
+            <a:xfrm>
+              <a:off x="-2790" y="5839"/>
+              <a:ext cx="3544" cy="1263"/>
+            </a:xfrm>
+            <a:prstGeom prst="parallelogram">
+              <a:avLst/>
+            </a:prstGeom>
+            <a:noFill/>
+            <a:ln>
+              <a:solidFill>
+                <a:schemeClr val="tx1"/>
+              </a:solidFill>
+            </a:ln>
+          </p:spPr>
+          <p:style>
+            <a:lnRef idx="2">
+              <a:schemeClr val="accent1">
+                <a:lumMod val="75000"/>
+              </a:schemeClr>
+            </a:lnRef>
+            <a:fillRef idx="1">
+              <a:schemeClr val="accent1"/>
+            </a:fillRef>
+            <a:effectRef idx="0">
+              <a:srgbClr val="FFFFFF"/>
+            </a:effectRef>
+            <a:fontRef idx="minor">
+              <a:schemeClr val="lt1"/>
+            </a:fontRef>
+          </p:style>
+          <p:txBody>
+            <a:bodyPr rtlCol="0" anchor="ctr"/>
+            <a:p>
+              <a:pPr algn="ctr"/>
+              <a:r>
+                <a:rPr lang="en-US" altLang="zh-CN" sz="1500" b="1">
+                  <a:solidFill>
+                    <a:schemeClr val="tx1"/>
+                  </a:solidFill>
+                  <a:latin typeface="Times New Roman" panose="02020603050405020304" charset="0"/>
+                  <a:ea typeface="微软雅黑" panose="020B0503020204020204" charset="-122"/>
+                  <a:sym typeface="+mn-ea"/>
+                </a:rPr>
+                <a:t>RAG Retrieval;</a:t>
+              </a:r>
+              <a:r>
+                <a:rPr lang="zh-CN" altLang="en-US" sz="1500">
+                  <a:solidFill>
+                    <a:schemeClr val="tx1"/>
+                  </a:solidFill>
+                  <a:latin typeface="Times New Roman" panose="02020603050405020304" charset="0"/>
+                  <a:ea typeface="微软雅黑" panose="020B0503020204020204" charset="-122"/>
+                </a:rPr>
+                <a:t>：</a:t>
+              </a:r>
+              <a:endParaRPr lang="zh-CN" altLang="en-US" sz="1500">
+                <a:solidFill>
+                  <a:schemeClr val="tx1"/>
+                </a:solidFill>
+                <a:latin typeface="Times New Roman" panose="02020603050405020304" charset="0"/>
+                <a:ea typeface="微软雅黑" panose="020B0503020204020204" charset="-122"/>
+              </a:endParaRPr>
+            </a:p>
+            <a:p>
+              <a:pPr algn="ctr"/>
+              <a:r>
+                <a:rPr lang="zh-CN" altLang="en-US" sz="1500">
+                  <a:solidFill>
+                    <a:schemeClr val="tx1"/>
+                  </a:solidFill>
+                  <a:latin typeface="Times New Roman" panose="02020603050405020304" charset="0"/>
+                  <a:ea typeface="微软雅黑" panose="020B0503020204020204" charset="-122"/>
+                </a:rPr>
+                <a:t>构造查询</a:t>
+              </a:r>
+              <a:r>
+                <a:rPr lang="zh-CN" altLang="en-US" sz="1500">
+                  <a:solidFill>
+                    <a:schemeClr val="tx1"/>
+                  </a:solidFill>
+                  <a:latin typeface="Times New Roman" panose="02020603050405020304" charset="0"/>
+                  <a:ea typeface="微软雅黑" panose="020B0503020204020204" charset="-122"/>
+                </a:rPr>
+                <a:t>语句</a:t>
+              </a:r>
+              <a:endParaRPr lang="zh-CN" altLang="en-US" sz="1500">
+                <a:solidFill>
+                  <a:schemeClr val="tx1"/>
+                </a:solidFill>
+                <a:latin typeface="Times New Roman" panose="02020603050405020304" charset="0"/>
+                <a:ea typeface="微软雅黑" panose="020B0503020204020204" charset="-122"/>
+              </a:endParaRPr>
+            </a:p>
+          </p:txBody>
+        </p:sp>
+        <p:cxnSp>
+          <p:nvCxnSpPr>
+            <p:cNvPr id="72" name="直接箭头连接符 71"/>
+            <p:cNvCxnSpPr>
+              <a:stCxn id="71" idx="2"/>
+              <a:endCxn id="30" idx="1"/>
+            </p:cNvCxnSpPr>
+            <p:nvPr/>
+          </p:nvCxnSpPr>
+          <p:spPr>
+            <a:xfrm>
+              <a:off x="596" y="6471"/>
+              <a:ext cx="863" cy="0"/>
+            </a:xfrm>
+            <a:prstGeom prst="straightConnector1">
+              <a:avLst/>
+            </a:prstGeom>
+            <a:ln w="19050">
+              <a:solidFill>
+                <a:schemeClr val="tx1"/>
+              </a:solidFill>
+              <a:tailEnd type="triangle"/>
+            </a:ln>
+          </p:spPr>
+          <p:style>
+            <a:lnRef idx="2">
+              <a:schemeClr val="accent1"/>
+            </a:lnRef>
+            <a:fillRef idx="0">
+              <a:srgbClr val="FFFFFF"/>
+            </a:fillRef>
+            <a:effectRef idx="0">
+              <a:srgbClr val="FFFFFF"/>
+            </a:effectRef>
+            <a:fontRef idx="minor">
+              <a:schemeClr val="tx1"/>
+            </a:fontRef>
+          </p:style>
+        </p:cxnSp>
+        <p:sp>
+          <p:nvSpPr>
+            <p:cNvPr id="76" name="流程图: 磁盘 75"/>
+            <p:cNvSpPr/>
+            <p:nvPr/>
+          </p:nvSpPr>
+          <p:spPr>
+            <a:xfrm>
+              <a:off x="4540" y="9186"/>
+              <a:ext cx="1943" cy="1173"/>
+            </a:xfrm>
+            <a:prstGeom prst="flowChartMagneticDisk">
+              <a:avLst/>
+            </a:prstGeom>
+            <a:solidFill>
+              <a:schemeClr val="bg1"/>
+            </a:solidFill>
+            <a:ln>
+              <a:solidFill>
+                <a:schemeClr val="tx1"/>
+              </a:solidFill>
+            </a:ln>
+          </p:spPr>
+          <p:style>
+            <a:lnRef idx="2">
+              <a:schemeClr val="accent1">
+                <a:lumMod val="75000"/>
+              </a:schemeClr>
+            </a:lnRef>
+            <a:fillRef idx="1">
+              <a:schemeClr val="accent1"/>
+            </a:fillRef>
+            <a:effectRef idx="0">
+              <a:srgbClr val="FFFFFF"/>
+            </a:effectRef>
+            <a:fontRef idx="minor">
+              <a:schemeClr val="lt1"/>
+            </a:fontRef>
+          </p:style>
+          <p:txBody>
+            <a:bodyPr rtlCol="0" anchor="ctr"/>
+            <a:p>
+              <a:pPr algn="ctr"/>
+              <a:endParaRPr lang="zh-CN" altLang="en-US" sz="500" b="1">
+                <a:solidFill>
+                  <a:schemeClr val="tx1"/>
+                </a:solidFill>
+                <a:latin typeface="Times New Roman" panose="02020603050405020304" charset="0"/>
+                <a:ea typeface="微软雅黑" panose="020B0503020204020204" charset="-122"/>
+                <a:cs typeface="Times New Roman" panose="02020603050405020304" charset="0"/>
+              </a:endParaRPr>
+            </a:p>
+            <a:p>
+              <a:pPr algn="ctr"/>
+              <a:r>
+                <a:rPr lang="zh-CN" altLang="en-US" sz="1500" b="1">
+                  <a:solidFill>
+                    <a:schemeClr val="tx1"/>
+                  </a:solidFill>
+                  <a:latin typeface="Times New Roman" panose="02020603050405020304" charset="0"/>
+                  <a:ea typeface="微软雅黑" panose="020B0503020204020204" charset="-122"/>
+                  <a:cs typeface="Times New Roman" panose="02020603050405020304" charset="0"/>
+                </a:rPr>
+                <a:t>知识库</a:t>
+              </a:r>
+              <a:endParaRPr lang="zh-CN" altLang="en-US" sz="1500" b="1">
+                <a:solidFill>
+                  <a:schemeClr val="tx1"/>
+                </a:solidFill>
+                <a:latin typeface="Times New Roman" panose="02020603050405020304" charset="0"/>
+                <a:ea typeface="微软雅黑" panose="020B0503020204020204" charset="-122"/>
+                <a:cs typeface="Times New Roman" panose="02020603050405020304" charset="0"/>
+              </a:endParaRPr>
+            </a:p>
+            <a:p>
+              <a:pPr algn="ctr"/>
+              <a:r>
+                <a:rPr lang="en-US" altLang="zh-CN" sz="1500" b="1">
+                  <a:solidFill>
+                    <a:schemeClr val="tx1"/>
+                  </a:solidFill>
+                  <a:latin typeface="Times New Roman" panose="02020603050405020304" charset="0"/>
+                  <a:ea typeface="微软雅黑" panose="020B0503020204020204" charset="-122"/>
+                  <a:cs typeface="Times New Roman" panose="02020603050405020304" charset="0"/>
+                </a:rPr>
+                <a:t>Chunks</a:t>
+              </a:r>
+              <a:endParaRPr lang="en-US" altLang="zh-CN" sz="1500" b="1">
+                <a:solidFill>
+                  <a:schemeClr val="tx1"/>
+                </a:solidFill>
+                <a:latin typeface="Times New Roman" panose="02020603050405020304" charset="0"/>
+                <a:ea typeface="微软雅黑" panose="020B0503020204020204" charset="-122"/>
+                <a:cs typeface="Times New Roman" panose="02020603050405020304" charset="0"/>
+              </a:endParaRPr>
+            </a:p>
+          </p:txBody>
+        </p:sp>
+        <p:cxnSp>
+          <p:nvCxnSpPr>
+            <p:cNvPr id="80" name="肘形连接符 79"/>
+            <p:cNvCxnSpPr>
+              <a:stCxn id="79" idx="2"/>
+              <a:endCxn id="35" idx="0"/>
+            </p:cNvCxnSpPr>
+            <p:nvPr/>
+          </p:nvCxnSpPr>
+          <p:spPr>
+            <a:xfrm rot="5400000">
+              <a:off x="6136" y="6479"/>
+              <a:ext cx="480" cy="1727"/>
+            </a:xfrm>
+            <a:prstGeom prst="bentConnector3">
+              <a:avLst>
+                <a:gd name="adj1" fmla="val 49896"/>
+              </a:avLst>
+            </a:prstGeom>
+            <a:ln w="19050">
+              <a:solidFill>
+                <a:schemeClr val="tx1"/>
+              </a:solidFill>
+              <a:tailEnd type="triangle"/>
+            </a:ln>
+          </p:spPr>
+          <p:style>
+            <a:lnRef idx="2">
+              <a:schemeClr val="accent1"/>
+            </a:lnRef>
+            <a:fillRef idx="0">
+              <a:srgbClr val="FFFFFF"/>
+            </a:fillRef>
+            <a:effectRef idx="0">
+              <a:srgbClr val="FFFFFF"/>
+            </a:effectRef>
+            <a:fontRef idx="minor">
+              <a:schemeClr val="tx1"/>
+            </a:fontRef>
+          </p:style>
+        </p:cxnSp>
+        <p:sp>
+          <p:nvSpPr>
+            <p:cNvPr id="79" name="矩形 78"/>
+            <p:cNvSpPr/>
+            <p:nvPr/>
+          </p:nvSpPr>
+          <p:spPr>
+            <a:xfrm>
+              <a:off x="5626" y="5839"/>
+              <a:ext cx="3225" cy="1263"/>
+            </a:xfrm>
+            <a:prstGeom prst="rect">
+              <a:avLst/>
+            </a:prstGeom>
+            <a:noFill/>
+            <a:ln>
+              <a:solidFill>
+                <a:schemeClr val="tx1"/>
+              </a:solidFill>
+            </a:ln>
+          </p:spPr>
+          <p:style>
+            <a:lnRef idx="2">
+              <a:schemeClr val="accent1">
+                <a:lumMod val="75000"/>
+              </a:schemeClr>
+            </a:lnRef>
+            <a:fillRef idx="1">
+              <a:schemeClr val="accent1"/>
+            </a:fillRef>
+            <a:effectRef idx="0">
+              <a:srgbClr val="FFFFFF"/>
+            </a:effectRef>
+            <a:fontRef idx="minor">
+              <a:schemeClr val="lt1"/>
+            </a:fontRef>
+          </p:style>
+          <p:txBody>
+            <a:bodyPr rtlCol="0" anchor="ctr"/>
+            <a:p>
+              <a:pPr algn="ctr"/>
+              <a:r>
+                <a:rPr lang="en-US" altLang="zh-CN" sz="1500" b="1">
+                  <a:solidFill>
+                    <a:schemeClr val="tx1"/>
+                  </a:solidFill>
+                  <a:latin typeface="Times New Roman" panose="02020603050405020304" charset="0"/>
+                  <a:ea typeface="微软雅黑" panose="020B0503020204020204" charset="-122"/>
+                </a:rPr>
+                <a:t>Hybrid Retriever</a:t>
+              </a:r>
+              <a:r>
+                <a:rPr lang="zh-CN" altLang="en-US" sz="1500">
+                  <a:solidFill>
+                    <a:schemeClr val="tx1"/>
+                  </a:solidFill>
+                  <a:latin typeface="Times New Roman" panose="02020603050405020304" charset="0"/>
+                  <a:ea typeface="微软雅黑" panose="020B0503020204020204" charset="-122"/>
+                </a:rPr>
+                <a:t>：</a:t>
+              </a:r>
+              <a:endParaRPr lang="zh-CN" altLang="en-US" sz="1500">
+                <a:solidFill>
+                  <a:schemeClr val="tx1"/>
+                </a:solidFill>
+                <a:latin typeface="Times New Roman" panose="02020603050405020304" charset="0"/>
+                <a:ea typeface="微软雅黑" panose="020B0503020204020204" charset="-122"/>
+              </a:endParaRPr>
+            </a:p>
+            <a:p>
+              <a:pPr algn="ctr"/>
+              <a:r>
+                <a:rPr lang="zh-CN" altLang="en-US" sz="1500">
+                  <a:solidFill>
+                    <a:schemeClr val="tx1"/>
+                  </a:solidFill>
+                  <a:latin typeface="Times New Roman" panose="02020603050405020304" charset="0"/>
+                  <a:ea typeface="微软雅黑" panose="020B0503020204020204" charset="-122"/>
+                </a:rPr>
+                <a:t>将向量检索结果</a:t>
+              </a:r>
+              <a:r>
+                <a:rPr lang="zh-CN" altLang="en-US" sz="1500">
+                  <a:solidFill>
+                    <a:schemeClr val="tx1"/>
+                  </a:solidFill>
+                  <a:latin typeface="Times New Roman" panose="02020603050405020304" charset="0"/>
+                  <a:ea typeface="微软雅黑" panose="020B0503020204020204" charset="-122"/>
+                </a:rPr>
+                <a:t>和</a:t>
+              </a:r>
+              <a:endParaRPr lang="zh-CN" altLang="en-US" sz="1500">
+                <a:solidFill>
+                  <a:schemeClr val="tx1"/>
+                </a:solidFill>
+                <a:latin typeface="Times New Roman" panose="02020603050405020304" charset="0"/>
+                <a:ea typeface="微软雅黑" panose="020B0503020204020204" charset="-122"/>
+              </a:endParaRPr>
+            </a:p>
+            <a:p>
+              <a:pPr algn="ctr"/>
+              <a:r>
+                <a:rPr lang="zh-CN" altLang="en-US" sz="1500">
+                  <a:solidFill>
+                    <a:schemeClr val="tx1"/>
+                  </a:solidFill>
+                  <a:latin typeface="Times New Roman" panose="02020603050405020304" charset="0"/>
+                  <a:ea typeface="微软雅黑" panose="020B0503020204020204" charset="-122"/>
+                </a:rPr>
+                <a:t>关键词检索结果</a:t>
+              </a:r>
+              <a:r>
+                <a:rPr lang="zh-CN" altLang="en-US" sz="1500">
+                  <a:solidFill>
+                    <a:schemeClr val="tx1"/>
+                  </a:solidFill>
+                  <a:latin typeface="Times New Roman" panose="02020603050405020304" charset="0"/>
+                  <a:ea typeface="微软雅黑" panose="020B0503020204020204" charset="-122"/>
+                </a:rPr>
+                <a:t>融合</a:t>
+              </a:r>
+              <a:endParaRPr lang="zh-CN" altLang="en-US" sz="1500">
+                <a:solidFill>
+                  <a:schemeClr val="tx1"/>
+                </a:solidFill>
+                <a:latin typeface="Times New Roman" panose="02020603050405020304" charset="0"/>
+                <a:ea typeface="微软雅黑" panose="020B0503020204020204" charset="-122"/>
+              </a:endParaRPr>
+            </a:p>
+          </p:txBody>
+        </p:sp>
+        <p:cxnSp>
+          <p:nvCxnSpPr>
+            <p:cNvPr id="81" name="直接箭头连接符 80"/>
+            <p:cNvCxnSpPr>
+              <a:stCxn id="30" idx="3"/>
+              <a:endCxn id="79" idx="1"/>
+            </p:cNvCxnSpPr>
+            <p:nvPr/>
+          </p:nvCxnSpPr>
+          <p:spPr>
+            <a:xfrm>
+              <a:off x="4684" y="6471"/>
+              <a:ext cx="942" cy="0"/>
+            </a:xfrm>
+            <a:prstGeom prst="straightConnector1">
+              <a:avLst/>
+            </a:prstGeom>
+            <a:ln w="19050">
+              <a:solidFill>
+                <a:schemeClr val="tx1"/>
+              </a:solidFill>
+              <a:tailEnd type="triangle"/>
+            </a:ln>
+          </p:spPr>
+          <p:style>
+            <a:lnRef idx="2">
+              <a:schemeClr val="accent1"/>
+            </a:lnRef>
+            <a:fillRef idx="0">
+              <a:srgbClr val="FFFFFF"/>
+            </a:fillRef>
+            <a:effectRef idx="0">
+              <a:srgbClr val="FFFFFF"/>
+            </a:effectRef>
+            <a:fontRef idx="minor">
+              <a:schemeClr val="tx1"/>
+            </a:fontRef>
+          </p:style>
+        </p:cxnSp>
+        <p:sp>
+          <p:nvSpPr>
+            <p:cNvPr id="82" name="矩形 81"/>
+            <p:cNvSpPr/>
+            <p:nvPr/>
+          </p:nvSpPr>
+          <p:spPr>
+            <a:xfrm>
+              <a:off x="7448" y="7582"/>
+              <a:ext cx="3225" cy="1263"/>
+            </a:xfrm>
+            <a:prstGeom prst="rect">
+              <a:avLst/>
+            </a:prstGeom>
+            <a:noFill/>
+            <a:ln>
+              <a:solidFill>
+                <a:schemeClr val="tx1"/>
+              </a:solidFill>
+            </a:ln>
+          </p:spPr>
+          <p:style>
+            <a:lnRef idx="2">
+              <a:schemeClr val="accent1">
+                <a:lumMod val="75000"/>
+              </a:schemeClr>
+            </a:lnRef>
+            <a:fillRef idx="1">
+              <a:schemeClr val="accent1"/>
+            </a:fillRef>
+            <a:effectRef idx="0">
+              <a:srgbClr val="FFFFFF"/>
+            </a:effectRef>
+            <a:fontRef idx="minor">
+              <a:schemeClr val="lt1"/>
+            </a:fontRef>
+          </p:style>
+          <p:txBody>
+            <a:bodyPr rtlCol="0" anchor="ctr"/>
+            <a:p>
+              <a:pPr algn="ctr"/>
+              <a:r>
+                <a:rPr lang="en-US" altLang="zh-CN" sz="1500" b="1">
+                  <a:solidFill>
+                    <a:schemeClr val="tx1"/>
+                  </a:solidFill>
+                  <a:latin typeface="Times New Roman" panose="02020603050405020304" charset="0"/>
+                  <a:ea typeface="微软雅黑" panose="020B0503020204020204" charset="-122"/>
+                </a:rPr>
+                <a:t>Vector Store</a:t>
+              </a:r>
+              <a:r>
+                <a:rPr lang="zh-CN" altLang="en-US" sz="1500">
+                  <a:solidFill>
+                    <a:schemeClr val="tx1"/>
+                  </a:solidFill>
+                  <a:latin typeface="Times New Roman" panose="02020603050405020304" charset="0"/>
+                  <a:ea typeface="微软雅黑" panose="020B0503020204020204" charset="-122"/>
+                </a:rPr>
+                <a:t>：</a:t>
+              </a:r>
+              <a:endParaRPr lang="zh-CN" altLang="en-US" sz="1500">
+                <a:solidFill>
+                  <a:schemeClr val="tx1"/>
+                </a:solidFill>
+                <a:latin typeface="Times New Roman" panose="02020603050405020304" charset="0"/>
+                <a:ea typeface="微软雅黑" panose="020B0503020204020204" charset="-122"/>
+              </a:endParaRPr>
+            </a:p>
+            <a:p>
+              <a:pPr algn="ctr"/>
+              <a:r>
+                <a:rPr lang="zh-CN" altLang="en-US" sz="1500">
+                  <a:solidFill>
+                    <a:schemeClr val="tx1"/>
+                  </a:solidFill>
+                  <a:latin typeface="Times New Roman" panose="02020603050405020304" charset="0"/>
+                  <a:ea typeface="微软雅黑" panose="020B0503020204020204" charset="-122"/>
+                </a:rPr>
+                <a:t>基于向量</a:t>
+              </a:r>
+              <a:r>
+                <a:rPr lang="zh-CN" altLang="en-US" sz="1500">
+                  <a:solidFill>
+                    <a:schemeClr val="tx1"/>
+                  </a:solidFill>
+                  <a:latin typeface="Times New Roman" panose="02020603050405020304" charset="0"/>
+                  <a:ea typeface="微软雅黑" panose="020B0503020204020204" charset="-122"/>
+                  <a:sym typeface="+mn-ea"/>
+                </a:rPr>
+                <a:t>进行检索</a:t>
+              </a:r>
+              <a:endParaRPr lang="zh-CN" altLang="en-US" sz="1500">
+                <a:solidFill>
+                  <a:schemeClr val="tx1"/>
+                </a:solidFill>
+                <a:latin typeface="Times New Roman" panose="02020603050405020304" charset="0"/>
+                <a:ea typeface="微软雅黑" panose="020B0503020204020204" charset="-122"/>
+              </a:endParaRPr>
+            </a:p>
+          </p:txBody>
+        </p:sp>
+        <p:cxnSp>
+          <p:nvCxnSpPr>
+            <p:cNvPr id="83" name="肘形连接符 82"/>
+            <p:cNvCxnSpPr>
+              <a:stCxn id="79" idx="2"/>
+              <a:endCxn id="82" idx="0"/>
+            </p:cNvCxnSpPr>
+            <p:nvPr/>
+          </p:nvCxnSpPr>
+          <p:spPr>
+            <a:xfrm rot="5400000" flipV="1">
+              <a:off x="7910" y="6431"/>
+              <a:ext cx="480" cy="1822"/>
+            </a:xfrm>
+            <a:prstGeom prst="bentConnector3">
+              <a:avLst>
+                <a:gd name="adj1" fmla="val 50000"/>
+              </a:avLst>
+            </a:prstGeom>
+            <a:ln w="19050">
+              <a:solidFill>
+                <a:schemeClr val="tx1"/>
+              </a:solidFill>
+              <a:tailEnd type="triangle"/>
+            </a:ln>
+          </p:spPr>
+          <p:style>
+            <a:lnRef idx="2">
+              <a:schemeClr val="accent1"/>
+            </a:lnRef>
+            <a:fillRef idx="0">
+              <a:srgbClr val="FFFFFF"/>
+            </a:fillRef>
+            <a:effectRef idx="0">
+              <a:srgbClr val="FFFFFF"/>
+            </a:effectRef>
+            <a:fontRef idx="minor">
+              <a:schemeClr val="tx1"/>
+            </a:fontRef>
+          </p:style>
+        </p:cxnSp>
+        <p:cxnSp>
+          <p:nvCxnSpPr>
+            <p:cNvPr id="86" name="直接箭头连接符 85"/>
+            <p:cNvCxnSpPr>
+              <a:stCxn id="82" idx="2"/>
+              <a:endCxn id="58" idx="0"/>
+            </p:cNvCxnSpPr>
+            <p:nvPr/>
+          </p:nvCxnSpPr>
+          <p:spPr>
+            <a:xfrm>
+              <a:off x="9061" y="8845"/>
+              <a:ext cx="0" cy="341"/>
+            </a:xfrm>
+            <a:prstGeom prst="straightConnector1">
+              <a:avLst/>
+            </a:prstGeom>
+            <a:ln w="19050">
+              <a:solidFill>
+                <a:schemeClr val="tx1"/>
+              </a:solidFill>
+              <a:tailEnd type="triangle"/>
+            </a:ln>
+          </p:spPr>
+          <p:style>
+            <a:lnRef idx="2">
+              <a:schemeClr val="accent1"/>
+            </a:lnRef>
+            <a:fillRef idx="0">
+              <a:srgbClr val="FFFFFF"/>
+            </a:fillRef>
+            <a:effectRef idx="0">
+              <a:srgbClr val="FFFFFF"/>
+            </a:effectRef>
+            <a:fontRef idx="minor">
+              <a:schemeClr val="tx1"/>
+            </a:fontRef>
+          </p:style>
+        </p:cxnSp>
+      </p:grpSp>
+    </p:spTree>
+  </p:cSld>
+  <p:clrMapOvr>
+    <a:masterClrMapping/>
+  </p:clrMapOvr>
+</p:sld>
+</file>
+
 <file path=ppt/tags/tag1.xml><?xml version="1.0" encoding="utf-8"?>
 <p:tagLst xmlns:p="http://schemas.openxmlformats.org/presentationml/2006/main">
   <p:tag name="KSO_DOCER_RESOURCE_TRACE_INFO" val="{&quot;id&quot;:&quot;50032351&quot;,&quot;origin&quot;:0,&quot;type&quot;:&quot;icons&quot;,&quot;user&quot;:&quot;594548642&quot;}"/>
@@ -7802,7 +10237,19 @@
 
 <file path=ppt/tags/tag2.xml><?xml version="1.0" encoding="utf-8"?>
 <p:tagLst xmlns:p="http://schemas.openxmlformats.org/presentationml/2006/main">
-  <p:tag name="resource_record_key" val="{&quot;10&quot;:[50032351]}"/>
+  <p:tag name="KSO_DOCER_RESOURCE_TRACE_INFO" val="{&quot;id&quot;:&quot;50062380&quot;,&quot;origin&quot;:0,&quot;type&quot;:&quot;icons&quot;,&quot;user&quot;:&quot;594548642&quot;}"/>
+</p:tagLst>
+</file>
+
+<file path=ppt/tags/tag3.xml><?xml version="1.0" encoding="utf-8"?>
+<p:tagLst xmlns:p="http://schemas.openxmlformats.org/presentationml/2006/main">
+  <p:tag name="KSO_DOCER_RESOURCE_TRACE_INFO" val="{&quot;id&quot;:&quot;50062380&quot;,&quot;origin&quot;:0,&quot;type&quot;:&quot;icons&quot;,&quot;user&quot;:&quot;594548642&quot;}"/>
+</p:tagLst>
+</file>
+
+<file path=ppt/tags/tag4.xml><?xml version="1.0" encoding="utf-8"?>
+<p:tagLst xmlns:p="http://schemas.openxmlformats.org/presentationml/2006/main">
+  <p:tag name="resource_record_key" val="{&quot;10&quot;:[50032351,50062380]}"/>
 </p:tagLst>
 </file>
 
